--- a/Layout_de_transi__o_entre_designs.pptx
+++ b/Layout_de_transi__o_entre_designs.pptx
@@ -1170,1409 +1170,44 @@
           </a:p>
         </p:txBody>
       </p:sp>
-      <p:sp>
-        <p:nvSpPr>
-          <p:cNvPr id="10" name="Shape 8"/>
-          <p:cNvSpPr/>
-          <p:nvPr/>
-        </p:nvSpPr>
+      <p:pic>
+        <p:nvPicPr>
+          <p:cNvPr id="10" name="Image 0" descr="preencoded.png">    </p:cNvPr>
+          <p:cNvPicPr>
+            <a:picLocks noChangeAspect="1"/>
+          </p:cNvPicPr>
+          <p:nvPr/>
+        </p:nvPicPr>
+        <p:blipFill>
+          <a:blip r:embed="rId1"/>
+          <a:stretch>
+            <a:fillRect/>
+          </a:stretch>
+        </p:blipFill>
         <p:spPr>
           <a:xfrm>
             <a:off x="457200" y="1276350"/>
-            <a:ext cx="2087612" cy="943868"/>
-          </a:xfrm>
-          <a:prstGeom prst="rect">
-            <a:avLst/>
-          </a:prstGeom>
-          <a:solidFill>
-            <a:srgbClr val="0F2568"/>
-          </a:solidFill>
-          <a:ln/>
-        </p:spPr>
-      </p:sp>
-      <p:sp>
-        <p:nvSpPr>
-          <p:cNvPr id="11" name="Shape 9"/>
-          <p:cNvSpPr/>
-          <p:nvPr/>
-        </p:nvSpPr>
-        <p:spPr>
-          <a:xfrm>
-            <a:off x="723900" y="1409700"/>
-            <a:ext cx="247650" cy="247650"/>
-          </a:xfrm>
-          <a:prstGeom prst="ellipse">
-            <a:avLst/>
-          </a:prstGeom>
-          <a:ln w="9525">
-            <a:solidFill>
-              <a:srgbClr val="9FB0E0"/>
-            </a:solidFill>
-            <a:prstDash val="solid"/>
-          </a:ln>
-        </p:spPr>
-      </p:sp>
-      <p:sp>
-        <p:nvSpPr>
-          <p:cNvPr id="12" name="Text 10"/>
-          <p:cNvSpPr/>
-          <p:nvPr/>
-        </p:nvSpPr>
-        <p:spPr>
-          <a:xfrm>
-            <a:off x="784027" y="1466850"/>
-            <a:ext cx="203448" cy="171450"/>
-          </a:xfrm>
-          <a:prstGeom prst="rect">
-            <a:avLst/>
-          </a:prstGeom>
-          <a:noFill/>
-          <a:ln/>
-        </p:spPr>
-        <p:txBody>
-          <a:bodyPr wrap="square" lIns="25400" tIns="25400" rIns="25400" bIns="25400" rtlCol="0" anchor="t">
-            <a:normAutofit/>
-          </a:bodyPr>
-          <a:lstStyle/>
-          <a:p>
-            <a:pPr algn="l" indent="0" marL="0">
-              <a:buNone/>
-            </a:pPr>
-            <a:r>
-              <a:rPr lang="en-US" sz="900" b="1" dirty="0">
-                <a:solidFill>
-                  <a:srgbClr val="DFE6FB"/>
-                </a:solidFill>
-                <a:latin typeface="Helvetica" pitchFamily="34" charset="0"/>
-                <a:ea typeface="Helvetica" pitchFamily="34" charset="-122"/>
-                <a:cs typeface="Helvetica" pitchFamily="34" charset="-120"/>
-              </a:rPr>
-              <a:t>01</a:t>
-            </a:r>
-            <a:endParaRPr lang="en-US" sz="900" dirty="0"/>
-          </a:p>
-        </p:txBody>
-      </p:sp>
-      <p:sp>
-        <p:nvSpPr>
-          <p:cNvPr id="13" name="Text 11"/>
-          <p:cNvSpPr/>
-          <p:nvPr/>
-        </p:nvSpPr>
-        <p:spPr>
-          <a:xfrm>
-            <a:off x="723900" y="1733550"/>
-            <a:ext cx="1688678" cy="224284"/>
-          </a:xfrm>
-          <a:prstGeom prst="rect">
-            <a:avLst/>
-          </a:prstGeom>
-          <a:noFill/>
-          <a:ln/>
-        </p:spPr>
-        <p:txBody>
-          <a:bodyPr wrap="square" lIns="25400" tIns="25400" rIns="25400" bIns="25400" rtlCol="0" anchor="t">
-            <a:normAutofit/>
-          </a:bodyPr>
-          <a:lstStyle/>
-          <a:p>
-            <a:pPr algn="l" indent="0" marL="0">
-              <a:lnSpc>
-                <a:spcPct val="97750"/>
-              </a:lnSpc>
-              <a:buNone/>
-            </a:pPr>
-            <a:r>
-              <a:rPr lang="en-US" sz="1275" b="1" spc="45" kern="0" dirty="0">
-                <a:solidFill>
-                  <a:srgbClr val="FFFFFF"/>
-                </a:solidFill>
-                <a:latin typeface="Helvetica" pitchFamily="34" charset="0"/>
-                <a:ea typeface="Helvetica" pitchFamily="34" charset="-122"/>
-                <a:cs typeface="Helvetica" pitchFamily="34" charset="-120"/>
-              </a:rPr>
-              <a:t>PRODUTO</a:t>
-            </a:r>
-            <a:endParaRPr lang="en-US" sz="1275" dirty="0"/>
-          </a:p>
-        </p:txBody>
-      </p:sp>
-      <p:sp>
-        <p:nvSpPr>
-          <p:cNvPr id="14" name="Shape 12"/>
-          <p:cNvSpPr/>
-          <p:nvPr/>
-        </p:nvSpPr>
-        <p:spPr>
-          <a:xfrm>
-            <a:off x="2506712" y="1276350"/>
-            <a:ext cx="1909911" cy="943868"/>
-          </a:xfrm>
-          <a:prstGeom prst="rect">
-            <a:avLst/>
-          </a:prstGeom>
-          <a:solidFill>
-            <a:srgbClr val="0F2568"/>
-          </a:solidFill>
-          <a:ln/>
-        </p:spPr>
-      </p:sp>
-      <p:sp>
-        <p:nvSpPr>
-          <p:cNvPr id="15" name="Shape 13"/>
-          <p:cNvSpPr/>
-          <p:nvPr/>
-        </p:nvSpPr>
-        <p:spPr>
-          <a:xfrm>
-            <a:off x="2773412" y="1409700"/>
-            <a:ext cx="247650" cy="247650"/>
-          </a:xfrm>
-          <a:prstGeom prst="ellipse">
-            <a:avLst/>
-          </a:prstGeom>
-          <a:ln w="9525">
-            <a:solidFill>
-              <a:srgbClr val="9FB0E0"/>
-            </a:solidFill>
-            <a:prstDash val="solid"/>
-          </a:ln>
-        </p:spPr>
-      </p:sp>
-      <p:sp>
-        <p:nvSpPr>
-          <p:cNvPr id="16" name="Text 14"/>
-          <p:cNvSpPr/>
-          <p:nvPr/>
-        </p:nvSpPr>
-        <p:spPr>
-          <a:xfrm>
-            <a:off x="2833539" y="1466850"/>
-            <a:ext cx="203448" cy="171450"/>
-          </a:xfrm>
-          <a:prstGeom prst="rect">
-            <a:avLst/>
-          </a:prstGeom>
-          <a:noFill/>
-          <a:ln/>
-        </p:spPr>
-        <p:txBody>
-          <a:bodyPr wrap="square" lIns="25400" tIns="25400" rIns="25400" bIns="25400" rtlCol="0" anchor="t">
-            <a:normAutofit/>
-          </a:bodyPr>
-          <a:lstStyle/>
-          <a:p>
-            <a:pPr algn="l" indent="0" marL="0">
-              <a:buNone/>
-            </a:pPr>
-            <a:r>
-              <a:rPr lang="en-US" sz="900" b="1" dirty="0">
-                <a:solidFill>
-                  <a:srgbClr val="DFE6FB"/>
-                </a:solidFill>
-                <a:latin typeface="Helvetica" pitchFamily="34" charset="0"/>
-                <a:ea typeface="Helvetica" pitchFamily="34" charset="-122"/>
-                <a:cs typeface="Helvetica" pitchFamily="34" charset="-120"/>
-              </a:rPr>
-              <a:t>02</a:t>
-            </a:r>
-            <a:endParaRPr lang="en-US" sz="900" dirty="0"/>
-          </a:p>
-        </p:txBody>
-      </p:sp>
-      <p:sp>
-        <p:nvSpPr>
-          <p:cNvPr id="17" name="Text 15"/>
-          <p:cNvSpPr/>
-          <p:nvPr/>
-        </p:nvSpPr>
-        <p:spPr>
-          <a:xfrm>
-            <a:off x="2773412" y="1733550"/>
-            <a:ext cx="1493207" cy="224284"/>
-          </a:xfrm>
-          <a:prstGeom prst="rect">
-            <a:avLst/>
-          </a:prstGeom>
-          <a:noFill/>
-          <a:ln/>
-        </p:spPr>
-        <p:txBody>
-          <a:bodyPr wrap="square" lIns="25400" tIns="25400" rIns="25400" bIns="25400" rtlCol="0" anchor="t">
-            <a:normAutofit/>
-          </a:bodyPr>
-          <a:lstStyle/>
-          <a:p>
-            <a:pPr algn="l" indent="0" marL="0">
-              <a:lnSpc>
-                <a:spcPct val="97750"/>
-              </a:lnSpc>
-              <a:buNone/>
-            </a:pPr>
-            <a:r>
-              <a:rPr lang="en-US" sz="1275" b="1" spc="45" kern="0" dirty="0">
-                <a:solidFill>
-                  <a:srgbClr val="FFFFFF"/>
-                </a:solidFill>
-                <a:latin typeface="Helvetica" pitchFamily="34" charset="0"/>
-                <a:ea typeface="Helvetica" pitchFamily="34" charset="-122"/>
-                <a:cs typeface="Helvetica" pitchFamily="34" charset="-120"/>
-              </a:rPr>
-              <a:t>CONTRATAÇÃO</a:t>
-            </a:r>
-            <a:endParaRPr lang="en-US" sz="1275" dirty="0"/>
-          </a:p>
-        </p:txBody>
-      </p:sp>
-      <p:sp>
-        <p:nvSpPr>
-          <p:cNvPr id="18" name="Shape 16"/>
-          <p:cNvSpPr/>
-          <p:nvPr/>
-        </p:nvSpPr>
-        <p:spPr>
-          <a:xfrm>
-            <a:off x="4378523" y="1276350"/>
-            <a:ext cx="1910060" cy="943868"/>
-          </a:xfrm>
-          <a:prstGeom prst="rect">
-            <a:avLst/>
-          </a:prstGeom>
-          <a:solidFill>
-            <a:srgbClr val="0F2568"/>
-          </a:solidFill>
-          <a:ln/>
-        </p:spPr>
-      </p:sp>
-      <p:sp>
-        <p:nvSpPr>
-          <p:cNvPr id="19" name="Shape 17"/>
-          <p:cNvSpPr/>
-          <p:nvPr/>
-        </p:nvSpPr>
-        <p:spPr>
-          <a:xfrm>
-            <a:off x="4645223" y="1409700"/>
-            <a:ext cx="247650" cy="247650"/>
-          </a:xfrm>
-          <a:prstGeom prst="ellipse">
-            <a:avLst/>
-          </a:prstGeom>
-          <a:ln w="9525">
-            <a:solidFill>
-              <a:srgbClr val="9FB0E0"/>
-            </a:solidFill>
-            <a:prstDash val="solid"/>
-          </a:ln>
-        </p:spPr>
-      </p:sp>
-      <p:sp>
-        <p:nvSpPr>
-          <p:cNvPr id="20" name="Text 18"/>
-          <p:cNvSpPr/>
-          <p:nvPr/>
-        </p:nvSpPr>
-        <p:spPr>
-          <a:xfrm>
-            <a:off x="4705350" y="1466850"/>
-            <a:ext cx="203448" cy="171450"/>
-          </a:xfrm>
-          <a:prstGeom prst="rect">
-            <a:avLst/>
-          </a:prstGeom>
-          <a:noFill/>
-          <a:ln/>
-        </p:spPr>
-        <p:txBody>
-          <a:bodyPr wrap="square" lIns="25400" tIns="25400" rIns="25400" bIns="25400" rtlCol="0" anchor="t">
-            <a:normAutofit/>
-          </a:bodyPr>
-          <a:lstStyle/>
-          <a:p>
-            <a:pPr algn="l" indent="0" marL="0">
-              <a:buNone/>
-            </a:pPr>
-            <a:r>
-              <a:rPr lang="en-US" sz="900" b="1" dirty="0">
-                <a:solidFill>
-                  <a:srgbClr val="DFE6FB"/>
-                </a:solidFill>
-                <a:latin typeface="Helvetica" pitchFamily="34" charset="0"/>
-                <a:ea typeface="Helvetica" pitchFamily="34" charset="-122"/>
-                <a:cs typeface="Helvetica" pitchFamily="34" charset="-120"/>
-              </a:rPr>
-              <a:t>03</a:t>
-            </a:r>
-            <a:endParaRPr lang="en-US" sz="900" dirty="0"/>
-          </a:p>
-        </p:txBody>
-      </p:sp>
-      <p:sp>
-        <p:nvSpPr>
-          <p:cNvPr id="21" name="Shape 19"/>
-          <p:cNvSpPr/>
-          <p:nvPr/>
-        </p:nvSpPr>
-        <p:spPr>
-          <a:xfrm>
-            <a:off x="5291138" y="1438275"/>
-            <a:ext cx="711696" cy="190500"/>
+            <a:ext cx="17373600" cy="921841"/>
+          </a:xfrm>
+          <a:prstGeom prst="rect">
+            <a:avLst/>
+          </a:prstGeom>
+        </p:spPr>
+      </p:pic>
+      <p:sp>
+        <p:nvSpPr>
+          <p:cNvPr id="11" name="Shape 8"/>
+          <p:cNvSpPr/>
+          <p:nvPr/>
+        </p:nvSpPr>
+        <p:spPr>
+          <a:xfrm>
+            <a:off x="457200" y="2293441"/>
+            <a:ext cx="1954262" cy="803077"/>
           </a:xfrm>
           <a:prstGeom prst="roundRect">
             <a:avLst>
-              <a:gd name="adj" fmla="val 50000"/>
-            </a:avLst>
-          </a:prstGeom>
-          <a:solidFill>
-            <a:srgbClr val="FFFFFF">
-              <a:alpha val="14000"/>
-            </a:srgbClr>
-          </a:solidFill>
-          <a:ln/>
-        </p:spPr>
-      </p:sp>
-      <p:sp>
-        <p:nvSpPr>
-          <p:cNvPr id="22" name="Text 20"/>
-          <p:cNvSpPr/>
-          <p:nvPr/>
-        </p:nvSpPr>
-        <p:spPr>
-          <a:xfrm>
-            <a:off x="5367337" y="1466850"/>
-            <a:ext cx="635496" cy="171450"/>
-          </a:xfrm>
-          <a:prstGeom prst="rect">
-            <a:avLst/>
-          </a:prstGeom>
-          <a:noFill/>
-          <a:ln/>
-        </p:spPr>
-        <p:txBody>
-          <a:bodyPr wrap="square" lIns="25400" tIns="25400" rIns="25400" bIns="25400" rtlCol="0" anchor="t">
-            <a:normAutofit/>
-          </a:bodyPr>
-          <a:lstStyle/>
-          <a:p>
-            <a:pPr algn="l" indent="0" marL="0">
-              <a:buNone/>
-            </a:pPr>
-            <a:r>
-              <a:rPr lang="en-US" sz="900" b="1" dirty="0">
-                <a:solidFill>
-                  <a:srgbClr val="DFE6FB"/>
-                </a:solidFill>
-                <a:latin typeface="Helvetica" pitchFamily="34" charset="0"/>
-                <a:ea typeface="Helvetica" pitchFamily="34" charset="-122"/>
-                <a:cs typeface="Helvetica" pitchFamily="34" charset="-120"/>
-              </a:rPr>
-              <a:t>4 </a:t>
-            </a:r>
-            <a:pPr algn="l" indent="0" marL="0">
-              <a:buNone/>
-            </a:pPr>
-            <a:r>
-              <a:rPr lang="en-US" sz="900" b="1" dirty="0">
-                <a:solidFill>
-                  <a:srgbClr val="DFE6FB"/>
-                </a:solidFill>
-                <a:highlight>
-                  <a:srgbClr val="FFFFFF"/>
-                </a:highlight>
-                <a:latin typeface="Helvetica" pitchFamily="34" charset="0"/>
-                <a:ea typeface="Helvetica" pitchFamily="34" charset="-122"/>
-                <a:cs typeface="Helvetica" pitchFamily="34" charset="-120"/>
-              </a:rPr>
-              <a:t>a validar</a:t>
-            </a:r>
-            <a:endParaRPr lang="en-US" sz="900" dirty="0"/>
-          </a:p>
-        </p:txBody>
-      </p:sp>
-      <p:sp>
-        <p:nvSpPr>
-          <p:cNvPr id="23" name="Text 21"/>
-          <p:cNvSpPr/>
-          <p:nvPr/>
-        </p:nvSpPr>
-        <p:spPr>
-          <a:xfrm>
-            <a:off x="4645223" y="1733550"/>
-            <a:ext cx="1493371" cy="224284"/>
-          </a:xfrm>
-          <a:prstGeom prst="rect">
-            <a:avLst/>
-          </a:prstGeom>
-          <a:noFill/>
-          <a:ln/>
-        </p:spPr>
-        <p:txBody>
-          <a:bodyPr wrap="square" lIns="25400" tIns="25400" rIns="25400" bIns="25400" rtlCol="0" anchor="t">
-            <a:normAutofit/>
-          </a:bodyPr>
-          <a:lstStyle/>
-          <a:p>
-            <a:pPr algn="l" indent="0" marL="0">
-              <a:lnSpc>
-                <a:spcPct val="97750"/>
-              </a:lnSpc>
-              <a:buNone/>
-            </a:pPr>
-            <a:r>
-              <a:rPr lang="en-US" sz="1275" b="1" spc="45" kern="0" dirty="0">
-                <a:solidFill>
-                  <a:srgbClr val="FFFFFF"/>
-                </a:solidFill>
-                <a:latin typeface="Helvetica" pitchFamily="34" charset="0"/>
-                <a:ea typeface="Helvetica" pitchFamily="34" charset="-122"/>
-                <a:cs typeface="Helvetica" pitchFamily="34" charset="-120"/>
-              </a:rPr>
-              <a:t>CONFIGURAÇÃO</a:t>
-            </a:r>
-            <a:endParaRPr lang="en-US" sz="1275" dirty="0"/>
-          </a:p>
-        </p:txBody>
-      </p:sp>
-      <p:sp>
-        <p:nvSpPr>
-          <p:cNvPr id="24" name="Shape 22"/>
-          <p:cNvSpPr/>
-          <p:nvPr/>
-        </p:nvSpPr>
-        <p:spPr>
-          <a:xfrm>
-            <a:off x="6250484" y="1276350"/>
-            <a:ext cx="1909911" cy="943868"/>
-          </a:xfrm>
-          <a:prstGeom prst="rect">
-            <a:avLst/>
-          </a:prstGeom>
-          <a:solidFill>
-            <a:srgbClr val="0F2568"/>
-          </a:solidFill>
-          <a:ln/>
-        </p:spPr>
-      </p:sp>
-      <p:sp>
-        <p:nvSpPr>
-          <p:cNvPr id="25" name="Shape 23"/>
-          <p:cNvSpPr/>
-          <p:nvPr/>
-        </p:nvSpPr>
-        <p:spPr>
-          <a:xfrm>
-            <a:off x="6517184" y="1409700"/>
-            <a:ext cx="247650" cy="247650"/>
-          </a:xfrm>
-          <a:prstGeom prst="ellipse">
-            <a:avLst/>
-          </a:prstGeom>
-          <a:ln w="9525">
-            <a:solidFill>
-              <a:srgbClr val="9FB0E0"/>
-            </a:solidFill>
-            <a:prstDash val="solid"/>
-          </a:ln>
-        </p:spPr>
-      </p:sp>
-      <p:sp>
-        <p:nvSpPr>
-          <p:cNvPr id="26" name="Text 24"/>
-          <p:cNvSpPr/>
-          <p:nvPr/>
-        </p:nvSpPr>
-        <p:spPr>
-          <a:xfrm>
-            <a:off x="6577310" y="1466850"/>
-            <a:ext cx="203448" cy="171450"/>
-          </a:xfrm>
-          <a:prstGeom prst="rect">
-            <a:avLst/>
-          </a:prstGeom>
-          <a:noFill/>
-          <a:ln/>
-        </p:spPr>
-        <p:txBody>
-          <a:bodyPr wrap="square" lIns="25400" tIns="25400" rIns="25400" bIns="25400" rtlCol="0" anchor="t">
-            <a:normAutofit/>
-          </a:bodyPr>
-          <a:lstStyle/>
-          <a:p>
-            <a:pPr algn="l" indent="0" marL="0">
-              <a:buNone/>
-            </a:pPr>
-            <a:r>
-              <a:rPr lang="en-US" sz="900" b="1" dirty="0">
-                <a:solidFill>
-                  <a:srgbClr val="DFE6FB"/>
-                </a:solidFill>
-                <a:latin typeface="Helvetica" pitchFamily="34" charset="0"/>
-                <a:ea typeface="Helvetica" pitchFamily="34" charset="-122"/>
-                <a:cs typeface="Helvetica" pitchFamily="34" charset="-120"/>
-              </a:rPr>
-              <a:t>04</a:t>
-            </a:r>
-            <a:endParaRPr lang="en-US" sz="900" dirty="0"/>
-          </a:p>
-        </p:txBody>
-      </p:sp>
-      <p:sp>
-        <p:nvSpPr>
-          <p:cNvPr id="27" name="Text 25"/>
-          <p:cNvSpPr/>
-          <p:nvPr/>
-        </p:nvSpPr>
-        <p:spPr>
-          <a:xfrm>
-            <a:off x="6517184" y="1733550"/>
-            <a:ext cx="1433661" cy="410468"/>
-          </a:xfrm>
-          <a:prstGeom prst="rect">
-            <a:avLst/>
-          </a:prstGeom>
-          <a:noFill/>
-          <a:ln/>
-        </p:spPr>
-        <p:txBody>
-          <a:bodyPr wrap="square" lIns="25400" tIns="25400" rIns="25400" bIns="25400" rtlCol="0" anchor="t">
-            <a:normAutofit/>
-          </a:bodyPr>
-          <a:lstStyle/>
-          <a:p>
-            <a:pPr algn="l" indent="0" marL="0">
-              <a:lnSpc>
-                <a:spcPct val="97750"/>
-              </a:lnSpc>
-              <a:buNone/>
-            </a:pPr>
-            <a:r>
-              <a:rPr lang="en-US" sz="1275" b="1" spc="45" kern="0" dirty="0">
-                <a:solidFill>
-                  <a:srgbClr val="FFFFFF"/>
-                </a:solidFill>
-                <a:latin typeface="Helvetica" pitchFamily="34" charset="0"/>
-                <a:ea typeface="Helvetica" pitchFamily="34" charset="-122"/>
-                <a:cs typeface="Helvetica" pitchFamily="34" charset="-120"/>
-              </a:rPr>
-              <a:t>GATILHO DE FATURAMENTO</a:t>
-            </a:r>
-            <a:endParaRPr lang="en-US" sz="1275" dirty="0"/>
-          </a:p>
-        </p:txBody>
-      </p:sp>
-      <p:sp>
-        <p:nvSpPr>
-          <p:cNvPr id="28" name="Shape 26"/>
-          <p:cNvSpPr/>
-          <p:nvPr/>
-        </p:nvSpPr>
-        <p:spPr>
-          <a:xfrm>
-            <a:off x="8122295" y="1276350"/>
-            <a:ext cx="1910060" cy="943868"/>
-          </a:xfrm>
-          <a:prstGeom prst="rect">
-            <a:avLst/>
-          </a:prstGeom>
-          <a:solidFill>
-            <a:srgbClr val="0F2568"/>
-          </a:solidFill>
-          <a:ln/>
-        </p:spPr>
-      </p:sp>
-      <p:sp>
-        <p:nvSpPr>
-          <p:cNvPr id="29" name="Shape 27"/>
-          <p:cNvSpPr/>
-          <p:nvPr/>
-        </p:nvSpPr>
-        <p:spPr>
-          <a:xfrm>
-            <a:off x="8388995" y="1409700"/>
-            <a:ext cx="247650" cy="247650"/>
-          </a:xfrm>
-          <a:prstGeom prst="ellipse">
-            <a:avLst/>
-          </a:prstGeom>
-          <a:ln w="9525">
-            <a:solidFill>
-              <a:srgbClr val="9FB0E0"/>
-            </a:solidFill>
-            <a:prstDash val="solid"/>
-          </a:ln>
-        </p:spPr>
-      </p:sp>
-      <p:sp>
-        <p:nvSpPr>
-          <p:cNvPr id="30" name="Text 28"/>
-          <p:cNvSpPr/>
-          <p:nvPr/>
-        </p:nvSpPr>
-        <p:spPr>
-          <a:xfrm>
-            <a:off x="8449121" y="1466850"/>
-            <a:ext cx="203448" cy="171450"/>
-          </a:xfrm>
-          <a:prstGeom prst="rect">
-            <a:avLst/>
-          </a:prstGeom>
-          <a:noFill/>
-          <a:ln/>
-        </p:spPr>
-        <p:txBody>
-          <a:bodyPr wrap="square" lIns="25400" tIns="25400" rIns="25400" bIns="25400" rtlCol="0" anchor="t">
-            <a:normAutofit/>
-          </a:bodyPr>
-          <a:lstStyle/>
-          <a:p>
-            <a:pPr algn="l" indent="0" marL="0">
-              <a:buNone/>
-            </a:pPr>
-            <a:r>
-              <a:rPr lang="en-US" sz="900" b="1" dirty="0">
-                <a:solidFill>
-                  <a:srgbClr val="DFE6FB"/>
-                </a:solidFill>
-                <a:latin typeface="Helvetica" pitchFamily="34" charset="0"/>
-                <a:ea typeface="Helvetica" pitchFamily="34" charset="-122"/>
-                <a:cs typeface="Helvetica" pitchFamily="34" charset="-120"/>
-              </a:rPr>
-              <a:t>05</a:t>
-            </a:r>
-            <a:endParaRPr lang="en-US" sz="900" dirty="0"/>
-          </a:p>
-        </p:txBody>
-      </p:sp>
-      <p:sp>
-        <p:nvSpPr>
-          <p:cNvPr id="31" name="Text 29"/>
-          <p:cNvSpPr/>
-          <p:nvPr/>
-        </p:nvSpPr>
-        <p:spPr>
-          <a:xfrm>
-            <a:off x="8388995" y="1733550"/>
-            <a:ext cx="1493371" cy="224284"/>
-          </a:xfrm>
-          <a:prstGeom prst="rect">
-            <a:avLst/>
-          </a:prstGeom>
-          <a:noFill/>
-          <a:ln/>
-        </p:spPr>
-        <p:txBody>
-          <a:bodyPr wrap="square" lIns="25400" tIns="25400" rIns="25400" bIns="25400" rtlCol="0" anchor="t">
-            <a:normAutofit/>
-          </a:bodyPr>
-          <a:lstStyle/>
-          <a:p>
-            <a:pPr algn="l" indent="0" marL="0">
-              <a:lnSpc>
-                <a:spcPct val="97750"/>
-              </a:lnSpc>
-              <a:buNone/>
-            </a:pPr>
-            <a:r>
-              <a:rPr lang="en-US" sz="1275" b="1" spc="45" kern="0" dirty="0">
-                <a:solidFill>
-                  <a:srgbClr val="FFFFFF"/>
-                </a:solidFill>
-                <a:latin typeface="Helvetica" pitchFamily="34" charset="0"/>
-                <a:ea typeface="Helvetica" pitchFamily="34" charset="-122"/>
-                <a:cs typeface="Helvetica" pitchFamily="34" charset="-120"/>
-              </a:rPr>
-              <a:t>TARIFAÇÃO</a:t>
-            </a:r>
-            <a:endParaRPr lang="en-US" sz="1275" dirty="0"/>
-          </a:p>
-        </p:txBody>
-      </p:sp>
-      <p:sp>
-        <p:nvSpPr>
-          <p:cNvPr id="32" name="Shape 30"/>
-          <p:cNvSpPr/>
-          <p:nvPr/>
-        </p:nvSpPr>
-        <p:spPr>
-          <a:xfrm>
-            <a:off x="9994255" y="1276350"/>
-            <a:ext cx="1909911" cy="943868"/>
-          </a:xfrm>
-          <a:prstGeom prst="rect">
-            <a:avLst/>
-          </a:prstGeom>
-          <a:solidFill>
-            <a:srgbClr val="0F2568"/>
-          </a:solidFill>
-          <a:ln/>
-        </p:spPr>
-      </p:sp>
-      <p:sp>
-        <p:nvSpPr>
-          <p:cNvPr id="33" name="Shape 31"/>
-          <p:cNvSpPr/>
-          <p:nvPr/>
-        </p:nvSpPr>
-        <p:spPr>
-          <a:xfrm>
-            <a:off x="10260955" y="1409700"/>
-            <a:ext cx="247650" cy="247650"/>
-          </a:xfrm>
-          <a:prstGeom prst="ellipse">
-            <a:avLst/>
-          </a:prstGeom>
-          <a:ln w="9525">
-            <a:solidFill>
-              <a:srgbClr val="9FB0E0"/>
-            </a:solidFill>
-            <a:prstDash val="solid"/>
-          </a:ln>
-        </p:spPr>
-      </p:sp>
-      <p:sp>
-        <p:nvSpPr>
-          <p:cNvPr id="34" name="Text 32"/>
-          <p:cNvSpPr/>
-          <p:nvPr/>
-        </p:nvSpPr>
-        <p:spPr>
-          <a:xfrm>
-            <a:off x="10321082" y="1466850"/>
-            <a:ext cx="203448" cy="171450"/>
-          </a:xfrm>
-          <a:prstGeom prst="rect">
-            <a:avLst/>
-          </a:prstGeom>
-          <a:noFill/>
-          <a:ln/>
-        </p:spPr>
-        <p:txBody>
-          <a:bodyPr wrap="square" lIns="25400" tIns="25400" rIns="25400" bIns="25400" rtlCol="0" anchor="t">
-            <a:normAutofit/>
-          </a:bodyPr>
-          <a:lstStyle/>
-          <a:p>
-            <a:pPr algn="l" indent="0" marL="0">
-              <a:buNone/>
-            </a:pPr>
-            <a:r>
-              <a:rPr lang="en-US" sz="900" b="1" dirty="0">
-                <a:solidFill>
-                  <a:srgbClr val="DFE6FB"/>
-                </a:solidFill>
-                <a:latin typeface="Helvetica" pitchFamily="34" charset="0"/>
-                <a:ea typeface="Helvetica" pitchFamily="34" charset="-122"/>
-                <a:cs typeface="Helvetica" pitchFamily="34" charset="-120"/>
-              </a:rPr>
-              <a:t>06</a:t>
-            </a:r>
-            <a:endParaRPr lang="en-US" sz="900" dirty="0"/>
-          </a:p>
-        </p:txBody>
-      </p:sp>
-      <p:sp>
-        <p:nvSpPr>
-          <p:cNvPr id="35" name="Text 33"/>
-          <p:cNvSpPr/>
-          <p:nvPr/>
-        </p:nvSpPr>
-        <p:spPr>
-          <a:xfrm>
-            <a:off x="10260955" y="1733550"/>
-            <a:ext cx="1493207" cy="224284"/>
-          </a:xfrm>
-          <a:prstGeom prst="rect">
-            <a:avLst/>
-          </a:prstGeom>
-          <a:noFill/>
-          <a:ln/>
-        </p:spPr>
-        <p:txBody>
-          <a:bodyPr wrap="square" lIns="25400" tIns="25400" rIns="25400" bIns="25400" rtlCol="0" anchor="t">
-            <a:normAutofit/>
-          </a:bodyPr>
-          <a:lstStyle/>
-          <a:p>
-            <a:pPr algn="l" indent="0" marL="0">
-              <a:lnSpc>
-                <a:spcPct val="97750"/>
-              </a:lnSpc>
-              <a:buNone/>
-            </a:pPr>
-            <a:r>
-              <a:rPr lang="en-US" sz="1275" b="1" spc="45" kern="0" dirty="0">
-                <a:solidFill>
-                  <a:srgbClr val="FFFFFF"/>
-                </a:solidFill>
-                <a:latin typeface="Helvetica" pitchFamily="34" charset="0"/>
-                <a:ea typeface="Helvetica" pitchFamily="34" charset="-122"/>
-                <a:cs typeface="Helvetica" pitchFamily="34" charset="-120"/>
-              </a:rPr>
-              <a:t>FATURAMENTO</a:t>
-            </a:r>
-            <a:endParaRPr lang="en-US" sz="1275" dirty="0"/>
-          </a:p>
-        </p:txBody>
-      </p:sp>
-      <p:sp>
-        <p:nvSpPr>
-          <p:cNvPr id="36" name="Shape 34"/>
-          <p:cNvSpPr/>
-          <p:nvPr/>
-        </p:nvSpPr>
-        <p:spPr>
-          <a:xfrm>
-            <a:off x="11866066" y="1276350"/>
-            <a:ext cx="1910060" cy="943868"/>
-          </a:xfrm>
-          <a:prstGeom prst="rect">
-            <a:avLst/>
-          </a:prstGeom>
-          <a:solidFill>
-            <a:srgbClr val="0F2568"/>
-          </a:solidFill>
-          <a:ln/>
-        </p:spPr>
-      </p:sp>
-      <p:sp>
-        <p:nvSpPr>
-          <p:cNvPr id="37" name="Shape 35"/>
-          <p:cNvSpPr/>
-          <p:nvPr/>
-        </p:nvSpPr>
-        <p:spPr>
-          <a:xfrm>
-            <a:off x="12132766" y="1409700"/>
-            <a:ext cx="247650" cy="247650"/>
-          </a:xfrm>
-          <a:prstGeom prst="ellipse">
-            <a:avLst/>
-          </a:prstGeom>
-          <a:ln w="9525">
-            <a:solidFill>
-              <a:srgbClr val="9FB0E0"/>
-            </a:solidFill>
-            <a:prstDash val="solid"/>
-          </a:ln>
-        </p:spPr>
-      </p:sp>
-      <p:sp>
-        <p:nvSpPr>
-          <p:cNvPr id="38" name="Text 36"/>
-          <p:cNvSpPr/>
-          <p:nvPr/>
-        </p:nvSpPr>
-        <p:spPr>
-          <a:xfrm>
-            <a:off x="12192893" y="1466850"/>
-            <a:ext cx="203448" cy="171450"/>
-          </a:xfrm>
-          <a:prstGeom prst="rect">
-            <a:avLst/>
-          </a:prstGeom>
-          <a:noFill/>
-          <a:ln/>
-        </p:spPr>
-        <p:txBody>
-          <a:bodyPr wrap="square" lIns="25400" tIns="25400" rIns="25400" bIns="25400" rtlCol="0" anchor="t">
-            <a:normAutofit/>
-          </a:bodyPr>
-          <a:lstStyle/>
-          <a:p>
-            <a:pPr algn="l" indent="0" marL="0">
-              <a:buNone/>
-            </a:pPr>
-            <a:r>
-              <a:rPr lang="en-US" sz="900" b="1" dirty="0">
-                <a:solidFill>
-                  <a:srgbClr val="DFE6FB"/>
-                </a:solidFill>
-                <a:latin typeface="Helvetica" pitchFamily="34" charset="0"/>
-                <a:ea typeface="Helvetica" pitchFamily="34" charset="-122"/>
-                <a:cs typeface="Helvetica" pitchFamily="34" charset="-120"/>
-              </a:rPr>
-              <a:t>07</a:t>
-            </a:r>
-            <a:endParaRPr lang="en-US" sz="900" dirty="0"/>
-          </a:p>
-        </p:txBody>
-      </p:sp>
-      <p:sp>
-        <p:nvSpPr>
-          <p:cNvPr id="39" name="Shape 37"/>
-          <p:cNvSpPr/>
-          <p:nvPr/>
-        </p:nvSpPr>
-        <p:spPr>
-          <a:xfrm>
-            <a:off x="12778680" y="1438275"/>
-            <a:ext cx="711696" cy="190500"/>
-          </a:xfrm>
-          <a:prstGeom prst="roundRect">
-            <a:avLst>
-              <a:gd name="adj" fmla="val 50000"/>
-            </a:avLst>
-          </a:prstGeom>
-          <a:solidFill>
-            <a:srgbClr val="FFFFFF">
-              <a:alpha val="14000"/>
-            </a:srgbClr>
-          </a:solidFill>
-          <a:ln/>
-        </p:spPr>
-      </p:sp>
-      <p:sp>
-        <p:nvSpPr>
-          <p:cNvPr id="40" name="Text 38"/>
-          <p:cNvSpPr/>
-          <p:nvPr/>
-        </p:nvSpPr>
-        <p:spPr>
-          <a:xfrm>
-            <a:off x="12854880" y="1466850"/>
-            <a:ext cx="635496" cy="171450"/>
-          </a:xfrm>
-          <a:prstGeom prst="rect">
-            <a:avLst/>
-          </a:prstGeom>
-          <a:noFill/>
-          <a:ln/>
-        </p:spPr>
-        <p:txBody>
-          <a:bodyPr wrap="square" lIns="25400" tIns="25400" rIns="25400" bIns="25400" rtlCol="0" anchor="t">
-            <a:normAutofit/>
-          </a:bodyPr>
-          <a:lstStyle/>
-          <a:p>
-            <a:pPr algn="l" indent="0" marL="0">
-              <a:buNone/>
-            </a:pPr>
-            <a:r>
-              <a:rPr lang="en-US" sz="900" b="1" dirty="0">
-                <a:solidFill>
-                  <a:srgbClr val="DFE6FB"/>
-                </a:solidFill>
-                <a:latin typeface="Helvetica" pitchFamily="34" charset="0"/>
-                <a:ea typeface="Helvetica" pitchFamily="34" charset="-122"/>
-                <a:cs typeface="Helvetica" pitchFamily="34" charset="-120"/>
-              </a:rPr>
-              <a:t>5 </a:t>
-            </a:r>
-            <a:pPr algn="l" indent="0" marL="0">
-              <a:buNone/>
-            </a:pPr>
-            <a:r>
-              <a:rPr lang="en-US" sz="900" b="1" dirty="0">
-                <a:solidFill>
-                  <a:srgbClr val="DFE6FB"/>
-                </a:solidFill>
-                <a:highlight>
-                  <a:srgbClr val="FFFFFF"/>
-                </a:highlight>
-                <a:latin typeface="Helvetica" pitchFamily="34" charset="0"/>
-                <a:ea typeface="Helvetica" pitchFamily="34" charset="-122"/>
-                <a:cs typeface="Helvetica" pitchFamily="34" charset="-120"/>
-              </a:rPr>
-              <a:t>a validar</a:t>
-            </a:r>
-            <a:endParaRPr lang="en-US" sz="900" dirty="0"/>
-          </a:p>
-        </p:txBody>
-      </p:sp>
-      <p:sp>
-        <p:nvSpPr>
-          <p:cNvPr id="41" name="Text 39"/>
-          <p:cNvSpPr/>
-          <p:nvPr/>
-        </p:nvSpPr>
-        <p:spPr>
-          <a:xfrm>
-            <a:off x="12132766" y="1733550"/>
-            <a:ext cx="1493371" cy="224284"/>
-          </a:xfrm>
-          <a:prstGeom prst="rect">
-            <a:avLst/>
-          </a:prstGeom>
-          <a:noFill/>
-          <a:ln/>
-        </p:spPr>
-        <p:txBody>
-          <a:bodyPr wrap="square" lIns="25400" tIns="25400" rIns="25400" bIns="25400" rtlCol="0" anchor="t">
-            <a:normAutofit/>
-          </a:bodyPr>
-          <a:lstStyle/>
-          <a:p>
-            <a:pPr algn="l" indent="0" marL="0">
-              <a:lnSpc>
-                <a:spcPct val="97750"/>
-              </a:lnSpc>
-              <a:buNone/>
-            </a:pPr>
-            <a:r>
-              <a:rPr lang="en-US" sz="1275" b="1" spc="45" kern="0" dirty="0">
-                <a:solidFill>
-                  <a:srgbClr val="FFFFFF"/>
-                </a:solidFill>
-                <a:latin typeface="Helvetica" pitchFamily="34" charset="0"/>
-                <a:ea typeface="Helvetica" pitchFamily="34" charset="-122"/>
-                <a:cs typeface="Helvetica" pitchFamily="34" charset="-120"/>
-              </a:rPr>
-              <a:t>DETALHAMENTO</a:t>
-            </a:r>
-            <a:endParaRPr lang="en-US" sz="1275" dirty="0"/>
-          </a:p>
-        </p:txBody>
-      </p:sp>
-      <p:sp>
-        <p:nvSpPr>
-          <p:cNvPr id="42" name="Shape 40"/>
-          <p:cNvSpPr/>
-          <p:nvPr/>
-        </p:nvSpPr>
-        <p:spPr>
-          <a:xfrm>
-            <a:off x="13738027" y="1276350"/>
-            <a:ext cx="1910060" cy="943868"/>
-          </a:xfrm>
-          <a:prstGeom prst="rect">
-            <a:avLst/>
-          </a:prstGeom>
-          <a:solidFill>
-            <a:srgbClr val="0F2568"/>
-          </a:solidFill>
-          <a:ln/>
-        </p:spPr>
-      </p:sp>
-      <p:sp>
-        <p:nvSpPr>
-          <p:cNvPr id="43" name="Shape 41"/>
-          <p:cNvSpPr/>
-          <p:nvPr/>
-        </p:nvSpPr>
-        <p:spPr>
-          <a:xfrm>
-            <a:off x="14004727" y="1409700"/>
-            <a:ext cx="247650" cy="247650"/>
-          </a:xfrm>
-          <a:prstGeom prst="ellipse">
-            <a:avLst/>
-          </a:prstGeom>
-          <a:ln w="9525">
-            <a:solidFill>
-              <a:srgbClr val="9FB0E0"/>
-            </a:solidFill>
-            <a:prstDash val="solid"/>
-          </a:ln>
-        </p:spPr>
-      </p:sp>
-      <p:sp>
-        <p:nvSpPr>
-          <p:cNvPr id="44" name="Text 42"/>
-          <p:cNvSpPr/>
-          <p:nvPr/>
-        </p:nvSpPr>
-        <p:spPr>
-          <a:xfrm>
-            <a:off x="14064853" y="1466850"/>
-            <a:ext cx="203448" cy="171450"/>
-          </a:xfrm>
-          <a:prstGeom prst="rect">
-            <a:avLst/>
-          </a:prstGeom>
-          <a:noFill/>
-          <a:ln/>
-        </p:spPr>
-        <p:txBody>
-          <a:bodyPr wrap="square" lIns="25400" tIns="25400" rIns="25400" bIns="25400" rtlCol="0" anchor="t">
-            <a:normAutofit/>
-          </a:bodyPr>
-          <a:lstStyle/>
-          <a:p>
-            <a:pPr algn="l" indent="0" marL="0">
-              <a:buNone/>
-            </a:pPr>
-            <a:r>
-              <a:rPr lang="en-US" sz="900" b="1" dirty="0">
-                <a:solidFill>
-                  <a:srgbClr val="DFE6FB"/>
-                </a:solidFill>
-                <a:latin typeface="Helvetica" pitchFamily="34" charset="0"/>
-                <a:ea typeface="Helvetica" pitchFamily="34" charset="-122"/>
-                <a:cs typeface="Helvetica" pitchFamily="34" charset="-120"/>
-              </a:rPr>
-              <a:t>08</a:t>
-            </a:r>
-            <a:endParaRPr lang="en-US" sz="900" dirty="0"/>
-          </a:p>
-        </p:txBody>
-      </p:sp>
-      <p:sp>
-        <p:nvSpPr>
-          <p:cNvPr id="45" name="Shape 43"/>
-          <p:cNvSpPr/>
-          <p:nvPr/>
-        </p:nvSpPr>
-        <p:spPr>
-          <a:xfrm>
-            <a:off x="14650641" y="1438275"/>
-            <a:ext cx="711696" cy="190500"/>
-          </a:xfrm>
-          <a:prstGeom prst="roundRect">
-            <a:avLst>
-              <a:gd name="adj" fmla="val 50000"/>
-            </a:avLst>
-          </a:prstGeom>
-          <a:solidFill>
-            <a:srgbClr val="FFFFFF">
-              <a:alpha val="14000"/>
-            </a:srgbClr>
-          </a:solidFill>
-          <a:ln/>
-        </p:spPr>
-      </p:sp>
-      <p:sp>
-        <p:nvSpPr>
-          <p:cNvPr id="46" name="Text 44"/>
-          <p:cNvSpPr/>
-          <p:nvPr/>
-        </p:nvSpPr>
-        <p:spPr>
-          <a:xfrm>
-            <a:off x="14726841" y="1466850"/>
-            <a:ext cx="635496" cy="171450"/>
-          </a:xfrm>
-          <a:prstGeom prst="rect">
-            <a:avLst/>
-          </a:prstGeom>
-          <a:noFill/>
-          <a:ln/>
-        </p:spPr>
-        <p:txBody>
-          <a:bodyPr wrap="square" lIns="25400" tIns="25400" rIns="25400" bIns="25400" rtlCol="0" anchor="t">
-            <a:normAutofit/>
-          </a:bodyPr>
-          <a:lstStyle/>
-          <a:p>
-            <a:pPr algn="l" indent="0" marL="0">
-              <a:buNone/>
-            </a:pPr>
-            <a:r>
-              <a:rPr lang="en-US" sz="900" b="1" dirty="0">
-                <a:solidFill>
-                  <a:srgbClr val="DFE6FB"/>
-                </a:solidFill>
-                <a:latin typeface="Helvetica" pitchFamily="34" charset="0"/>
-                <a:ea typeface="Helvetica" pitchFamily="34" charset="-122"/>
-                <a:cs typeface="Helvetica" pitchFamily="34" charset="-120"/>
-              </a:rPr>
-              <a:t>6 </a:t>
-            </a:r>
-            <a:pPr algn="l" indent="0" marL="0">
-              <a:buNone/>
-            </a:pPr>
-            <a:r>
-              <a:rPr lang="en-US" sz="900" b="1" dirty="0">
-                <a:solidFill>
-                  <a:srgbClr val="DFE6FB"/>
-                </a:solidFill>
-                <a:highlight>
-                  <a:srgbClr val="FFFFFF"/>
-                </a:highlight>
-                <a:latin typeface="Helvetica" pitchFamily="34" charset="0"/>
-                <a:ea typeface="Helvetica" pitchFamily="34" charset="-122"/>
-                <a:cs typeface="Helvetica" pitchFamily="34" charset="-120"/>
-              </a:rPr>
-              <a:t>a validar</a:t>
-            </a:r>
-            <a:endParaRPr lang="en-US" sz="900" dirty="0"/>
-          </a:p>
-        </p:txBody>
-      </p:sp>
-      <p:sp>
-        <p:nvSpPr>
-          <p:cNvPr id="47" name="Text 45"/>
-          <p:cNvSpPr/>
-          <p:nvPr/>
-        </p:nvSpPr>
-        <p:spPr>
-          <a:xfrm>
-            <a:off x="14004727" y="1733550"/>
-            <a:ext cx="1493371" cy="224284"/>
-          </a:xfrm>
-          <a:prstGeom prst="rect">
-            <a:avLst/>
-          </a:prstGeom>
-          <a:noFill/>
-          <a:ln/>
-        </p:spPr>
-        <p:txBody>
-          <a:bodyPr wrap="square" lIns="25400" tIns="25400" rIns="25400" bIns="25400" rtlCol="0" anchor="t">
-            <a:normAutofit/>
-          </a:bodyPr>
-          <a:lstStyle/>
-          <a:p>
-            <a:pPr algn="l" indent="0" marL="0">
-              <a:lnSpc>
-                <a:spcPct val="97750"/>
-              </a:lnSpc>
-              <a:buNone/>
-            </a:pPr>
-            <a:r>
-              <a:rPr lang="en-US" sz="1275" b="1" spc="45" kern="0" dirty="0">
-                <a:solidFill>
-                  <a:srgbClr val="FFFFFF"/>
-                </a:solidFill>
-                <a:latin typeface="Helvetica" pitchFamily="34" charset="0"/>
-                <a:ea typeface="Helvetica" pitchFamily="34" charset="-122"/>
-                <a:cs typeface="Helvetica" pitchFamily="34" charset="-120"/>
-              </a:rPr>
-              <a:t>CANCELAMENTO</a:t>
-            </a:r>
-            <a:endParaRPr lang="en-US" sz="1275" dirty="0"/>
-          </a:p>
-        </p:txBody>
-      </p:sp>
-      <p:sp>
-        <p:nvSpPr>
-          <p:cNvPr id="48" name="Shape 46"/>
-          <p:cNvSpPr/>
-          <p:nvPr/>
-        </p:nvSpPr>
-        <p:spPr>
-          <a:xfrm>
-            <a:off x="15609987" y="1276350"/>
-            <a:ext cx="2354014" cy="943868"/>
-          </a:xfrm>
-          <a:prstGeom prst="rect">
-            <a:avLst/>
-          </a:prstGeom>
-          <a:solidFill>
-            <a:srgbClr val="0F2568"/>
-          </a:solidFill>
-          <a:ln/>
-        </p:spPr>
-      </p:sp>
-      <p:sp>
-        <p:nvSpPr>
-          <p:cNvPr id="49" name="Shape 47"/>
-          <p:cNvSpPr/>
-          <p:nvPr/>
-        </p:nvSpPr>
-        <p:spPr>
-          <a:xfrm>
-            <a:off x="15876687" y="1409700"/>
-            <a:ext cx="247650" cy="247650"/>
-          </a:xfrm>
-          <a:prstGeom prst="ellipse">
-            <a:avLst/>
-          </a:prstGeom>
-          <a:ln w="9525">
-            <a:solidFill>
-              <a:srgbClr val="9FB0E0"/>
-            </a:solidFill>
-            <a:prstDash val="solid"/>
-          </a:ln>
-        </p:spPr>
-      </p:sp>
-      <p:sp>
-        <p:nvSpPr>
-          <p:cNvPr id="50" name="Text 48"/>
-          <p:cNvSpPr/>
-          <p:nvPr/>
-        </p:nvSpPr>
-        <p:spPr>
-          <a:xfrm>
-            <a:off x="15936813" y="1466850"/>
-            <a:ext cx="203448" cy="171450"/>
-          </a:xfrm>
-          <a:prstGeom prst="rect">
-            <a:avLst/>
-          </a:prstGeom>
-          <a:noFill/>
-          <a:ln/>
-        </p:spPr>
-        <p:txBody>
-          <a:bodyPr wrap="square" lIns="25400" tIns="25400" rIns="25400" bIns="25400" rtlCol="0" anchor="t">
-            <a:normAutofit/>
-          </a:bodyPr>
-          <a:lstStyle/>
-          <a:p>
-            <a:pPr algn="l" indent="0" marL="0">
-              <a:buNone/>
-            </a:pPr>
-            <a:r>
-              <a:rPr lang="en-US" sz="900" b="1" dirty="0">
-                <a:solidFill>
-                  <a:srgbClr val="DFE6FB"/>
-                </a:solidFill>
-                <a:latin typeface="Helvetica" pitchFamily="34" charset="0"/>
-                <a:ea typeface="Helvetica" pitchFamily="34" charset="-122"/>
-                <a:cs typeface="Helvetica" pitchFamily="34" charset="-120"/>
-              </a:rPr>
-              <a:t>09</a:t>
-            </a:r>
-            <a:endParaRPr lang="en-US" sz="900" dirty="0"/>
-          </a:p>
-        </p:txBody>
-      </p:sp>
-      <p:sp>
-        <p:nvSpPr>
-          <p:cNvPr id="51" name="Text 49"/>
-          <p:cNvSpPr/>
-          <p:nvPr/>
-        </p:nvSpPr>
-        <p:spPr>
-          <a:xfrm>
-            <a:off x="15876687" y="1733550"/>
-            <a:ext cx="1981721" cy="224284"/>
-          </a:xfrm>
-          <a:prstGeom prst="rect">
-            <a:avLst/>
-          </a:prstGeom>
-          <a:noFill/>
-          <a:ln/>
-        </p:spPr>
-        <p:txBody>
-          <a:bodyPr wrap="square" lIns="25400" tIns="25400" rIns="25400" bIns="25400" rtlCol="0" anchor="t">
-            <a:normAutofit/>
-          </a:bodyPr>
-          <a:lstStyle/>
-          <a:p>
-            <a:pPr algn="l" indent="0" marL="0">
-              <a:lnSpc>
-                <a:spcPct val="97750"/>
-              </a:lnSpc>
-              <a:buNone/>
-            </a:pPr>
-            <a:r>
-              <a:rPr lang="en-US" sz="1275" b="1" spc="45" kern="0" dirty="0">
-                <a:solidFill>
-                  <a:srgbClr val="FFFFFF"/>
-                </a:solidFill>
-                <a:latin typeface="Helvetica" pitchFamily="34" charset="0"/>
-                <a:ea typeface="Helvetica" pitchFamily="34" charset="-122"/>
-                <a:cs typeface="Helvetica" pitchFamily="34" charset="-120"/>
-              </a:rPr>
-              <a:t>COMPLEXIDADE</a:t>
-            </a:r>
-            <a:endParaRPr lang="en-US" sz="1275" dirty="0"/>
-          </a:p>
-        </p:txBody>
-      </p:sp>
-      <p:sp>
-        <p:nvSpPr>
-          <p:cNvPr id="52" name="Shape 50"/>
-          <p:cNvSpPr/>
-          <p:nvPr/>
-        </p:nvSpPr>
-        <p:spPr>
-          <a:xfrm>
-            <a:off x="457200" y="2315468"/>
-            <a:ext cx="1954262" cy="800695"/>
-          </a:xfrm>
-          <a:prstGeom prst="roundRect">
-            <a:avLst>
-              <a:gd name="adj" fmla="val 7138"/>
+              <a:gd name="adj" fmla="val 7116"/>
             </a:avLst>
           </a:prstGeom>
           <a:solidFill>
@@ -2588,13 +1223,13 @@
       </p:sp>
       <p:sp>
         <p:nvSpPr>
-          <p:cNvPr id="53" name="Text 51"/>
-          <p:cNvSpPr/>
-          <p:nvPr/>
-        </p:nvSpPr>
-        <p:spPr>
-          <a:xfrm>
-            <a:off x="581025" y="2615208"/>
+          <p:cNvPr id="12" name="Text 9"/>
+          <p:cNvSpPr/>
+          <p:nvPr/>
+        </p:nvSpPr>
+        <p:spPr>
+          <a:xfrm>
+            <a:off x="581025" y="2594372"/>
             <a:ext cx="1877273" cy="239167"/>
           </a:xfrm>
           <a:prstGeom prst="rect">
@@ -2632,18 +1267,18 @@
       </p:sp>
       <p:sp>
         <p:nvSpPr>
-          <p:cNvPr id="54" name="Shape 52"/>
-          <p:cNvSpPr/>
-          <p:nvPr/>
-        </p:nvSpPr>
-        <p:spPr>
-          <a:xfrm>
-            <a:off x="2506712" y="2315468"/>
-            <a:ext cx="1776561" cy="800695"/>
+          <p:cNvPr id="13" name="Shape 10"/>
+          <p:cNvSpPr/>
+          <p:nvPr/>
+        </p:nvSpPr>
+        <p:spPr>
+          <a:xfrm>
+            <a:off x="2506712" y="2293441"/>
+            <a:ext cx="1776561" cy="803077"/>
           </a:xfrm>
           <a:prstGeom prst="roundRect">
             <a:avLst>
-              <a:gd name="adj" fmla="val 7138"/>
+              <a:gd name="adj" fmla="val 7116"/>
             </a:avLst>
           </a:prstGeom>
           <a:solidFill>
@@ -2659,13 +1294,13 @@
       </p:sp>
       <p:sp>
         <p:nvSpPr>
-          <p:cNvPr id="55" name="Text 53"/>
-          <p:cNvSpPr/>
-          <p:nvPr/>
-        </p:nvSpPr>
-        <p:spPr>
-          <a:xfrm>
-            <a:off x="2630537" y="2621310"/>
+          <p:cNvPr id="14" name="Text 11"/>
+          <p:cNvSpPr/>
+          <p:nvPr/>
+        </p:nvSpPr>
+        <p:spPr>
+          <a:xfrm>
+            <a:off x="2630537" y="2600474"/>
             <a:ext cx="1681802" cy="226963"/>
           </a:xfrm>
           <a:prstGeom prst="rect">
@@ -2703,18 +1338,18 @@
       </p:sp>
       <p:sp>
         <p:nvSpPr>
-          <p:cNvPr id="56" name="Shape 54"/>
-          <p:cNvSpPr/>
-          <p:nvPr/>
-        </p:nvSpPr>
-        <p:spPr>
-          <a:xfrm>
-            <a:off x="4378523" y="2315468"/>
-            <a:ext cx="1776710" cy="800695"/>
+          <p:cNvPr id="15" name="Shape 12"/>
+          <p:cNvSpPr/>
+          <p:nvPr/>
+        </p:nvSpPr>
+        <p:spPr>
+          <a:xfrm>
+            <a:off x="4378523" y="2293441"/>
+            <a:ext cx="1776710" cy="803077"/>
           </a:xfrm>
           <a:prstGeom prst="roundRect">
             <a:avLst>
-              <a:gd name="adj" fmla="val 7138"/>
+              <a:gd name="adj" fmla="val 7116"/>
             </a:avLst>
           </a:prstGeom>
           <a:solidFill>
@@ -2730,13 +1365,13 @@
       </p:sp>
       <p:sp>
         <p:nvSpPr>
-          <p:cNvPr id="57" name="Text 55"/>
-          <p:cNvSpPr/>
-          <p:nvPr/>
-        </p:nvSpPr>
-        <p:spPr>
-          <a:xfrm>
-            <a:off x="4502348" y="2512665"/>
+          <p:cNvPr id="16" name="Text 13"/>
+          <p:cNvSpPr/>
+          <p:nvPr/>
+        </p:nvSpPr>
+        <p:spPr>
+          <a:xfrm>
+            <a:off x="4502348" y="2491829"/>
             <a:ext cx="1681966" cy="226963"/>
           </a:xfrm>
           <a:prstGeom prst="rect">
@@ -2774,13 +1409,13 @@
       </p:sp>
       <p:sp>
         <p:nvSpPr>
-          <p:cNvPr id="58" name="Text 56"/>
-          <p:cNvSpPr/>
-          <p:nvPr/>
-        </p:nvSpPr>
-        <p:spPr>
-          <a:xfrm>
-            <a:off x="4502348" y="2730103"/>
+          <p:cNvPr id="17" name="Text 14"/>
+          <p:cNvSpPr/>
+          <p:nvPr/>
+        </p:nvSpPr>
+        <p:spPr>
+          <a:xfrm>
+            <a:off x="4502348" y="2709267"/>
             <a:ext cx="1681966" cy="226963"/>
           </a:xfrm>
           <a:prstGeom prst="rect">
@@ -2818,18 +1453,18 @@
       </p:sp>
       <p:sp>
         <p:nvSpPr>
-          <p:cNvPr id="59" name="Shape 57"/>
-          <p:cNvSpPr/>
-          <p:nvPr/>
-        </p:nvSpPr>
-        <p:spPr>
-          <a:xfrm>
-            <a:off x="6250484" y="2315468"/>
-            <a:ext cx="1776561" cy="800695"/>
+          <p:cNvPr id="18" name="Shape 15"/>
+          <p:cNvSpPr/>
+          <p:nvPr/>
+        </p:nvSpPr>
+        <p:spPr>
+          <a:xfrm>
+            <a:off x="6250484" y="2293441"/>
+            <a:ext cx="1776561" cy="803077"/>
           </a:xfrm>
           <a:prstGeom prst="roundRect">
             <a:avLst>
-              <a:gd name="adj" fmla="val 7138"/>
+              <a:gd name="adj" fmla="val 7116"/>
             </a:avLst>
           </a:prstGeom>
           <a:solidFill>
@@ -2845,13 +1480,13 @@
       </p:sp>
       <p:sp>
         <p:nvSpPr>
-          <p:cNvPr id="60" name="Text 58"/>
-          <p:cNvSpPr/>
-          <p:nvPr/>
-        </p:nvSpPr>
-        <p:spPr>
-          <a:xfrm>
-            <a:off x="6374309" y="2512665"/>
+          <p:cNvPr id="19" name="Text 16"/>
+          <p:cNvSpPr/>
+          <p:nvPr/>
+        </p:nvSpPr>
+        <p:spPr>
+          <a:xfrm>
+            <a:off x="6374309" y="2491829"/>
             <a:ext cx="1681802" cy="226963"/>
           </a:xfrm>
           <a:prstGeom prst="rect">
@@ -2889,13 +1524,13 @@
       </p:sp>
       <p:sp>
         <p:nvSpPr>
-          <p:cNvPr id="61" name="Text 59"/>
-          <p:cNvSpPr/>
-          <p:nvPr/>
-        </p:nvSpPr>
-        <p:spPr>
-          <a:xfrm>
-            <a:off x="6374309" y="2730103"/>
+          <p:cNvPr id="20" name="Text 17"/>
+          <p:cNvSpPr/>
+          <p:nvPr/>
+        </p:nvSpPr>
+        <p:spPr>
+          <a:xfrm>
+            <a:off x="6374309" y="2709267"/>
             <a:ext cx="1681802" cy="226963"/>
           </a:xfrm>
           <a:prstGeom prst="rect">
@@ -2933,18 +1568,18 @@
       </p:sp>
       <p:sp>
         <p:nvSpPr>
-          <p:cNvPr id="62" name="Shape 60"/>
-          <p:cNvSpPr/>
-          <p:nvPr/>
-        </p:nvSpPr>
-        <p:spPr>
-          <a:xfrm>
-            <a:off x="8122295" y="2315468"/>
-            <a:ext cx="1776710" cy="800695"/>
+          <p:cNvPr id="21" name="Shape 18"/>
+          <p:cNvSpPr/>
+          <p:nvPr/>
+        </p:nvSpPr>
+        <p:spPr>
+          <a:xfrm>
+            <a:off x="8122295" y="2293441"/>
+            <a:ext cx="1776710" cy="803077"/>
           </a:xfrm>
           <a:prstGeom prst="roundRect">
             <a:avLst>
-              <a:gd name="adj" fmla="val 7138"/>
+              <a:gd name="adj" fmla="val 7116"/>
             </a:avLst>
           </a:prstGeom>
           <a:solidFill>
@@ -2960,13 +1595,13 @@
       </p:sp>
       <p:sp>
         <p:nvSpPr>
-          <p:cNvPr id="63" name="Shape 61"/>
-          <p:cNvSpPr/>
-          <p:nvPr/>
-        </p:nvSpPr>
-        <p:spPr>
-          <a:xfrm>
-            <a:off x="8246120" y="2568922"/>
+          <p:cNvPr id="22" name="Shape 19"/>
+          <p:cNvSpPr/>
+          <p:nvPr/>
+        </p:nvSpPr>
+        <p:spPr>
+          <a:xfrm>
+            <a:off x="8246120" y="2548086"/>
             <a:ext cx="76200" cy="76200"/>
           </a:xfrm>
           <a:prstGeom prst="ellipse">
@@ -2980,13 +1615,13 @@
       </p:sp>
       <p:sp>
         <p:nvSpPr>
-          <p:cNvPr id="64" name="Text 62"/>
-          <p:cNvSpPr/>
-          <p:nvPr/>
-        </p:nvSpPr>
-        <p:spPr>
-          <a:xfrm>
-            <a:off x="8379470" y="2540347"/>
+          <p:cNvPr id="23" name="Text 20"/>
+          <p:cNvSpPr/>
+          <p:nvPr/>
+        </p:nvSpPr>
+        <p:spPr>
+          <a:xfrm>
+            <a:off x="8379470" y="2519511"/>
             <a:ext cx="626418" cy="171450"/>
           </a:xfrm>
           <a:prstGeom prst="rect">
@@ -3024,13 +1659,13 @@
       </p:sp>
       <p:sp>
         <p:nvSpPr>
-          <p:cNvPr id="65" name="Text 63"/>
-          <p:cNvSpPr/>
-          <p:nvPr/>
-        </p:nvSpPr>
-        <p:spPr>
-          <a:xfrm>
-            <a:off x="8246120" y="2711797"/>
+          <p:cNvPr id="24" name="Text 21"/>
+          <p:cNvSpPr/>
+          <p:nvPr/>
+        </p:nvSpPr>
+        <p:spPr>
+          <a:xfrm>
+            <a:off x="8246120" y="2690961"/>
             <a:ext cx="1681966" cy="226963"/>
           </a:xfrm>
           <a:prstGeom prst="rect">
@@ -3068,18 +1703,18 @@
       </p:sp>
       <p:sp>
         <p:nvSpPr>
-          <p:cNvPr id="66" name="Shape 64"/>
-          <p:cNvSpPr/>
-          <p:nvPr/>
-        </p:nvSpPr>
-        <p:spPr>
-          <a:xfrm>
-            <a:off x="9994255" y="2315468"/>
-            <a:ext cx="1776561" cy="800695"/>
+          <p:cNvPr id="25" name="Shape 22"/>
+          <p:cNvSpPr/>
+          <p:nvPr/>
+        </p:nvSpPr>
+        <p:spPr>
+          <a:xfrm>
+            <a:off x="9994255" y="2293441"/>
+            <a:ext cx="1776561" cy="803077"/>
           </a:xfrm>
           <a:prstGeom prst="roundRect">
             <a:avLst>
-              <a:gd name="adj" fmla="val 7138"/>
+              <a:gd name="adj" fmla="val 7116"/>
             </a:avLst>
           </a:prstGeom>
           <a:solidFill>
@@ -3095,13 +1730,13 @@
       </p:sp>
       <p:sp>
         <p:nvSpPr>
-          <p:cNvPr id="67" name="Shape 65"/>
-          <p:cNvSpPr/>
-          <p:nvPr/>
-        </p:nvSpPr>
-        <p:spPr>
-          <a:xfrm>
-            <a:off x="10118080" y="2460278"/>
+          <p:cNvPr id="26" name="Shape 23"/>
+          <p:cNvSpPr/>
+          <p:nvPr/>
+        </p:nvSpPr>
+        <p:spPr>
+          <a:xfrm>
+            <a:off x="10118080" y="2439442"/>
             <a:ext cx="76200" cy="76200"/>
           </a:xfrm>
           <a:prstGeom prst="ellipse">
@@ -3115,13 +1750,13 @@
       </p:sp>
       <p:sp>
         <p:nvSpPr>
-          <p:cNvPr id="68" name="Text 66"/>
-          <p:cNvSpPr/>
-          <p:nvPr/>
-        </p:nvSpPr>
-        <p:spPr>
-          <a:xfrm>
-            <a:off x="10251430" y="2431703"/>
+          <p:cNvPr id="27" name="Text 24"/>
+          <p:cNvSpPr/>
+          <p:nvPr/>
+        </p:nvSpPr>
+        <p:spPr>
+          <a:xfrm>
+            <a:off x="10251430" y="2410867"/>
             <a:ext cx="626418" cy="171450"/>
           </a:xfrm>
           <a:prstGeom prst="rect">
@@ -3159,13 +1794,13 @@
       </p:sp>
       <p:sp>
         <p:nvSpPr>
-          <p:cNvPr id="69" name="Text 67"/>
-          <p:cNvSpPr/>
-          <p:nvPr/>
-        </p:nvSpPr>
-        <p:spPr>
-          <a:xfrm>
-            <a:off x="10118080" y="2603153"/>
+          <p:cNvPr id="28" name="Text 25"/>
+          <p:cNvSpPr/>
+          <p:nvPr/>
+        </p:nvSpPr>
+        <p:spPr>
+          <a:xfrm>
+            <a:off x="10118080" y="2582317"/>
             <a:ext cx="1681802" cy="226963"/>
           </a:xfrm>
           <a:prstGeom prst="rect">
@@ -3203,13 +1838,13 @@
       </p:sp>
       <p:sp>
         <p:nvSpPr>
-          <p:cNvPr id="70" name="Text 68"/>
-          <p:cNvSpPr/>
-          <p:nvPr/>
-        </p:nvSpPr>
-        <p:spPr>
-          <a:xfrm>
-            <a:off x="10118080" y="2820591"/>
+          <p:cNvPr id="29" name="Text 26"/>
+          <p:cNvSpPr/>
+          <p:nvPr/>
+        </p:nvSpPr>
+        <p:spPr>
+          <a:xfrm>
+            <a:off x="10118080" y="2799755"/>
             <a:ext cx="1681802" cy="226963"/>
           </a:xfrm>
           <a:prstGeom prst="rect">
@@ -3247,18 +1882,18 @@
       </p:sp>
       <p:sp>
         <p:nvSpPr>
-          <p:cNvPr id="71" name="Shape 69"/>
-          <p:cNvSpPr/>
-          <p:nvPr/>
-        </p:nvSpPr>
-        <p:spPr>
-          <a:xfrm>
-            <a:off x="11866066" y="2315468"/>
-            <a:ext cx="1776710" cy="800695"/>
+          <p:cNvPr id="30" name="Shape 27"/>
+          <p:cNvSpPr/>
+          <p:nvPr/>
+        </p:nvSpPr>
+        <p:spPr>
+          <a:xfrm>
+            <a:off x="11866066" y="2293441"/>
+            <a:ext cx="1776710" cy="803077"/>
           </a:xfrm>
           <a:prstGeom prst="roundRect">
             <a:avLst>
-              <a:gd name="adj" fmla="val 7138"/>
+              <a:gd name="adj" fmla="val 7116"/>
             </a:avLst>
           </a:prstGeom>
           <a:solidFill>
@@ -3274,13 +1909,13 @@
       </p:sp>
       <p:sp>
         <p:nvSpPr>
-          <p:cNvPr id="72" name="Text 70"/>
-          <p:cNvSpPr/>
-          <p:nvPr/>
-        </p:nvSpPr>
-        <p:spPr>
-          <a:xfrm>
-            <a:off x="11989891" y="2512665"/>
+          <p:cNvPr id="31" name="Text 28"/>
+          <p:cNvSpPr/>
+          <p:nvPr/>
+        </p:nvSpPr>
+        <p:spPr>
+          <a:xfrm>
+            <a:off x="11989891" y="2491829"/>
             <a:ext cx="1681966" cy="226963"/>
           </a:xfrm>
           <a:prstGeom prst="rect">
@@ -3318,13 +1953,13 @@
       </p:sp>
       <p:sp>
         <p:nvSpPr>
-          <p:cNvPr id="73" name="Text 71"/>
-          <p:cNvSpPr/>
-          <p:nvPr/>
-        </p:nvSpPr>
-        <p:spPr>
-          <a:xfrm>
-            <a:off x="11989891" y="2730103"/>
+          <p:cNvPr id="32" name="Text 29"/>
+          <p:cNvSpPr/>
+          <p:nvPr/>
+        </p:nvSpPr>
+        <p:spPr>
+          <a:xfrm>
+            <a:off x="11989891" y="2709267"/>
             <a:ext cx="1681966" cy="226963"/>
           </a:xfrm>
           <a:prstGeom prst="rect">
@@ -3362,18 +1997,18 @@
       </p:sp>
       <p:sp>
         <p:nvSpPr>
-          <p:cNvPr id="74" name="Shape 72"/>
-          <p:cNvSpPr/>
-          <p:nvPr/>
-        </p:nvSpPr>
-        <p:spPr>
-          <a:xfrm>
-            <a:off x="13738027" y="2315468"/>
-            <a:ext cx="1776710" cy="800695"/>
+          <p:cNvPr id="33" name="Shape 30"/>
+          <p:cNvSpPr/>
+          <p:nvPr/>
+        </p:nvSpPr>
+        <p:spPr>
+          <a:xfrm>
+            <a:off x="13738027" y="2293441"/>
+            <a:ext cx="1776710" cy="803077"/>
           </a:xfrm>
           <a:prstGeom prst="roundRect">
             <a:avLst>
-              <a:gd name="adj" fmla="val 7138"/>
+              <a:gd name="adj" fmla="val 7116"/>
             </a:avLst>
           </a:prstGeom>
           <a:solidFill>
@@ -3389,13 +2024,13 @@
       </p:sp>
       <p:sp>
         <p:nvSpPr>
-          <p:cNvPr id="75" name="Text 73"/>
-          <p:cNvSpPr/>
-          <p:nvPr/>
-        </p:nvSpPr>
-        <p:spPr>
-          <a:xfrm>
-            <a:off x="13861852" y="2526953"/>
+          <p:cNvPr id="34" name="Text 31"/>
+          <p:cNvSpPr/>
+          <p:nvPr/>
+        </p:nvSpPr>
+        <p:spPr>
+          <a:xfrm>
+            <a:off x="13861852" y="2506117"/>
             <a:ext cx="1605260" cy="415826"/>
           </a:xfrm>
           <a:prstGeom prst="rect">
@@ -3433,18 +2068,18 @@
       </p:sp>
       <p:sp>
         <p:nvSpPr>
-          <p:cNvPr id="76" name="Shape 74"/>
-          <p:cNvSpPr/>
-          <p:nvPr/>
-        </p:nvSpPr>
-        <p:spPr>
-          <a:xfrm>
-            <a:off x="15609987" y="2315468"/>
-            <a:ext cx="2220664" cy="800695"/>
+          <p:cNvPr id="35" name="Shape 32"/>
+          <p:cNvSpPr/>
+          <p:nvPr/>
+        </p:nvSpPr>
+        <p:spPr>
+          <a:xfrm>
+            <a:off x="15609987" y="2293441"/>
+            <a:ext cx="2220664" cy="803077"/>
           </a:xfrm>
           <a:prstGeom prst="roundRect">
             <a:avLst>
-              <a:gd name="adj" fmla="val 7138"/>
+              <a:gd name="adj" fmla="val 7116"/>
             </a:avLst>
           </a:prstGeom>
           <a:solidFill>
@@ -3460,13 +2095,13 @@
       </p:sp>
       <p:sp>
         <p:nvSpPr>
-          <p:cNvPr id="77" name="Text 75"/>
-          <p:cNvSpPr/>
-          <p:nvPr/>
-        </p:nvSpPr>
-        <p:spPr>
-          <a:xfrm>
-            <a:off x="15733812" y="2512665"/>
+          <p:cNvPr id="36" name="Text 33"/>
+          <p:cNvSpPr/>
+          <p:nvPr/>
+        </p:nvSpPr>
+        <p:spPr>
+          <a:xfrm>
+            <a:off x="15733812" y="2491829"/>
             <a:ext cx="2170316" cy="226963"/>
           </a:xfrm>
           <a:prstGeom prst="rect">
@@ -3504,13 +2139,13 @@
       </p:sp>
       <p:sp>
         <p:nvSpPr>
-          <p:cNvPr id="78" name="Text 76"/>
-          <p:cNvSpPr/>
-          <p:nvPr/>
-        </p:nvSpPr>
-        <p:spPr>
-          <a:xfrm>
-            <a:off x="15733812" y="2730103"/>
+          <p:cNvPr id="37" name="Text 34"/>
+          <p:cNvSpPr/>
+          <p:nvPr/>
+        </p:nvSpPr>
+        <p:spPr>
+          <a:xfrm>
+            <a:off x="15733812" y="2709267"/>
             <a:ext cx="2170316" cy="226963"/>
           </a:xfrm>
           <a:prstGeom prst="rect">
@@ -3548,18 +2183,18 @@
       </p:sp>
       <p:sp>
         <p:nvSpPr>
-          <p:cNvPr id="79" name="Shape 77"/>
-          <p:cNvSpPr/>
-          <p:nvPr/>
-        </p:nvSpPr>
-        <p:spPr>
-          <a:xfrm>
-            <a:off x="457200" y="3173313"/>
-            <a:ext cx="1954262" cy="591294"/>
+          <p:cNvPr id="38" name="Shape 35"/>
+          <p:cNvSpPr/>
+          <p:nvPr/>
+        </p:nvSpPr>
+        <p:spPr>
+          <a:xfrm>
+            <a:off x="457200" y="3153668"/>
+            <a:ext cx="1954262" cy="593675"/>
           </a:xfrm>
           <a:prstGeom prst="roundRect">
             <a:avLst>
-              <a:gd name="adj" fmla="val 9665"/>
+              <a:gd name="adj" fmla="val 9626"/>
             </a:avLst>
           </a:prstGeom>
           <a:solidFill>
@@ -3575,13 +2210,13 @@
       </p:sp>
       <p:sp>
         <p:nvSpPr>
-          <p:cNvPr id="80" name="Text 78"/>
-          <p:cNvSpPr/>
-          <p:nvPr/>
-        </p:nvSpPr>
-        <p:spPr>
-          <a:xfrm>
-            <a:off x="581025" y="3368427"/>
+          <p:cNvPr id="39" name="Text 36"/>
+          <p:cNvSpPr/>
+          <p:nvPr/>
+        </p:nvSpPr>
+        <p:spPr>
+          <a:xfrm>
+            <a:off x="581025" y="3349972"/>
             <a:ext cx="1877273" cy="239167"/>
           </a:xfrm>
           <a:prstGeom prst="rect">
@@ -3619,18 +2254,18 @@
       </p:sp>
       <p:sp>
         <p:nvSpPr>
-          <p:cNvPr id="81" name="Shape 79"/>
-          <p:cNvSpPr/>
-          <p:nvPr/>
-        </p:nvSpPr>
-        <p:spPr>
-          <a:xfrm>
-            <a:off x="2506712" y="3173313"/>
-            <a:ext cx="1776561" cy="591294"/>
+          <p:cNvPr id="40" name="Shape 37"/>
+          <p:cNvSpPr/>
+          <p:nvPr/>
+        </p:nvSpPr>
+        <p:spPr>
+          <a:xfrm>
+            <a:off x="2506712" y="3153668"/>
+            <a:ext cx="1776561" cy="593675"/>
           </a:xfrm>
           <a:prstGeom prst="roundRect">
             <a:avLst>
-              <a:gd name="adj" fmla="val 9665"/>
+              <a:gd name="adj" fmla="val 9626"/>
             </a:avLst>
           </a:prstGeom>
           <a:solidFill>
@@ -3646,13 +2281,13 @@
       </p:sp>
       <p:sp>
         <p:nvSpPr>
-          <p:cNvPr id="82" name="Text 80"/>
-          <p:cNvSpPr/>
-          <p:nvPr/>
-        </p:nvSpPr>
-        <p:spPr>
-          <a:xfrm>
-            <a:off x="2630537" y="3374529"/>
+          <p:cNvPr id="41" name="Text 38"/>
+          <p:cNvSpPr/>
+          <p:nvPr/>
+        </p:nvSpPr>
+        <p:spPr>
+          <a:xfrm>
+            <a:off x="2630537" y="3356074"/>
             <a:ext cx="1681802" cy="226963"/>
           </a:xfrm>
           <a:prstGeom prst="rect">
@@ -3690,18 +2325,18 @@
       </p:sp>
       <p:sp>
         <p:nvSpPr>
-          <p:cNvPr id="83" name="Shape 81"/>
-          <p:cNvSpPr/>
-          <p:nvPr/>
-        </p:nvSpPr>
-        <p:spPr>
-          <a:xfrm>
-            <a:off x="4378523" y="3173313"/>
-            <a:ext cx="1776710" cy="591294"/>
+          <p:cNvPr id="42" name="Shape 39"/>
+          <p:cNvSpPr/>
+          <p:nvPr/>
+        </p:nvSpPr>
+        <p:spPr>
+          <a:xfrm>
+            <a:off x="4378523" y="3153668"/>
+            <a:ext cx="1776710" cy="593675"/>
           </a:xfrm>
           <a:prstGeom prst="roundRect">
             <a:avLst>
-              <a:gd name="adj" fmla="val 9665"/>
+              <a:gd name="adj" fmla="val 9626"/>
             </a:avLst>
           </a:prstGeom>
           <a:solidFill>
@@ -3717,13 +2352,13 @@
       </p:sp>
       <p:sp>
         <p:nvSpPr>
-          <p:cNvPr id="84" name="Text 82"/>
-          <p:cNvSpPr/>
-          <p:nvPr/>
-        </p:nvSpPr>
-        <p:spPr>
-          <a:xfrm>
-            <a:off x="4502348" y="3374529"/>
+          <p:cNvPr id="43" name="Text 40"/>
+          <p:cNvSpPr/>
+          <p:nvPr/>
+        </p:nvSpPr>
+        <p:spPr>
+          <a:xfrm>
+            <a:off x="4502348" y="3356074"/>
             <a:ext cx="1681966" cy="226963"/>
           </a:xfrm>
           <a:prstGeom prst="rect">
@@ -3761,18 +2396,18 @@
       </p:sp>
       <p:sp>
         <p:nvSpPr>
-          <p:cNvPr id="85" name="Shape 83"/>
-          <p:cNvSpPr/>
-          <p:nvPr/>
-        </p:nvSpPr>
-        <p:spPr>
-          <a:xfrm>
-            <a:off x="6250484" y="3173313"/>
-            <a:ext cx="1776561" cy="591294"/>
+          <p:cNvPr id="44" name="Shape 41"/>
+          <p:cNvSpPr/>
+          <p:nvPr/>
+        </p:nvSpPr>
+        <p:spPr>
+          <a:xfrm>
+            <a:off x="6250484" y="3153668"/>
+            <a:ext cx="1776561" cy="593675"/>
           </a:xfrm>
           <a:prstGeom prst="roundRect">
             <a:avLst>
-              <a:gd name="adj" fmla="val 9665"/>
+              <a:gd name="adj" fmla="val 9626"/>
             </a:avLst>
           </a:prstGeom>
           <a:solidFill>
@@ -3788,13 +2423,13 @@
       </p:sp>
       <p:sp>
         <p:nvSpPr>
-          <p:cNvPr id="86" name="Text 84"/>
-          <p:cNvSpPr/>
-          <p:nvPr/>
-        </p:nvSpPr>
-        <p:spPr>
-          <a:xfrm>
-            <a:off x="6374309" y="3374529"/>
+          <p:cNvPr id="45" name="Text 42"/>
+          <p:cNvSpPr/>
+          <p:nvPr/>
+        </p:nvSpPr>
+        <p:spPr>
+          <a:xfrm>
+            <a:off x="6374309" y="3356074"/>
             <a:ext cx="1681802" cy="226963"/>
           </a:xfrm>
           <a:prstGeom prst="rect">
@@ -3832,18 +2467,18 @@
       </p:sp>
       <p:sp>
         <p:nvSpPr>
-          <p:cNvPr id="87" name="Shape 85"/>
-          <p:cNvSpPr/>
-          <p:nvPr/>
-        </p:nvSpPr>
-        <p:spPr>
-          <a:xfrm>
-            <a:off x="8122295" y="3173313"/>
-            <a:ext cx="1776710" cy="591294"/>
+          <p:cNvPr id="46" name="Shape 43"/>
+          <p:cNvSpPr/>
+          <p:nvPr/>
+        </p:nvSpPr>
+        <p:spPr>
+          <a:xfrm>
+            <a:off x="8122295" y="3153668"/>
+            <a:ext cx="1776710" cy="593675"/>
           </a:xfrm>
           <a:prstGeom prst="roundRect">
             <a:avLst>
-              <a:gd name="adj" fmla="val 9665"/>
+              <a:gd name="adj" fmla="val 9626"/>
             </a:avLst>
           </a:prstGeom>
           <a:solidFill>
@@ -3859,13 +2494,13 @@
       </p:sp>
       <p:sp>
         <p:nvSpPr>
-          <p:cNvPr id="88" name="Shape 86"/>
-          <p:cNvSpPr/>
-          <p:nvPr/>
-        </p:nvSpPr>
-        <p:spPr>
-          <a:xfrm>
-            <a:off x="8246120" y="3322141"/>
+          <p:cNvPr id="47" name="Shape 44"/>
+          <p:cNvSpPr/>
+          <p:nvPr/>
+        </p:nvSpPr>
+        <p:spPr>
+          <a:xfrm>
+            <a:off x="8246120" y="3303687"/>
             <a:ext cx="76200" cy="76200"/>
           </a:xfrm>
           <a:prstGeom prst="ellipse">
@@ -3879,13 +2514,13 @@
       </p:sp>
       <p:sp>
         <p:nvSpPr>
-          <p:cNvPr id="89" name="Text 87"/>
-          <p:cNvSpPr/>
-          <p:nvPr/>
-        </p:nvSpPr>
-        <p:spPr>
-          <a:xfrm>
-            <a:off x="8379470" y="3293566"/>
+          <p:cNvPr id="48" name="Text 45"/>
+          <p:cNvSpPr/>
+          <p:nvPr/>
+        </p:nvSpPr>
+        <p:spPr>
+          <a:xfrm>
+            <a:off x="8379470" y="3275112"/>
             <a:ext cx="938213" cy="171450"/>
           </a:xfrm>
           <a:prstGeom prst="rect">
@@ -3923,13 +2558,13 @@
       </p:sp>
       <p:sp>
         <p:nvSpPr>
-          <p:cNvPr id="90" name="Text 88"/>
-          <p:cNvSpPr/>
-          <p:nvPr/>
-        </p:nvSpPr>
-        <p:spPr>
-          <a:xfrm>
-            <a:off x="8246120" y="3465016"/>
+          <p:cNvPr id="49" name="Text 46"/>
+          <p:cNvSpPr/>
+          <p:nvPr/>
+        </p:nvSpPr>
+        <p:spPr>
+          <a:xfrm>
+            <a:off x="8246120" y="3446562"/>
             <a:ext cx="1681966" cy="226963"/>
           </a:xfrm>
           <a:prstGeom prst="rect">
@@ -3967,18 +2602,18 @@
       </p:sp>
       <p:sp>
         <p:nvSpPr>
-          <p:cNvPr id="91" name="Shape 89"/>
-          <p:cNvSpPr/>
-          <p:nvPr/>
-        </p:nvSpPr>
-        <p:spPr>
-          <a:xfrm>
-            <a:off x="9994255" y="3173313"/>
-            <a:ext cx="1776561" cy="591294"/>
+          <p:cNvPr id="50" name="Shape 47"/>
+          <p:cNvSpPr/>
+          <p:nvPr/>
+        </p:nvSpPr>
+        <p:spPr>
+          <a:xfrm>
+            <a:off x="9994255" y="3153668"/>
+            <a:ext cx="1776561" cy="593675"/>
           </a:xfrm>
           <a:prstGeom prst="roundRect">
             <a:avLst>
-              <a:gd name="adj" fmla="val 9665"/>
+              <a:gd name="adj" fmla="val 9626"/>
             </a:avLst>
           </a:prstGeom>
           <a:solidFill>
@@ -3994,13 +2629,13 @@
       </p:sp>
       <p:sp>
         <p:nvSpPr>
-          <p:cNvPr id="92" name="Shape 90"/>
-          <p:cNvSpPr/>
-          <p:nvPr/>
-        </p:nvSpPr>
-        <p:spPr>
-          <a:xfrm>
-            <a:off x="10118080" y="3322141"/>
+          <p:cNvPr id="51" name="Shape 48"/>
+          <p:cNvSpPr/>
+          <p:nvPr/>
+        </p:nvSpPr>
+        <p:spPr>
+          <a:xfrm>
+            <a:off x="10118080" y="3303687"/>
             <a:ext cx="76200" cy="76200"/>
           </a:xfrm>
           <a:prstGeom prst="ellipse">
@@ -4014,13 +2649,13 @@
       </p:sp>
       <p:sp>
         <p:nvSpPr>
-          <p:cNvPr id="93" name="Text 91"/>
-          <p:cNvSpPr/>
-          <p:nvPr/>
-        </p:nvSpPr>
-        <p:spPr>
-          <a:xfrm>
-            <a:off x="10251430" y="3293566"/>
+          <p:cNvPr id="52" name="Text 49"/>
+          <p:cNvSpPr/>
+          <p:nvPr/>
+        </p:nvSpPr>
+        <p:spPr>
+          <a:xfrm>
+            <a:off x="10251430" y="3275112"/>
             <a:ext cx="938213" cy="171450"/>
           </a:xfrm>
           <a:prstGeom prst="rect">
@@ -4058,13 +2693,13 @@
       </p:sp>
       <p:sp>
         <p:nvSpPr>
-          <p:cNvPr id="94" name="Text 92"/>
-          <p:cNvSpPr/>
-          <p:nvPr/>
-        </p:nvSpPr>
-        <p:spPr>
-          <a:xfrm>
-            <a:off x="10118080" y="3465016"/>
+          <p:cNvPr id="53" name="Text 50"/>
+          <p:cNvSpPr/>
+          <p:nvPr/>
+        </p:nvSpPr>
+        <p:spPr>
+          <a:xfrm>
+            <a:off x="10118080" y="3446562"/>
             <a:ext cx="1681802" cy="226963"/>
           </a:xfrm>
           <a:prstGeom prst="rect">
@@ -4102,18 +2737,18 @@
       </p:sp>
       <p:sp>
         <p:nvSpPr>
-          <p:cNvPr id="95" name="Shape 93"/>
-          <p:cNvSpPr/>
-          <p:nvPr/>
-        </p:nvSpPr>
-        <p:spPr>
-          <a:xfrm>
-            <a:off x="11866066" y="3173313"/>
-            <a:ext cx="1776710" cy="591294"/>
+          <p:cNvPr id="54" name="Shape 51"/>
+          <p:cNvSpPr/>
+          <p:nvPr/>
+        </p:nvSpPr>
+        <p:spPr>
+          <a:xfrm>
+            <a:off x="11866066" y="3153668"/>
+            <a:ext cx="1776710" cy="593675"/>
           </a:xfrm>
           <a:prstGeom prst="roundRect">
             <a:avLst>
-              <a:gd name="adj" fmla="val 9665"/>
+              <a:gd name="adj" fmla="val 9626"/>
             </a:avLst>
           </a:prstGeom>
           <a:solidFill>
@@ -4129,13 +2764,13 @@
       </p:sp>
       <p:sp>
         <p:nvSpPr>
-          <p:cNvPr id="96" name="Shape 94"/>
-          <p:cNvSpPr/>
-          <p:nvPr/>
-        </p:nvSpPr>
-        <p:spPr>
-          <a:xfrm>
-            <a:off x="11989891" y="3322141"/>
+          <p:cNvPr id="55" name="Shape 52"/>
+          <p:cNvSpPr/>
+          <p:nvPr/>
+        </p:nvSpPr>
+        <p:spPr>
+          <a:xfrm>
+            <a:off x="11989891" y="3303687"/>
             <a:ext cx="76200" cy="76200"/>
           </a:xfrm>
           <a:prstGeom prst="ellipse">
@@ -4149,13 +2784,13 @@
       </p:sp>
       <p:sp>
         <p:nvSpPr>
-          <p:cNvPr id="97" name="Text 95"/>
-          <p:cNvSpPr/>
-          <p:nvPr/>
-        </p:nvSpPr>
-        <p:spPr>
-          <a:xfrm>
-            <a:off x="12123241" y="3293566"/>
+          <p:cNvPr id="56" name="Text 53"/>
+          <p:cNvSpPr/>
+          <p:nvPr/>
+        </p:nvSpPr>
+        <p:spPr>
+          <a:xfrm>
+            <a:off x="12123241" y="3275112"/>
             <a:ext cx="938213" cy="171450"/>
           </a:xfrm>
           <a:prstGeom prst="rect">
@@ -4193,13 +2828,13 @@
       </p:sp>
       <p:sp>
         <p:nvSpPr>
-          <p:cNvPr id="98" name="Text 96"/>
-          <p:cNvSpPr/>
-          <p:nvPr/>
-        </p:nvSpPr>
-        <p:spPr>
-          <a:xfrm>
-            <a:off x="11989891" y="3465016"/>
+          <p:cNvPr id="57" name="Text 54"/>
+          <p:cNvSpPr/>
+          <p:nvPr/>
+        </p:nvSpPr>
+        <p:spPr>
+          <a:xfrm>
+            <a:off x="11989891" y="3446562"/>
             <a:ext cx="1681966" cy="226963"/>
           </a:xfrm>
           <a:prstGeom prst="rect">
@@ -4237,18 +2872,18 @@
       </p:sp>
       <p:sp>
         <p:nvSpPr>
-          <p:cNvPr id="99" name="Shape 97"/>
-          <p:cNvSpPr/>
-          <p:nvPr/>
-        </p:nvSpPr>
-        <p:spPr>
-          <a:xfrm>
-            <a:off x="13738027" y="3173313"/>
-            <a:ext cx="1776710" cy="591294"/>
+          <p:cNvPr id="58" name="Shape 55"/>
+          <p:cNvSpPr/>
+          <p:nvPr/>
+        </p:nvSpPr>
+        <p:spPr>
+          <a:xfrm>
+            <a:off x="13738027" y="3153668"/>
+            <a:ext cx="1776710" cy="593675"/>
           </a:xfrm>
           <a:prstGeom prst="roundRect">
             <a:avLst>
-              <a:gd name="adj" fmla="val 9665"/>
+              <a:gd name="adj" fmla="val 9626"/>
             </a:avLst>
           </a:prstGeom>
           <a:solidFill>
@@ -4264,13 +2899,13 @@
       </p:sp>
       <p:sp>
         <p:nvSpPr>
-          <p:cNvPr id="100" name="Text 98"/>
-          <p:cNvSpPr/>
-          <p:nvPr/>
-        </p:nvSpPr>
-        <p:spPr>
-          <a:xfrm>
-            <a:off x="13861852" y="3280023"/>
+          <p:cNvPr id="59" name="Text 56"/>
+          <p:cNvSpPr/>
+          <p:nvPr/>
+        </p:nvSpPr>
+        <p:spPr>
+          <a:xfrm>
+            <a:off x="13861852" y="3261568"/>
             <a:ext cx="1605260" cy="415826"/>
           </a:xfrm>
           <a:prstGeom prst="rect">
@@ -4308,18 +2943,18 @@
       </p:sp>
       <p:sp>
         <p:nvSpPr>
-          <p:cNvPr id="101" name="Shape 99"/>
-          <p:cNvSpPr/>
-          <p:nvPr/>
-        </p:nvSpPr>
-        <p:spPr>
-          <a:xfrm>
-            <a:off x="15609987" y="3173313"/>
-            <a:ext cx="2220664" cy="591294"/>
+          <p:cNvPr id="60" name="Shape 57"/>
+          <p:cNvSpPr/>
+          <p:nvPr/>
+        </p:nvSpPr>
+        <p:spPr>
+          <a:xfrm>
+            <a:off x="15609987" y="3153668"/>
+            <a:ext cx="2220664" cy="593675"/>
           </a:xfrm>
           <a:prstGeom prst="roundRect">
             <a:avLst>
-              <a:gd name="adj" fmla="val 9665"/>
+              <a:gd name="adj" fmla="val 9626"/>
             </a:avLst>
           </a:prstGeom>
           <a:solidFill>
@@ -4335,13 +2970,13 @@
       </p:sp>
       <p:sp>
         <p:nvSpPr>
-          <p:cNvPr id="102" name="Text 100"/>
-          <p:cNvSpPr/>
-          <p:nvPr/>
-        </p:nvSpPr>
-        <p:spPr>
-          <a:xfrm>
-            <a:off x="15733812" y="3280023"/>
+          <p:cNvPr id="61" name="Text 58"/>
+          <p:cNvSpPr/>
+          <p:nvPr/>
+        </p:nvSpPr>
+        <p:spPr>
+          <a:xfrm>
+            <a:off x="15733812" y="3261568"/>
             <a:ext cx="2049214" cy="415826"/>
           </a:xfrm>
           <a:prstGeom prst="rect">
@@ -4379,18 +3014,18 @@
       </p:sp>
       <p:sp>
         <p:nvSpPr>
-          <p:cNvPr id="103" name="Shape 101"/>
-          <p:cNvSpPr/>
-          <p:nvPr/>
-        </p:nvSpPr>
-        <p:spPr>
-          <a:xfrm>
-            <a:off x="457200" y="3821757"/>
-            <a:ext cx="1954262" cy="808583"/>
+          <p:cNvPr id="62" name="Shape 59"/>
+          <p:cNvSpPr/>
+          <p:nvPr/>
+        </p:nvSpPr>
+        <p:spPr>
+          <a:xfrm>
+            <a:off x="457200" y="3804493"/>
+            <a:ext cx="1954262" cy="810964"/>
           </a:xfrm>
           <a:prstGeom prst="roundRect">
             <a:avLst>
-              <a:gd name="adj" fmla="val 7068"/>
+              <a:gd name="adj" fmla="val 7047"/>
             </a:avLst>
           </a:prstGeom>
           <a:solidFill>
@@ -4406,13 +3041,13 @@
       </p:sp>
       <p:sp>
         <p:nvSpPr>
-          <p:cNvPr id="104" name="Text 102"/>
-          <p:cNvSpPr/>
-          <p:nvPr/>
-        </p:nvSpPr>
-        <p:spPr>
-          <a:xfrm>
-            <a:off x="581025" y="4125516"/>
+          <p:cNvPr id="63" name="Text 60"/>
+          <p:cNvSpPr/>
+          <p:nvPr/>
+        </p:nvSpPr>
+        <p:spPr>
+          <a:xfrm>
+            <a:off x="581025" y="4109442"/>
             <a:ext cx="1877273" cy="239167"/>
           </a:xfrm>
           <a:prstGeom prst="rect">
@@ -4450,18 +3085,18 @@
       </p:sp>
       <p:sp>
         <p:nvSpPr>
-          <p:cNvPr id="105" name="Shape 103"/>
-          <p:cNvSpPr/>
-          <p:nvPr/>
-        </p:nvSpPr>
-        <p:spPr>
-          <a:xfrm>
-            <a:off x="2506712" y="3821757"/>
-            <a:ext cx="1776561" cy="808583"/>
+          <p:cNvPr id="64" name="Shape 61"/>
+          <p:cNvSpPr/>
+          <p:nvPr/>
+        </p:nvSpPr>
+        <p:spPr>
+          <a:xfrm>
+            <a:off x="2506712" y="3804493"/>
+            <a:ext cx="1776561" cy="810964"/>
           </a:xfrm>
           <a:prstGeom prst="roundRect">
             <a:avLst>
-              <a:gd name="adj" fmla="val 7068"/>
+              <a:gd name="adj" fmla="val 7047"/>
             </a:avLst>
           </a:prstGeom>
           <a:solidFill>
@@ -4477,13 +3112,13 @@
       </p:sp>
       <p:sp>
         <p:nvSpPr>
-          <p:cNvPr id="106" name="Text 104"/>
-          <p:cNvSpPr/>
-          <p:nvPr/>
-        </p:nvSpPr>
-        <p:spPr>
-          <a:xfrm>
-            <a:off x="2630537" y="4037112"/>
+          <p:cNvPr id="65" name="Text 62"/>
+          <p:cNvSpPr/>
+          <p:nvPr/>
+        </p:nvSpPr>
+        <p:spPr>
+          <a:xfrm>
+            <a:off x="2630537" y="4021038"/>
             <a:ext cx="1605111" cy="415826"/>
           </a:xfrm>
           <a:prstGeom prst="rect">
@@ -4521,18 +3156,18 @@
       </p:sp>
       <p:sp>
         <p:nvSpPr>
-          <p:cNvPr id="107" name="Shape 105"/>
-          <p:cNvSpPr/>
-          <p:nvPr/>
-        </p:nvSpPr>
-        <p:spPr>
-          <a:xfrm>
-            <a:off x="4378523" y="3821757"/>
-            <a:ext cx="1776710" cy="808583"/>
+          <p:cNvPr id="66" name="Shape 63"/>
+          <p:cNvSpPr/>
+          <p:nvPr/>
+        </p:nvSpPr>
+        <p:spPr>
+          <a:xfrm>
+            <a:off x="4378523" y="3804493"/>
+            <a:ext cx="1776710" cy="810964"/>
           </a:xfrm>
           <a:prstGeom prst="roundRect">
             <a:avLst>
-              <a:gd name="adj" fmla="val 7068"/>
+              <a:gd name="adj" fmla="val 7047"/>
             </a:avLst>
           </a:prstGeom>
           <a:solidFill>
@@ -4548,13 +3183,13 @@
       </p:sp>
       <p:sp>
         <p:nvSpPr>
-          <p:cNvPr id="108" name="Text 106"/>
-          <p:cNvSpPr/>
-          <p:nvPr/>
-        </p:nvSpPr>
-        <p:spPr>
-          <a:xfrm>
-            <a:off x="4502348" y="4037112"/>
+          <p:cNvPr id="67" name="Text 64"/>
+          <p:cNvSpPr/>
+          <p:nvPr/>
+        </p:nvSpPr>
+        <p:spPr>
+          <a:xfrm>
+            <a:off x="4502348" y="4021038"/>
             <a:ext cx="1605260" cy="415826"/>
           </a:xfrm>
           <a:prstGeom prst="rect">
@@ -4592,18 +3227,18 @@
       </p:sp>
       <p:sp>
         <p:nvSpPr>
-          <p:cNvPr id="109" name="Shape 107"/>
-          <p:cNvSpPr/>
-          <p:nvPr/>
-        </p:nvSpPr>
-        <p:spPr>
-          <a:xfrm>
-            <a:off x="6250484" y="3821757"/>
-            <a:ext cx="1776561" cy="808583"/>
+          <p:cNvPr id="68" name="Shape 65"/>
+          <p:cNvSpPr/>
+          <p:nvPr/>
+        </p:nvSpPr>
+        <p:spPr>
+          <a:xfrm>
+            <a:off x="6250484" y="3804493"/>
+            <a:ext cx="1776561" cy="810964"/>
           </a:xfrm>
           <a:prstGeom prst="roundRect">
             <a:avLst>
-              <a:gd name="adj" fmla="val 7068"/>
+              <a:gd name="adj" fmla="val 7047"/>
             </a:avLst>
           </a:prstGeom>
           <a:solidFill>
@@ -4619,13 +3254,13 @@
       </p:sp>
       <p:sp>
         <p:nvSpPr>
-          <p:cNvPr id="110" name="Text 108"/>
-          <p:cNvSpPr/>
-          <p:nvPr/>
-        </p:nvSpPr>
-        <p:spPr>
-          <a:xfrm>
-            <a:off x="6374309" y="4037112"/>
+          <p:cNvPr id="69" name="Text 66"/>
+          <p:cNvSpPr/>
+          <p:nvPr/>
+        </p:nvSpPr>
+        <p:spPr>
+          <a:xfrm>
+            <a:off x="6374309" y="4021038"/>
             <a:ext cx="1605111" cy="415826"/>
           </a:xfrm>
           <a:prstGeom prst="rect">
@@ -4663,18 +3298,18 @@
       </p:sp>
       <p:sp>
         <p:nvSpPr>
-          <p:cNvPr id="111" name="Shape 109"/>
-          <p:cNvSpPr/>
-          <p:nvPr/>
-        </p:nvSpPr>
-        <p:spPr>
-          <a:xfrm>
-            <a:off x="8122295" y="3821757"/>
-            <a:ext cx="1776710" cy="808583"/>
+          <p:cNvPr id="70" name="Shape 67"/>
+          <p:cNvSpPr/>
+          <p:nvPr/>
+        </p:nvSpPr>
+        <p:spPr>
+          <a:xfrm>
+            <a:off x="8122295" y="3804493"/>
+            <a:ext cx="1776710" cy="810964"/>
           </a:xfrm>
           <a:prstGeom prst="roundRect">
             <a:avLst>
-              <a:gd name="adj" fmla="val 7068"/>
+              <a:gd name="adj" fmla="val 7047"/>
             </a:avLst>
           </a:prstGeom>
           <a:solidFill>
@@ -4690,13 +3325,13 @@
       </p:sp>
       <p:sp>
         <p:nvSpPr>
-          <p:cNvPr id="112" name="Shape 110"/>
-          <p:cNvSpPr/>
-          <p:nvPr/>
-        </p:nvSpPr>
-        <p:spPr>
-          <a:xfrm>
-            <a:off x="8246120" y="4079230"/>
+          <p:cNvPr id="71" name="Shape 68"/>
+          <p:cNvSpPr/>
+          <p:nvPr/>
+        </p:nvSpPr>
+        <p:spPr>
+          <a:xfrm>
+            <a:off x="8246120" y="4063157"/>
             <a:ext cx="76200" cy="76200"/>
           </a:xfrm>
           <a:prstGeom prst="ellipse">
@@ -4710,13 +3345,13 @@
       </p:sp>
       <p:sp>
         <p:nvSpPr>
-          <p:cNvPr id="113" name="Text 111"/>
-          <p:cNvSpPr/>
-          <p:nvPr/>
-        </p:nvSpPr>
-        <p:spPr>
-          <a:xfrm>
-            <a:off x="8379470" y="4050655"/>
+          <p:cNvPr id="72" name="Text 69"/>
+          <p:cNvSpPr/>
+          <p:nvPr/>
+        </p:nvSpPr>
+        <p:spPr>
+          <a:xfrm>
+            <a:off x="8379470" y="4034582"/>
             <a:ext cx="938213" cy="171450"/>
           </a:xfrm>
           <a:prstGeom prst="rect">
@@ -4754,13 +3389,13 @@
       </p:sp>
       <p:sp>
         <p:nvSpPr>
-          <p:cNvPr id="114" name="Text 112"/>
-          <p:cNvSpPr/>
-          <p:nvPr/>
-        </p:nvSpPr>
-        <p:spPr>
-          <a:xfrm>
-            <a:off x="8246120" y="4222105"/>
+          <p:cNvPr id="73" name="Text 70"/>
+          <p:cNvSpPr/>
+          <p:nvPr/>
+        </p:nvSpPr>
+        <p:spPr>
+          <a:xfrm>
+            <a:off x="8246120" y="4206032"/>
             <a:ext cx="1681966" cy="226963"/>
           </a:xfrm>
           <a:prstGeom prst="rect">
@@ -4798,18 +3433,18 @@
       </p:sp>
       <p:sp>
         <p:nvSpPr>
-          <p:cNvPr id="115" name="Shape 113"/>
-          <p:cNvSpPr/>
-          <p:nvPr/>
-        </p:nvSpPr>
-        <p:spPr>
-          <a:xfrm>
-            <a:off x="9994255" y="3821757"/>
-            <a:ext cx="1776561" cy="808583"/>
+          <p:cNvPr id="74" name="Shape 71"/>
+          <p:cNvSpPr/>
+          <p:nvPr/>
+        </p:nvSpPr>
+        <p:spPr>
+          <a:xfrm>
+            <a:off x="9994255" y="3804493"/>
+            <a:ext cx="1776561" cy="810964"/>
           </a:xfrm>
           <a:prstGeom prst="roundRect">
             <a:avLst>
-              <a:gd name="adj" fmla="val 7068"/>
+              <a:gd name="adj" fmla="val 7047"/>
             </a:avLst>
           </a:prstGeom>
           <a:solidFill>
@@ -4825,13 +3460,13 @@
       </p:sp>
       <p:sp>
         <p:nvSpPr>
-          <p:cNvPr id="116" name="Text 114"/>
-          <p:cNvSpPr/>
-          <p:nvPr/>
-        </p:nvSpPr>
-        <p:spPr>
-          <a:xfrm>
-            <a:off x="10118080" y="3928467"/>
+          <p:cNvPr id="75" name="Text 72"/>
+          <p:cNvSpPr/>
+          <p:nvPr/>
+        </p:nvSpPr>
+        <p:spPr>
+          <a:xfrm>
+            <a:off x="10118080" y="3912394"/>
             <a:ext cx="1681802" cy="226963"/>
           </a:xfrm>
           <a:prstGeom prst="rect">
@@ -4869,13 +3504,13 @@
       </p:sp>
       <p:sp>
         <p:nvSpPr>
-          <p:cNvPr id="117" name="Text 115"/>
-          <p:cNvSpPr/>
-          <p:nvPr/>
-        </p:nvSpPr>
-        <p:spPr>
-          <a:xfrm>
-            <a:off x="10118080" y="4145905"/>
+          <p:cNvPr id="76" name="Text 73"/>
+          <p:cNvSpPr/>
+          <p:nvPr/>
+        </p:nvSpPr>
+        <p:spPr>
+          <a:xfrm>
+            <a:off x="10118080" y="4129832"/>
             <a:ext cx="1605111" cy="415826"/>
           </a:xfrm>
           <a:prstGeom prst="rect">
@@ -4913,18 +3548,18 @@
       </p:sp>
       <p:sp>
         <p:nvSpPr>
-          <p:cNvPr id="118" name="Shape 116"/>
-          <p:cNvSpPr/>
-          <p:nvPr/>
-        </p:nvSpPr>
-        <p:spPr>
-          <a:xfrm>
-            <a:off x="11866066" y="3821757"/>
-            <a:ext cx="1776710" cy="808583"/>
+          <p:cNvPr id="77" name="Shape 74"/>
+          <p:cNvSpPr/>
+          <p:nvPr/>
+        </p:nvSpPr>
+        <p:spPr>
+          <a:xfrm>
+            <a:off x="11866066" y="3804493"/>
+            <a:ext cx="1776710" cy="810964"/>
           </a:xfrm>
           <a:prstGeom prst="roundRect">
             <a:avLst>
-              <a:gd name="adj" fmla="val 7068"/>
+              <a:gd name="adj" fmla="val 7047"/>
             </a:avLst>
           </a:prstGeom>
           <a:solidFill>
@@ -4940,13 +3575,13 @@
       </p:sp>
       <p:sp>
         <p:nvSpPr>
-          <p:cNvPr id="119" name="Text 117"/>
-          <p:cNvSpPr/>
-          <p:nvPr/>
-        </p:nvSpPr>
-        <p:spPr>
-          <a:xfrm>
-            <a:off x="11989891" y="4131618"/>
+          <p:cNvPr id="78" name="Text 75"/>
+          <p:cNvSpPr/>
+          <p:nvPr/>
+        </p:nvSpPr>
+        <p:spPr>
+          <a:xfrm>
+            <a:off x="11989891" y="4115544"/>
             <a:ext cx="1681966" cy="226963"/>
           </a:xfrm>
           <a:prstGeom prst="rect">
@@ -4984,18 +3619,18 @@
       </p:sp>
       <p:sp>
         <p:nvSpPr>
-          <p:cNvPr id="120" name="Shape 118"/>
-          <p:cNvSpPr/>
-          <p:nvPr/>
-        </p:nvSpPr>
-        <p:spPr>
-          <a:xfrm>
-            <a:off x="13738027" y="3821757"/>
-            <a:ext cx="1776710" cy="808583"/>
+          <p:cNvPr id="79" name="Shape 76"/>
+          <p:cNvSpPr/>
+          <p:nvPr/>
+        </p:nvSpPr>
+        <p:spPr>
+          <a:xfrm>
+            <a:off x="13738027" y="3804493"/>
+            <a:ext cx="1776710" cy="810964"/>
           </a:xfrm>
           <a:prstGeom prst="roundRect">
             <a:avLst>
-              <a:gd name="adj" fmla="val 7068"/>
+              <a:gd name="adj" fmla="val 7047"/>
             </a:avLst>
           </a:prstGeom>
           <a:solidFill>
@@ -5011,13 +3646,13 @@
       </p:sp>
       <p:sp>
         <p:nvSpPr>
-          <p:cNvPr id="121" name="Text 119"/>
-          <p:cNvSpPr/>
-          <p:nvPr/>
-        </p:nvSpPr>
-        <p:spPr>
-          <a:xfrm>
-            <a:off x="13861852" y="4037112"/>
+          <p:cNvPr id="80" name="Text 77"/>
+          <p:cNvSpPr/>
+          <p:nvPr/>
+        </p:nvSpPr>
+        <p:spPr>
+          <a:xfrm>
+            <a:off x="13861852" y="4021038"/>
             <a:ext cx="1605260" cy="415826"/>
           </a:xfrm>
           <a:prstGeom prst="rect">
@@ -5055,18 +3690,18 @@
       </p:sp>
       <p:sp>
         <p:nvSpPr>
-          <p:cNvPr id="122" name="Shape 120"/>
-          <p:cNvSpPr/>
-          <p:nvPr/>
-        </p:nvSpPr>
-        <p:spPr>
-          <a:xfrm>
-            <a:off x="15609987" y="3821757"/>
-            <a:ext cx="2220664" cy="808583"/>
+          <p:cNvPr id="81" name="Shape 78"/>
+          <p:cNvSpPr/>
+          <p:nvPr/>
+        </p:nvSpPr>
+        <p:spPr>
+          <a:xfrm>
+            <a:off x="15609987" y="3804493"/>
+            <a:ext cx="2220664" cy="810964"/>
           </a:xfrm>
           <a:prstGeom prst="roundRect">
             <a:avLst>
-              <a:gd name="adj" fmla="val 7068"/>
+              <a:gd name="adj" fmla="val 7047"/>
             </a:avLst>
           </a:prstGeom>
           <a:solidFill>
@@ -5082,13 +3717,13 @@
       </p:sp>
       <p:sp>
         <p:nvSpPr>
-          <p:cNvPr id="123" name="Text 121"/>
-          <p:cNvSpPr/>
-          <p:nvPr/>
-        </p:nvSpPr>
-        <p:spPr>
-          <a:xfrm>
-            <a:off x="15733812" y="4022824"/>
+          <p:cNvPr id="82" name="Text 79"/>
+          <p:cNvSpPr/>
+          <p:nvPr/>
+        </p:nvSpPr>
+        <p:spPr>
+          <a:xfrm>
+            <a:off x="15733812" y="4006751"/>
             <a:ext cx="2170316" cy="226963"/>
           </a:xfrm>
           <a:prstGeom prst="rect">
@@ -5126,13 +3761,13 @@
       </p:sp>
       <p:sp>
         <p:nvSpPr>
-          <p:cNvPr id="124" name="Text 122"/>
-          <p:cNvSpPr/>
-          <p:nvPr/>
-        </p:nvSpPr>
-        <p:spPr>
-          <a:xfrm>
-            <a:off x="15733812" y="4240262"/>
+          <p:cNvPr id="83" name="Text 80"/>
+          <p:cNvSpPr/>
+          <p:nvPr/>
+        </p:nvSpPr>
+        <p:spPr>
+          <a:xfrm>
+            <a:off x="15733812" y="4224189"/>
             <a:ext cx="2170316" cy="226963"/>
           </a:xfrm>
           <a:prstGeom prst="rect">
@@ -5170,18 +3805,18 @@
       </p:sp>
       <p:sp>
         <p:nvSpPr>
-          <p:cNvPr id="125" name="Shape 123"/>
-          <p:cNvSpPr/>
-          <p:nvPr/>
-        </p:nvSpPr>
-        <p:spPr>
-          <a:xfrm>
-            <a:off x="457200" y="4687491"/>
-            <a:ext cx="1954262" cy="800844"/>
+          <p:cNvPr id="84" name="Shape 81"/>
+          <p:cNvSpPr/>
+          <p:nvPr/>
+        </p:nvSpPr>
+        <p:spPr>
+          <a:xfrm>
+            <a:off x="457200" y="4672608"/>
+            <a:ext cx="1954262" cy="803225"/>
           </a:xfrm>
           <a:prstGeom prst="roundRect">
             <a:avLst>
-              <a:gd name="adj" fmla="val 7136"/>
+              <a:gd name="adj" fmla="val 7115"/>
             </a:avLst>
           </a:prstGeom>
           <a:solidFill>
@@ -5197,13 +3832,13 @@
       </p:sp>
       <p:sp>
         <p:nvSpPr>
-          <p:cNvPr id="126" name="Text 124"/>
-          <p:cNvSpPr/>
-          <p:nvPr/>
-        </p:nvSpPr>
-        <p:spPr>
-          <a:xfrm>
-            <a:off x="581025" y="4886771"/>
+          <p:cNvPr id="85" name="Text 82"/>
+          <p:cNvSpPr/>
+          <p:nvPr/>
+        </p:nvSpPr>
+        <p:spPr>
+          <a:xfrm>
+            <a:off x="581025" y="4873079"/>
             <a:ext cx="1782812" cy="440234"/>
           </a:xfrm>
           <a:prstGeom prst="rect">
@@ -5241,18 +3876,18 @@
       </p:sp>
       <p:sp>
         <p:nvSpPr>
-          <p:cNvPr id="127" name="Shape 125"/>
-          <p:cNvSpPr/>
-          <p:nvPr/>
-        </p:nvSpPr>
-        <p:spPr>
-          <a:xfrm>
-            <a:off x="2506712" y="4687491"/>
-            <a:ext cx="1776561" cy="800844"/>
+          <p:cNvPr id="86" name="Shape 83"/>
+          <p:cNvSpPr/>
+          <p:nvPr/>
+        </p:nvSpPr>
+        <p:spPr>
+          <a:xfrm>
+            <a:off x="2506712" y="4672608"/>
+            <a:ext cx="1776561" cy="803225"/>
           </a:xfrm>
           <a:prstGeom prst="roundRect">
             <a:avLst>
-              <a:gd name="adj" fmla="val 7136"/>
+              <a:gd name="adj" fmla="val 7115"/>
             </a:avLst>
           </a:prstGeom>
           <a:solidFill>
@@ -5268,13 +3903,13 @@
       </p:sp>
       <p:sp>
         <p:nvSpPr>
-          <p:cNvPr id="128" name="Text 126"/>
-          <p:cNvSpPr/>
-          <p:nvPr/>
-        </p:nvSpPr>
-        <p:spPr>
-          <a:xfrm>
-            <a:off x="2630537" y="4993481"/>
+          <p:cNvPr id="87" name="Text 84"/>
+          <p:cNvSpPr/>
+          <p:nvPr/>
+        </p:nvSpPr>
+        <p:spPr>
+          <a:xfrm>
+            <a:off x="2630537" y="4979789"/>
             <a:ext cx="1681802" cy="226963"/>
           </a:xfrm>
           <a:prstGeom prst="rect">
@@ -5312,18 +3947,18 @@
       </p:sp>
       <p:sp>
         <p:nvSpPr>
-          <p:cNvPr id="129" name="Shape 127"/>
-          <p:cNvSpPr/>
-          <p:nvPr/>
-        </p:nvSpPr>
-        <p:spPr>
-          <a:xfrm>
-            <a:off x="4378523" y="4687491"/>
-            <a:ext cx="1776710" cy="800844"/>
+          <p:cNvPr id="88" name="Shape 85"/>
+          <p:cNvSpPr/>
+          <p:nvPr/>
+        </p:nvSpPr>
+        <p:spPr>
+          <a:xfrm>
+            <a:off x="4378523" y="4672608"/>
+            <a:ext cx="1776710" cy="803225"/>
           </a:xfrm>
           <a:prstGeom prst="roundRect">
             <a:avLst>
-              <a:gd name="adj" fmla="val 7136"/>
+              <a:gd name="adj" fmla="val 7115"/>
             </a:avLst>
           </a:prstGeom>
           <a:solidFill>
@@ -5339,13 +3974,13 @@
       </p:sp>
       <p:sp>
         <p:nvSpPr>
-          <p:cNvPr id="130" name="Text 128"/>
-          <p:cNvSpPr/>
-          <p:nvPr/>
-        </p:nvSpPr>
-        <p:spPr>
-          <a:xfrm>
-            <a:off x="4502348" y="4993481"/>
+          <p:cNvPr id="89" name="Text 86"/>
+          <p:cNvSpPr/>
+          <p:nvPr/>
+        </p:nvSpPr>
+        <p:spPr>
+          <a:xfrm>
+            <a:off x="4502348" y="4979789"/>
             <a:ext cx="1681966" cy="226963"/>
           </a:xfrm>
           <a:prstGeom prst="rect">
@@ -5383,18 +4018,18 @@
       </p:sp>
       <p:sp>
         <p:nvSpPr>
-          <p:cNvPr id="131" name="Shape 129"/>
-          <p:cNvSpPr/>
-          <p:nvPr/>
-        </p:nvSpPr>
-        <p:spPr>
-          <a:xfrm>
-            <a:off x="6250484" y="4687491"/>
-            <a:ext cx="1776561" cy="800844"/>
+          <p:cNvPr id="90" name="Shape 87"/>
+          <p:cNvSpPr/>
+          <p:nvPr/>
+        </p:nvSpPr>
+        <p:spPr>
+          <a:xfrm>
+            <a:off x="6250484" y="4672608"/>
+            <a:ext cx="1776561" cy="803225"/>
           </a:xfrm>
           <a:prstGeom prst="roundRect">
             <a:avLst>
-              <a:gd name="adj" fmla="val 7136"/>
+              <a:gd name="adj" fmla="val 7115"/>
             </a:avLst>
           </a:prstGeom>
           <a:solidFill>
@@ -5410,13 +4045,13 @@
       </p:sp>
       <p:sp>
         <p:nvSpPr>
-          <p:cNvPr id="132" name="Text 130"/>
-          <p:cNvSpPr/>
-          <p:nvPr/>
-        </p:nvSpPr>
-        <p:spPr>
-          <a:xfrm>
-            <a:off x="6374309" y="4884688"/>
+          <p:cNvPr id="91" name="Text 88"/>
+          <p:cNvSpPr/>
+          <p:nvPr/>
+        </p:nvSpPr>
+        <p:spPr>
+          <a:xfrm>
+            <a:off x="6374309" y="4870996"/>
             <a:ext cx="1681802" cy="226963"/>
           </a:xfrm>
           <a:prstGeom prst="rect">
@@ -5454,13 +4089,13 @@
       </p:sp>
       <p:sp>
         <p:nvSpPr>
-          <p:cNvPr id="133" name="Text 131"/>
-          <p:cNvSpPr/>
-          <p:nvPr/>
-        </p:nvSpPr>
-        <p:spPr>
-          <a:xfrm>
-            <a:off x="6374309" y="5102126"/>
+          <p:cNvPr id="92" name="Text 89"/>
+          <p:cNvSpPr/>
+          <p:nvPr/>
+        </p:nvSpPr>
+        <p:spPr>
+          <a:xfrm>
+            <a:off x="6374309" y="5088434"/>
             <a:ext cx="1681802" cy="226963"/>
           </a:xfrm>
           <a:prstGeom prst="rect">
@@ -5498,18 +4133,18 @@
       </p:sp>
       <p:sp>
         <p:nvSpPr>
-          <p:cNvPr id="134" name="Shape 132"/>
-          <p:cNvSpPr/>
-          <p:nvPr/>
-        </p:nvSpPr>
-        <p:spPr>
-          <a:xfrm>
-            <a:off x="8122295" y="4687491"/>
-            <a:ext cx="1776710" cy="800844"/>
+          <p:cNvPr id="93" name="Shape 90"/>
+          <p:cNvSpPr/>
+          <p:nvPr/>
+        </p:nvSpPr>
+        <p:spPr>
+          <a:xfrm>
+            <a:off x="8122295" y="4672608"/>
+            <a:ext cx="1776710" cy="803225"/>
           </a:xfrm>
           <a:prstGeom prst="roundRect">
             <a:avLst>
-              <a:gd name="adj" fmla="val 7136"/>
+              <a:gd name="adj" fmla="val 7115"/>
             </a:avLst>
           </a:prstGeom>
           <a:solidFill>
@@ -5525,13 +4160,13 @@
       </p:sp>
       <p:sp>
         <p:nvSpPr>
-          <p:cNvPr id="135" name="Shape 133"/>
-          <p:cNvSpPr/>
-          <p:nvPr/>
-        </p:nvSpPr>
-        <p:spPr>
-          <a:xfrm>
-            <a:off x="8246120" y="4941094"/>
+          <p:cNvPr id="94" name="Shape 91"/>
+          <p:cNvSpPr/>
+          <p:nvPr/>
+        </p:nvSpPr>
+        <p:spPr>
+          <a:xfrm>
+            <a:off x="8246120" y="4927402"/>
             <a:ext cx="76200" cy="76200"/>
           </a:xfrm>
           <a:prstGeom prst="ellipse">
@@ -5545,13 +4180,13 @@
       </p:sp>
       <p:sp>
         <p:nvSpPr>
-          <p:cNvPr id="136" name="Text 134"/>
-          <p:cNvSpPr/>
-          <p:nvPr/>
-        </p:nvSpPr>
-        <p:spPr>
-          <a:xfrm>
-            <a:off x="8379470" y="4912519"/>
+          <p:cNvPr id="95" name="Text 92"/>
+          <p:cNvSpPr/>
+          <p:nvPr/>
+        </p:nvSpPr>
+        <p:spPr>
+          <a:xfrm>
+            <a:off x="8379470" y="4898827"/>
             <a:ext cx="626418" cy="171450"/>
           </a:xfrm>
           <a:prstGeom prst="rect">
@@ -5589,13 +4224,13 @@
       </p:sp>
       <p:sp>
         <p:nvSpPr>
-          <p:cNvPr id="137" name="Text 135"/>
-          <p:cNvSpPr/>
-          <p:nvPr/>
-        </p:nvSpPr>
-        <p:spPr>
-          <a:xfrm>
-            <a:off x="8246120" y="5083969"/>
+          <p:cNvPr id="96" name="Text 93"/>
+          <p:cNvSpPr/>
+          <p:nvPr/>
+        </p:nvSpPr>
+        <p:spPr>
+          <a:xfrm>
+            <a:off x="8246120" y="5070277"/>
             <a:ext cx="1681966" cy="226963"/>
           </a:xfrm>
           <a:prstGeom prst="rect">
@@ -5633,18 +4268,18 @@
       </p:sp>
       <p:sp>
         <p:nvSpPr>
-          <p:cNvPr id="138" name="Shape 136"/>
-          <p:cNvSpPr/>
-          <p:nvPr/>
-        </p:nvSpPr>
-        <p:spPr>
-          <a:xfrm>
-            <a:off x="9994255" y="4687491"/>
-            <a:ext cx="1776561" cy="800844"/>
+          <p:cNvPr id="97" name="Shape 94"/>
+          <p:cNvSpPr/>
+          <p:nvPr/>
+        </p:nvSpPr>
+        <p:spPr>
+          <a:xfrm>
+            <a:off x="9994255" y="4672608"/>
+            <a:ext cx="1776561" cy="803225"/>
           </a:xfrm>
           <a:prstGeom prst="roundRect">
             <a:avLst>
-              <a:gd name="adj" fmla="val 7136"/>
+              <a:gd name="adj" fmla="val 7115"/>
             </a:avLst>
           </a:prstGeom>
           <a:solidFill>
@@ -5660,13 +4295,13 @@
       </p:sp>
       <p:sp>
         <p:nvSpPr>
-          <p:cNvPr id="139" name="Shape 137"/>
-          <p:cNvSpPr/>
-          <p:nvPr/>
-        </p:nvSpPr>
-        <p:spPr>
-          <a:xfrm>
-            <a:off x="10118080" y="4832300"/>
+          <p:cNvPr id="98" name="Shape 95"/>
+          <p:cNvSpPr/>
+          <p:nvPr/>
+        </p:nvSpPr>
+        <p:spPr>
+          <a:xfrm>
+            <a:off x="10118080" y="4818608"/>
             <a:ext cx="76200" cy="76200"/>
           </a:xfrm>
           <a:prstGeom prst="ellipse">
@@ -5680,13 +4315,13 @@
       </p:sp>
       <p:sp>
         <p:nvSpPr>
-          <p:cNvPr id="140" name="Text 138"/>
-          <p:cNvSpPr/>
-          <p:nvPr/>
-        </p:nvSpPr>
-        <p:spPr>
-          <a:xfrm>
-            <a:off x="10251430" y="4803725"/>
+          <p:cNvPr id="99" name="Text 96"/>
+          <p:cNvSpPr/>
+          <p:nvPr/>
+        </p:nvSpPr>
+        <p:spPr>
+          <a:xfrm>
+            <a:off x="10251430" y="4790033"/>
             <a:ext cx="626418" cy="171450"/>
           </a:xfrm>
           <a:prstGeom prst="rect">
@@ -5724,13 +4359,13 @@
       </p:sp>
       <p:sp>
         <p:nvSpPr>
-          <p:cNvPr id="141" name="Text 139"/>
-          <p:cNvSpPr/>
-          <p:nvPr/>
-        </p:nvSpPr>
-        <p:spPr>
-          <a:xfrm>
-            <a:off x="10118080" y="4975175"/>
+          <p:cNvPr id="100" name="Text 97"/>
+          <p:cNvSpPr/>
+          <p:nvPr/>
+        </p:nvSpPr>
+        <p:spPr>
+          <a:xfrm>
+            <a:off x="10118080" y="4961483"/>
             <a:ext cx="1681802" cy="226963"/>
           </a:xfrm>
           <a:prstGeom prst="rect">
@@ -5768,13 +4403,13 @@
       </p:sp>
       <p:sp>
         <p:nvSpPr>
-          <p:cNvPr id="142" name="Text 140"/>
-          <p:cNvSpPr/>
-          <p:nvPr/>
-        </p:nvSpPr>
-        <p:spPr>
-          <a:xfrm>
-            <a:off x="10118080" y="5192613"/>
+          <p:cNvPr id="101" name="Text 98"/>
+          <p:cNvSpPr/>
+          <p:nvPr/>
+        </p:nvSpPr>
+        <p:spPr>
+          <a:xfrm>
+            <a:off x="10118080" y="5178921"/>
             <a:ext cx="1681802" cy="226963"/>
           </a:xfrm>
           <a:prstGeom prst="rect">
@@ -5812,18 +4447,18 @@
       </p:sp>
       <p:sp>
         <p:nvSpPr>
-          <p:cNvPr id="143" name="Shape 141"/>
-          <p:cNvSpPr/>
-          <p:nvPr/>
-        </p:nvSpPr>
-        <p:spPr>
-          <a:xfrm>
-            <a:off x="11866066" y="4687491"/>
-            <a:ext cx="1776710" cy="800844"/>
+          <p:cNvPr id="102" name="Shape 99"/>
+          <p:cNvSpPr/>
+          <p:nvPr/>
+        </p:nvSpPr>
+        <p:spPr>
+          <a:xfrm>
+            <a:off x="11866066" y="4672608"/>
+            <a:ext cx="1776710" cy="803225"/>
           </a:xfrm>
           <a:prstGeom prst="roundRect">
             <a:avLst>
-              <a:gd name="adj" fmla="val 7136"/>
+              <a:gd name="adj" fmla="val 7115"/>
             </a:avLst>
           </a:prstGeom>
           <a:solidFill>
@@ -5839,13 +4474,13 @@
       </p:sp>
       <p:sp>
         <p:nvSpPr>
-          <p:cNvPr id="144" name="Text 142"/>
-          <p:cNvSpPr/>
-          <p:nvPr/>
-        </p:nvSpPr>
-        <p:spPr>
-          <a:xfrm>
-            <a:off x="11989891" y="4993481"/>
+          <p:cNvPr id="103" name="Text 100"/>
+          <p:cNvSpPr/>
+          <p:nvPr/>
+        </p:nvSpPr>
+        <p:spPr>
+          <a:xfrm>
+            <a:off x="11989891" y="4979789"/>
             <a:ext cx="1681966" cy="226963"/>
           </a:xfrm>
           <a:prstGeom prst="rect">
@@ -5883,18 +4518,18 @@
       </p:sp>
       <p:sp>
         <p:nvSpPr>
-          <p:cNvPr id="145" name="Shape 143"/>
-          <p:cNvSpPr/>
-          <p:nvPr/>
-        </p:nvSpPr>
-        <p:spPr>
-          <a:xfrm>
-            <a:off x="13738027" y="4687491"/>
-            <a:ext cx="1776710" cy="800844"/>
+          <p:cNvPr id="104" name="Shape 101"/>
+          <p:cNvSpPr/>
+          <p:nvPr/>
+        </p:nvSpPr>
+        <p:spPr>
+          <a:xfrm>
+            <a:off x="13738027" y="4672608"/>
+            <a:ext cx="1776710" cy="803225"/>
           </a:xfrm>
           <a:prstGeom prst="roundRect">
             <a:avLst>
-              <a:gd name="adj" fmla="val 7136"/>
+              <a:gd name="adj" fmla="val 7115"/>
             </a:avLst>
           </a:prstGeom>
           <a:solidFill>
@@ -5910,13 +4545,13 @@
       </p:sp>
       <p:sp>
         <p:nvSpPr>
-          <p:cNvPr id="146" name="Text 144"/>
-          <p:cNvSpPr/>
-          <p:nvPr/>
-        </p:nvSpPr>
-        <p:spPr>
-          <a:xfrm>
-            <a:off x="13861852" y="4898975"/>
+          <p:cNvPr id="105" name="Text 102"/>
+          <p:cNvSpPr/>
+          <p:nvPr/>
+        </p:nvSpPr>
+        <p:spPr>
+          <a:xfrm>
+            <a:off x="13861852" y="4885283"/>
             <a:ext cx="1605260" cy="415826"/>
           </a:xfrm>
           <a:prstGeom prst="rect">
@@ -5954,18 +4589,18 @@
       </p:sp>
       <p:sp>
         <p:nvSpPr>
-          <p:cNvPr id="147" name="Shape 145"/>
-          <p:cNvSpPr/>
-          <p:nvPr/>
-        </p:nvSpPr>
-        <p:spPr>
-          <a:xfrm>
-            <a:off x="15609987" y="4687491"/>
-            <a:ext cx="2220664" cy="800844"/>
+          <p:cNvPr id="106" name="Shape 103"/>
+          <p:cNvSpPr/>
+          <p:nvPr/>
+        </p:nvSpPr>
+        <p:spPr>
+          <a:xfrm>
+            <a:off x="15609987" y="4672608"/>
+            <a:ext cx="2220664" cy="803225"/>
           </a:xfrm>
           <a:prstGeom prst="roundRect">
             <a:avLst>
-              <a:gd name="adj" fmla="val 7136"/>
+              <a:gd name="adj" fmla="val 7115"/>
             </a:avLst>
           </a:prstGeom>
           <a:solidFill>
@@ -5981,13 +4616,13 @@
       </p:sp>
       <p:sp>
         <p:nvSpPr>
-          <p:cNvPr id="148" name="Text 146"/>
-          <p:cNvSpPr/>
-          <p:nvPr/>
-        </p:nvSpPr>
-        <p:spPr>
-          <a:xfrm>
-            <a:off x="15733812" y="4898975"/>
+          <p:cNvPr id="107" name="Text 104"/>
+          <p:cNvSpPr/>
+          <p:nvPr/>
+        </p:nvSpPr>
+        <p:spPr>
+          <a:xfrm>
+            <a:off x="15733812" y="4885283"/>
             <a:ext cx="2049214" cy="415826"/>
           </a:xfrm>
           <a:prstGeom prst="rect">
@@ -6025,18 +4660,18 @@
       </p:sp>
       <p:sp>
         <p:nvSpPr>
-          <p:cNvPr id="149" name="Shape 147"/>
-          <p:cNvSpPr/>
-          <p:nvPr/>
-        </p:nvSpPr>
-        <p:spPr>
-          <a:xfrm>
-            <a:off x="457200" y="5545485"/>
-            <a:ext cx="1954262" cy="619720"/>
+          <p:cNvPr id="108" name="Shape 105"/>
+          <p:cNvSpPr/>
+          <p:nvPr/>
+        </p:nvSpPr>
+        <p:spPr>
+          <a:xfrm>
+            <a:off x="457200" y="5532983"/>
+            <a:ext cx="1954262" cy="622102"/>
           </a:xfrm>
           <a:prstGeom prst="roundRect">
             <a:avLst>
-              <a:gd name="adj" fmla="val 9222"/>
+              <a:gd name="adj" fmla="val 9187"/>
             </a:avLst>
           </a:prstGeom>
           <a:solidFill>
@@ -6052,13 +4687,13 @@
       </p:sp>
       <p:sp>
         <p:nvSpPr>
-          <p:cNvPr id="150" name="Text 148"/>
-          <p:cNvSpPr/>
-          <p:nvPr/>
-        </p:nvSpPr>
-        <p:spPr>
-          <a:xfrm>
-            <a:off x="581025" y="5754737"/>
+          <p:cNvPr id="109" name="Text 106"/>
+          <p:cNvSpPr/>
+          <p:nvPr/>
+        </p:nvSpPr>
+        <p:spPr>
+          <a:xfrm>
+            <a:off x="581025" y="5743426"/>
             <a:ext cx="1877273" cy="239167"/>
           </a:xfrm>
           <a:prstGeom prst="rect">
@@ -6096,18 +4731,18 @@
       </p:sp>
       <p:sp>
         <p:nvSpPr>
-          <p:cNvPr id="151" name="Shape 149"/>
-          <p:cNvSpPr/>
-          <p:nvPr/>
-        </p:nvSpPr>
-        <p:spPr>
-          <a:xfrm>
-            <a:off x="2506712" y="5545485"/>
-            <a:ext cx="1776561" cy="619720"/>
+          <p:cNvPr id="110" name="Shape 107"/>
+          <p:cNvSpPr/>
+          <p:nvPr/>
+        </p:nvSpPr>
+        <p:spPr>
+          <a:xfrm>
+            <a:off x="2506712" y="5532983"/>
+            <a:ext cx="1776561" cy="622102"/>
           </a:xfrm>
           <a:prstGeom prst="roundRect">
             <a:avLst>
-              <a:gd name="adj" fmla="val 9222"/>
+              <a:gd name="adj" fmla="val 9187"/>
             </a:avLst>
           </a:prstGeom>
           <a:solidFill>
@@ -6123,13 +4758,13 @@
       </p:sp>
       <p:sp>
         <p:nvSpPr>
-          <p:cNvPr id="152" name="Text 150"/>
-          <p:cNvSpPr/>
-          <p:nvPr/>
-        </p:nvSpPr>
-        <p:spPr>
-          <a:xfrm>
-            <a:off x="2630537" y="5760839"/>
+          <p:cNvPr id="111" name="Text 108"/>
+          <p:cNvSpPr/>
+          <p:nvPr/>
+        </p:nvSpPr>
+        <p:spPr>
+          <a:xfrm>
+            <a:off x="2630537" y="5749528"/>
             <a:ext cx="1681802" cy="226963"/>
           </a:xfrm>
           <a:prstGeom prst="rect">
@@ -6167,18 +4802,18 @@
       </p:sp>
       <p:sp>
         <p:nvSpPr>
-          <p:cNvPr id="153" name="Shape 151"/>
-          <p:cNvSpPr/>
-          <p:nvPr/>
-        </p:nvSpPr>
-        <p:spPr>
-          <a:xfrm>
-            <a:off x="4378523" y="5545485"/>
-            <a:ext cx="1776710" cy="619720"/>
+          <p:cNvPr id="112" name="Shape 109"/>
+          <p:cNvSpPr/>
+          <p:nvPr/>
+        </p:nvSpPr>
+        <p:spPr>
+          <a:xfrm>
+            <a:off x="4378523" y="5532983"/>
+            <a:ext cx="1776710" cy="622102"/>
           </a:xfrm>
           <a:prstGeom prst="roundRect">
             <a:avLst>
-              <a:gd name="adj" fmla="val 9222"/>
+              <a:gd name="adj" fmla="val 9187"/>
             </a:avLst>
           </a:prstGeom>
           <a:solidFill>
@@ -6194,13 +4829,13 @@
       </p:sp>
       <p:sp>
         <p:nvSpPr>
-          <p:cNvPr id="154" name="Text 152"/>
-          <p:cNvSpPr/>
-          <p:nvPr/>
-        </p:nvSpPr>
-        <p:spPr>
-          <a:xfrm>
-            <a:off x="4502348" y="5760839"/>
+          <p:cNvPr id="113" name="Text 110"/>
+          <p:cNvSpPr/>
+          <p:nvPr/>
+        </p:nvSpPr>
+        <p:spPr>
+          <a:xfrm>
+            <a:off x="4502348" y="5749528"/>
             <a:ext cx="1681966" cy="226963"/>
           </a:xfrm>
           <a:prstGeom prst="rect">
@@ -6238,18 +4873,18 @@
       </p:sp>
       <p:sp>
         <p:nvSpPr>
-          <p:cNvPr id="155" name="Shape 153"/>
-          <p:cNvSpPr/>
-          <p:nvPr/>
-        </p:nvSpPr>
-        <p:spPr>
-          <a:xfrm>
-            <a:off x="6250484" y="5545485"/>
-            <a:ext cx="1776561" cy="619720"/>
+          <p:cNvPr id="114" name="Shape 111"/>
+          <p:cNvSpPr/>
+          <p:nvPr/>
+        </p:nvSpPr>
+        <p:spPr>
+          <a:xfrm>
+            <a:off x="6250484" y="5532983"/>
+            <a:ext cx="1776561" cy="622102"/>
           </a:xfrm>
           <a:prstGeom prst="roundRect">
             <a:avLst>
-              <a:gd name="adj" fmla="val 9222"/>
+              <a:gd name="adj" fmla="val 9187"/>
             </a:avLst>
           </a:prstGeom>
           <a:solidFill>
@@ -6265,13 +4900,13 @@
       </p:sp>
       <p:sp>
         <p:nvSpPr>
-          <p:cNvPr id="156" name="Text 154"/>
-          <p:cNvSpPr/>
-          <p:nvPr/>
-        </p:nvSpPr>
-        <p:spPr>
-          <a:xfrm>
-            <a:off x="6374309" y="5652195"/>
+          <p:cNvPr id="115" name="Text 112"/>
+          <p:cNvSpPr/>
+          <p:nvPr/>
+        </p:nvSpPr>
+        <p:spPr>
+          <a:xfrm>
+            <a:off x="6374309" y="5640884"/>
             <a:ext cx="1681802" cy="226963"/>
           </a:xfrm>
           <a:prstGeom prst="rect">
@@ -6309,13 +4944,13 @@
       </p:sp>
       <p:sp>
         <p:nvSpPr>
-          <p:cNvPr id="157" name="Text 155"/>
-          <p:cNvSpPr/>
-          <p:nvPr/>
-        </p:nvSpPr>
-        <p:spPr>
-          <a:xfrm>
-            <a:off x="6374309" y="5869632"/>
+          <p:cNvPr id="116" name="Text 113"/>
+          <p:cNvSpPr/>
+          <p:nvPr/>
+        </p:nvSpPr>
+        <p:spPr>
+          <a:xfrm>
+            <a:off x="6374309" y="5858321"/>
             <a:ext cx="1681802" cy="226963"/>
           </a:xfrm>
           <a:prstGeom prst="rect">
@@ -6353,18 +4988,18 @@
       </p:sp>
       <p:sp>
         <p:nvSpPr>
-          <p:cNvPr id="158" name="Shape 156"/>
-          <p:cNvSpPr/>
-          <p:nvPr/>
-        </p:nvSpPr>
-        <p:spPr>
-          <a:xfrm>
-            <a:off x="8122295" y="5545485"/>
-            <a:ext cx="1776710" cy="619720"/>
+          <p:cNvPr id="117" name="Shape 114"/>
+          <p:cNvSpPr/>
+          <p:nvPr/>
+        </p:nvSpPr>
+        <p:spPr>
+          <a:xfrm>
+            <a:off x="8122295" y="5532983"/>
+            <a:ext cx="1776710" cy="622102"/>
           </a:xfrm>
           <a:prstGeom prst="roundRect">
             <a:avLst>
-              <a:gd name="adj" fmla="val 9222"/>
+              <a:gd name="adj" fmla="val 9187"/>
             </a:avLst>
           </a:prstGeom>
           <a:solidFill>
@@ -6380,13 +5015,13 @@
       </p:sp>
       <p:sp>
         <p:nvSpPr>
-          <p:cNvPr id="159" name="Shape 157"/>
-          <p:cNvSpPr/>
-          <p:nvPr/>
-        </p:nvSpPr>
-        <p:spPr>
-          <a:xfrm>
-            <a:off x="8246120" y="5708452"/>
+          <p:cNvPr id="118" name="Shape 115"/>
+          <p:cNvSpPr/>
+          <p:nvPr/>
+        </p:nvSpPr>
+        <p:spPr>
+          <a:xfrm>
+            <a:off x="8246120" y="5697141"/>
             <a:ext cx="76200" cy="76200"/>
           </a:xfrm>
           <a:prstGeom prst="ellipse">
@@ -6400,13 +5035,13 @@
       </p:sp>
       <p:sp>
         <p:nvSpPr>
-          <p:cNvPr id="160" name="Text 158"/>
-          <p:cNvSpPr/>
-          <p:nvPr/>
-        </p:nvSpPr>
-        <p:spPr>
-          <a:xfrm>
-            <a:off x="8379470" y="5679877"/>
+          <p:cNvPr id="119" name="Text 116"/>
+          <p:cNvSpPr/>
+          <p:nvPr/>
+        </p:nvSpPr>
+        <p:spPr>
+          <a:xfrm>
+            <a:off x="8379470" y="5668566"/>
             <a:ext cx="938213" cy="171450"/>
           </a:xfrm>
           <a:prstGeom prst="rect">
@@ -6444,13 +5079,13 @@
       </p:sp>
       <p:sp>
         <p:nvSpPr>
-          <p:cNvPr id="161" name="Text 159"/>
-          <p:cNvSpPr/>
-          <p:nvPr/>
-        </p:nvSpPr>
-        <p:spPr>
-          <a:xfrm>
-            <a:off x="8246120" y="5851327"/>
+          <p:cNvPr id="120" name="Text 117"/>
+          <p:cNvSpPr/>
+          <p:nvPr/>
+        </p:nvSpPr>
+        <p:spPr>
+          <a:xfrm>
+            <a:off x="8246120" y="5840016"/>
             <a:ext cx="1681966" cy="226963"/>
           </a:xfrm>
           <a:prstGeom prst="rect">
@@ -6488,18 +5123,18 @@
       </p:sp>
       <p:sp>
         <p:nvSpPr>
-          <p:cNvPr id="162" name="Shape 160"/>
-          <p:cNvSpPr/>
-          <p:nvPr/>
-        </p:nvSpPr>
-        <p:spPr>
-          <a:xfrm>
-            <a:off x="9994255" y="5545485"/>
-            <a:ext cx="1776561" cy="619720"/>
+          <p:cNvPr id="121" name="Shape 118"/>
+          <p:cNvSpPr/>
+          <p:nvPr/>
+        </p:nvSpPr>
+        <p:spPr>
+          <a:xfrm>
+            <a:off x="9994255" y="5532983"/>
+            <a:ext cx="1776561" cy="622102"/>
           </a:xfrm>
           <a:prstGeom prst="roundRect">
             <a:avLst>
-              <a:gd name="adj" fmla="val 9222"/>
+              <a:gd name="adj" fmla="val 9187"/>
             </a:avLst>
           </a:prstGeom>
           <a:solidFill>
@@ -6515,13 +5150,13 @@
       </p:sp>
       <p:sp>
         <p:nvSpPr>
-          <p:cNvPr id="163" name="Shape 161"/>
-          <p:cNvSpPr/>
-          <p:nvPr/>
-        </p:nvSpPr>
-        <p:spPr>
-          <a:xfrm>
-            <a:off x="10118080" y="5708452"/>
+          <p:cNvPr id="122" name="Shape 119"/>
+          <p:cNvSpPr/>
+          <p:nvPr/>
+        </p:nvSpPr>
+        <p:spPr>
+          <a:xfrm>
+            <a:off x="10118080" y="5697141"/>
             <a:ext cx="76200" cy="76200"/>
           </a:xfrm>
           <a:prstGeom prst="ellipse">
@@ -6535,13 +5170,13 @@
       </p:sp>
       <p:sp>
         <p:nvSpPr>
-          <p:cNvPr id="164" name="Text 162"/>
-          <p:cNvSpPr/>
-          <p:nvPr/>
-        </p:nvSpPr>
-        <p:spPr>
-          <a:xfrm>
-            <a:off x="10251430" y="5679877"/>
+          <p:cNvPr id="123" name="Text 120"/>
+          <p:cNvSpPr/>
+          <p:nvPr/>
+        </p:nvSpPr>
+        <p:spPr>
+          <a:xfrm>
+            <a:off x="10251430" y="5668566"/>
             <a:ext cx="938213" cy="171450"/>
           </a:xfrm>
           <a:prstGeom prst="rect">
@@ -6579,13 +5214,13 @@
       </p:sp>
       <p:sp>
         <p:nvSpPr>
-          <p:cNvPr id="165" name="Text 163"/>
-          <p:cNvSpPr/>
-          <p:nvPr/>
-        </p:nvSpPr>
-        <p:spPr>
-          <a:xfrm>
-            <a:off x="10118080" y="5851327"/>
+          <p:cNvPr id="124" name="Text 121"/>
+          <p:cNvSpPr/>
+          <p:nvPr/>
+        </p:nvSpPr>
+        <p:spPr>
+          <a:xfrm>
+            <a:off x="10118080" y="5840016"/>
             <a:ext cx="1681802" cy="226963"/>
           </a:xfrm>
           <a:prstGeom prst="rect">
@@ -6623,18 +5258,18 @@
       </p:sp>
       <p:sp>
         <p:nvSpPr>
-          <p:cNvPr id="166" name="Shape 164"/>
-          <p:cNvSpPr/>
-          <p:nvPr/>
-        </p:nvSpPr>
-        <p:spPr>
-          <a:xfrm>
-            <a:off x="11866066" y="5545485"/>
-            <a:ext cx="1776710" cy="619720"/>
+          <p:cNvPr id="125" name="Shape 122"/>
+          <p:cNvSpPr/>
+          <p:nvPr/>
+        </p:nvSpPr>
+        <p:spPr>
+          <a:xfrm>
+            <a:off x="11866066" y="5532983"/>
+            <a:ext cx="1776710" cy="622102"/>
           </a:xfrm>
           <a:prstGeom prst="roundRect">
             <a:avLst>
-              <a:gd name="adj" fmla="val 9222"/>
+              <a:gd name="adj" fmla="val 9187"/>
             </a:avLst>
           </a:prstGeom>
           <a:solidFill>
@@ -6650,13 +5285,13 @@
       </p:sp>
       <p:sp>
         <p:nvSpPr>
-          <p:cNvPr id="167" name="Text 165"/>
-          <p:cNvSpPr/>
-          <p:nvPr/>
-        </p:nvSpPr>
-        <p:spPr>
-          <a:xfrm>
-            <a:off x="11989891" y="5760839"/>
+          <p:cNvPr id="126" name="Text 123"/>
+          <p:cNvSpPr/>
+          <p:nvPr/>
+        </p:nvSpPr>
+        <p:spPr>
+          <a:xfrm>
+            <a:off x="11989891" y="5749528"/>
             <a:ext cx="1681966" cy="226963"/>
           </a:xfrm>
           <a:prstGeom prst="rect">
@@ -6694,18 +5329,18 @@
       </p:sp>
       <p:sp>
         <p:nvSpPr>
-          <p:cNvPr id="168" name="Shape 166"/>
-          <p:cNvSpPr/>
-          <p:nvPr/>
-        </p:nvSpPr>
-        <p:spPr>
-          <a:xfrm>
-            <a:off x="13738027" y="5545485"/>
-            <a:ext cx="1776710" cy="619720"/>
+          <p:cNvPr id="127" name="Shape 124"/>
+          <p:cNvSpPr/>
+          <p:nvPr/>
+        </p:nvSpPr>
+        <p:spPr>
+          <a:xfrm>
+            <a:off x="13738027" y="5532983"/>
+            <a:ext cx="1776710" cy="622102"/>
           </a:xfrm>
           <a:prstGeom prst="roundRect">
             <a:avLst>
-              <a:gd name="adj" fmla="val 9222"/>
+              <a:gd name="adj" fmla="val 9187"/>
             </a:avLst>
           </a:prstGeom>
           <a:solidFill>
@@ -6721,13 +5356,13 @@
       </p:sp>
       <p:sp>
         <p:nvSpPr>
-          <p:cNvPr id="169" name="Text 167"/>
-          <p:cNvSpPr/>
-          <p:nvPr/>
-        </p:nvSpPr>
-        <p:spPr>
-          <a:xfrm>
-            <a:off x="13861852" y="5666482"/>
+          <p:cNvPr id="128" name="Text 125"/>
+          <p:cNvSpPr/>
+          <p:nvPr/>
+        </p:nvSpPr>
+        <p:spPr>
+          <a:xfrm>
+            <a:off x="13861852" y="5655171"/>
             <a:ext cx="1605260" cy="415826"/>
           </a:xfrm>
           <a:prstGeom prst="rect">
@@ -6765,18 +5400,18 @@
       </p:sp>
       <p:sp>
         <p:nvSpPr>
-          <p:cNvPr id="170" name="Shape 168"/>
-          <p:cNvSpPr/>
-          <p:nvPr/>
-        </p:nvSpPr>
-        <p:spPr>
-          <a:xfrm>
-            <a:off x="15609987" y="5545485"/>
-            <a:ext cx="2220664" cy="619720"/>
+          <p:cNvPr id="129" name="Shape 126"/>
+          <p:cNvSpPr/>
+          <p:nvPr/>
+        </p:nvSpPr>
+        <p:spPr>
+          <a:xfrm>
+            <a:off x="15609987" y="5532983"/>
+            <a:ext cx="2220664" cy="622102"/>
           </a:xfrm>
           <a:prstGeom prst="roundRect">
             <a:avLst>
-              <a:gd name="adj" fmla="val 9222"/>
+              <a:gd name="adj" fmla="val 9187"/>
             </a:avLst>
           </a:prstGeom>
           <a:solidFill>
@@ -6792,13 +5427,13 @@
       </p:sp>
       <p:sp>
         <p:nvSpPr>
-          <p:cNvPr id="171" name="Text 169"/>
-          <p:cNvSpPr/>
-          <p:nvPr/>
-        </p:nvSpPr>
-        <p:spPr>
-          <a:xfrm>
-            <a:off x="15733812" y="5666482"/>
+          <p:cNvPr id="130" name="Text 127"/>
+          <p:cNvSpPr/>
+          <p:nvPr/>
+        </p:nvSpPr>
+        <p:spPr>
+          <a:xfrm>
+            <a:off x="15733812" y="5655171"/>
             <a:ext cx="2049214" cy="415826"/>
           </a:xfrm>
           <a:prstGeom prst="rect">
@@ -6836,18 +5471,18 @@
       </p:sp>
       <p:sp>
         <p:nvSpPr>
-          <p:cNvPr id="172" name="Shape 170"/>
-          <p:cNvSpPr/>
-          <p:nvPr/>
-        </p:nvSpPr>
-        <p:spPr>
-          <a:xfrm>
-            <a:off x="457200" y="6222355"/>
-            <a:ext cx="1954262" cy="619720"/>
+          <p:cNvPr id="131" name="Shape 128"/>
+          <p:cNvSpPr/>
+          <p:nvPr/>
+        </p:nvSpPr>
+        <p:spPr>
+          <a:xfrm>
+            <a:off x="457200" y="6212235"/>
+            <a:ext cx="1954262" cy="622250"/>
           </a:xfrm>
           <a:prstGeom prst="roundRect">
             <a:avLst>
-              <a:gd name="adj" fmla="val 9222"/>
+              <a:gd name="adj" fmla="val 9184"/>
             </a:avLst>
           </a:prstGeom>
           <a:solidFill>
@@ -6863,13 +5498,13 @@
       </p:sp>
       <p:sp>
         <p:nvSpPr>
-          <p:cNvPr id="173" name="Text 171"/>
-          <p:cNvSpPr/>
-          <p:nvPr/>
-        </p:nvSpPr>
-        <p:spPr>
-          <a:xfrm>
-            <a:off x="581025" y="6431607"/>
+          <p:cNvPr id="132" name="Text 129"/>
+          <p:cNvSpPr/>
+          <p:nvPr/>
+        </p:nvSpPr>
+        <p:spPr>
+          <a:xfrm>
+            <a:off x="581025" y="6422827"/>
             <a:ext cx="1877273" cy="239167"/>
           </a:xfrm>
           <a:prstGeom prst="rect">
@@ -6907,18 +5542,18 @@
       </p:sp>
       <p:sp>
         <p:nvSpPr>
-          <p:cNvPr id="174" name="Shape 172"/>
-          <p:cNvSpPr/>
-          <p:nvPr/>
-        </p:nvSpPr>
-        <p:spPr>
-          <a:xfrm>
-            <a:off x="2506712" y="6222355"/>
-            <a:ext cx="1776561" cy="619720"/>
+          <p:cNvPr id="133" name="Shape 130"/>
+          <p:cNvSpPr/>
+          <p:nvPr/>
+        </p:nvSpPr>
+        <p:spPr>
+          <a:xfrm>
+            <a:off x="2506712" y="6212235"/>
+            <a:ext cx="1776561" cy="622250"/>
           </a:xfrm>
           <a:prstGeom prst="roundRect">
             <a:avLst>
-              <a:gd name="adj" fmla="val 9222"/>
+              <a:gd name="adj" fmla="val 9184"/>
             </a:avLst>
           </a:prstGeom>
           <a:solidFill>
@@ -6934,13 +5569,13 @@
       </p:sp>
       <p:sp>
         <p:nvSpPr>
-          <p:cNvPr id="175" name="Text 173"/>
-          <p:cNvSpPr/>
-          <p:nvPr/>
-        </p:nvSpPr>
-        <p:spPr>
-          <a:xfrm>
-            <a:off x="2630537" y="6437709"/>
+          <p:cNvPr id="134" name="Text 131"/>
+          <p:cNvSpPr/>
+          <p:nvPr/>
+        </p:nvSpPr>
+        <p:spPr>
+          <a:xfrm>
+            <a:off x="2630537" y="6428929"/>
             <a:ext cx="1681802" cy="226963"/>
           </a:xfrm>
           <a:prstGeom prst="rect">
@@ -6978,18 +5613,18 @@
       </p:sp>
       <p:sp>
         <p:nvSpPr>
-          <p:cNvPr id="176" name="Shape 174"/>
-          <p:cNvSpPr/>
-          <p:nvPr/>
-        </p:nvSpPr>
-        <p:spPr>
-          <a:xfrm>
-            <a:off x="4378523" y="6222355"/>
-            <a:ext cx="1776710" cy="619720"/>
+          <p:cNvPr id="135" name="Shape 132"/>
+          <p:cNvSpPr/>
+          <p:nvPr/>
+        </p:nvSpPr>
+        <p:spPr>
+          <a:xfrm>
+            <a:off x="4378523" y="6212235"/>
+            <a:ext cx="1776710" cy="622250"/>
           </a:xfrm>
           <a:prstGeom prst="roundRect">
             <a:avLst>
-              <a:gd name="adj" fmla="val 9222"/>
+              <a:gd name="adj" fmla="val 9184"/>
             </a:avLst>
           </a:prstGeom>
           <a:solidFill>
@@ -7005,13 +5640,13 @@
       </p:sp>
       <p:sp>
         <p:nvSpPr>
-          <p:cNvPr id="177" name="Text 175"/>
-          <p:cNvSpPr/>
-          <p:nvPr/>
-        </p:nvSpPr>
-        <p:spPr>
-          <a:xfrm>
-            <a:off x="4502348" y="6329065"/>
+          <p:cNvPr id="136" name="Text 133"/>
+          <p:cNvSpPr/>
+          <p:nvPr/>
+        </p:nvSpPr>
+        <p:spPr>
+          <a:xfrm>
+            <a:off x="4502348" y="6320135"/>
             <a:ext cx="1681966" cy="226963"/>
           </a:xfrm>
           <a:prstGeom prst="rect">
@@ -7049,13 +5684,13 @@
       </p:sp>
       <p:sp>
         <p:nvSpPr>
-          <p:cNvPr id="178" name="Text 176"/>
-          <p:cNvSpPr/>
-          <p:nvPr/>
-        </p:nvSpPr>
-        <p:spPr>
-          <a:xfrm>
-            <a:off x="4502348" y="6546503"/>
+          <p:cNvPr id="137" name="Text 134"/>
+          <p:cNvSpPr/>
+          <p:nvPr/>
+        </p:nvSpPr>
+        <p:spPr>
+          <a:xfrm>
+            <a:off x="4502348" y="6537573"/>
             <a:ext cx="1681966" cy="226963"/>
           </a:xfrm>
           <a:prstGeom prst="rect">
@@ -7093,18 +5728,18 @@
       </p:sp>
       <p:sp>
         <p:nvSpPr>
-          <p:cNvPr id="179" name="Shape 177"/>
-          <p:cNvSpPr/>
-          <p:nvPr/>
-        </p:nvSpPr>
-        <p:spPr>
-          <a:xfrm>
-            <a:off x="6250484" y="6222355"/>
-            <a:ext cx="1776561" cy="619720"/>
+          <p:cNvPr id="138" name="Shape 135"/>
+          <p:cNvSpPr/>
+          <p:nvPr/>
+        </p:nvSpPr>
+        <p:spPr>
+          <a:xfrm>
+            <a:off x="6250484" y="6212235"/>
+            <a:ext cx="1776561" cy="622250"/>
           </a:xfrm>
           <a:prstGeom prst="roundRect">
             <a:avLst>
-              <a:gd name="adj" fmla="val 9222"/>
+              <a:gd name="adj" fmla="val 9184"/>
             </a:avLst>
           </a:prstGeom>
           <a:solidFill>
@@ -7120,13 +5755,13 @@
       </p:sp>
       <p:sp>
         <p:nvSpPr>
-          <p:cNvPr id="180" name="Text 178"/>
-          <p:cNvSpPr/>
-          <p:nvPr/>
-        </p:nvSpPr>
-        <p:spPr>
-          <a:xfrm>
-            <a:off x="6374309" y="6329065"/>
+          <p:cNvPr id="139" name="Text 136"/>
+          <p:cNvSpPr/>
+          <p:nvPr/>
+        </p:nvSpPr>
+        <p:spPr>
+          <a:xfrm>
+            <a:off x="6374309" y="6320135"/>
             <a:ext cx="1681802" cy="226963"/>
           </a:xfrm>
           <a:prstGeom prst="rect">
@@ -7164,13 +5799,13 @@
       </p:sp>
       <p:sp>
         <p:nvSpPr>
-          <p:cNvPr id="181" name="Text 179"/>
-          <p:cNvSpPr/>
-          <p:nvPr/>
-        </p:nvSpPr>
-        <p:spPr>
-          <a:xfrm>
-            <a:off x="6374309" y="6546503"/>
+          <p:cNvPr id="140" name="Text 137"/>
+          <p:cNvSpPr/>
+          <p:nvPr/>
+        </p:nvSpPr>
+        <p:spPr>
+          <a:xfrm>
+            <a:off x="6374309" y="6537573"/>
             <a:ext cx="1681802" cy="226963"/>
           </a:xfrm>
           <a:prstGeom prst="rect">
@@ -7208,18 +5843,18 @@
       </p:sp>
       <p:sp>
         <p:nvSpPr>
-          <p:cNvPr id="182" name="Shape 180"/>
-          <p:cNvSpPr/>
-          <p:nvPr/>
-        </p:nvSpPr>
-        <p:spPr>
-          <a:xfrm>
-            <a:off x="8122295" y="6222355"/>
-            <a:ext cx="1776710" cy="619720"/>
+          <p:cNvPr id="141" name="Shape 138"/>
+          <p:cNvSpPr/>
+          <p:nvPr/>
+        </p:nvSpPr>
+        <p:spPr>
+          <a:xfrm>
+            <a:off x="8122295" y="6212235"/>
+            <a:ext cx="1776710" cy="622250"/>
           </a:xfrm>
           <a:prstGeom prst="roundRect">
             <a:avLst>
-              <a:gd name="adj" fmla="val 9222"/>
+              <a:gd name="adj" fmla="val 9184"/>
             </a:avLst>
           </a:prstGeom>
           <a:solidFill>
@@ -7235,13 +5870,13 @@
       </p:sp>
       <p:sp>
         <p:nvSpPr>
-          <p:cNvPr id="183" name="Shape 181"/>
-          <p:cNvSpPr/>
-          <p:nvPr/>
-        </p:nvSpPr>
-        <p:spPr>
-          <a:xfrm>
-            <a:off x="8246120" y="6385322"/>
+          <p:cNvPr id="142" name="Shape 139"/>
+          <p:cNvSpPr/>
+          <p:nvPr/>
+        </p:nvSpPr>
+        <p:spPr>
+          <a:xfrm>
+            <a:off x="8246120" y="6376541"/>
             <a:ext cx="76200" cy="76200"/>
           </a:xfrm>
           <a:prstGeom prst="ellipse">
@@ -7255,13 +5890,13 @@
       </p:sp>
       <p:sp>
         <p:nvSpPr>
-          <p:cNvPr id="184" name="Text 182"/>
-          <p:cNvSpPr/>
-          <p:nvPr/>
-        </p:nvSpPr>
-        <p:spPr>
-          <a:xfrm>
-            <a:off x="8379470" y="6356747"/>
+          <p:cNvPr id="143" name="Text 140"/>
+          <p:cNvSpPr/>
+          <p:nvPr/>
+        </p:nvSpPr>
+        <p:spPr>
+          <a:xfrm>
+            <a:off x="8379470" y="6347966"/>
             <a:ext cx="938213" cy="171450"/>
           </a:xfrm>
           <a:prstGeom prst="rect">
@@ -7299,13 +5934,13 @@
       </p:sp>
       <p:sp>
         <p:nvSpPr>
-          <p:cNvPr id="185" name="Text 183"/>
-          <p:cNvSpPr/>
-          <p:nvPr/>
-        </p:nvSpPr>
-        <p:spPr>
-          <a:xfrm>
-            <a:off x="8246120" y="6528197"/>
+          <p:cNvPr id="144" name="Text 141"/>
+          <p:cNvSpPr/>
+          <p:nvPr/>
+        </p:nvSpPr>
+        <p:spPr>
+          <a:xfrm>
+            <a:off x="8246120" y="6519416"/>
             <a:ext cx="1681966" cy="226963"/>
           </a:xfrm>
           <a:prstGeom prst="rect">
@@ -7343,18 +5978,18 @@
       </p:sp>
       <p:sp>
         <p:nvSpPr>
-          <p:cNvPr id="186" name="Shape 184"/>
-          <p:cNvSpPr/>
-          <p:nvPr/>
-        </p:nvSpPr>
-        <p:spPr>
-          <a:xfrm>
-            <a:off x="9994255" y="6222355"/>
-            <a:ext cx="1776561" cy="619720"/>
+          <p:cNvPr id="145" name="Shape 142"/>
+          <p:cNvSpPr/>
+          <p:nvPr/>
+        </p:nvSpPr>
+        <p:spPr>
+          <a:xfrm>
+            <a:off x="9994255" y="6212235"/>
+            <a:ext cx="1776561" cy="622250"/>
           </a:xfrm>
           <a:prstGeom prst="roundRect">
             <a:avLst>
-              <a:gd name="adj" fmla="val 9222"/>
+              <a:gd name="adj" fmla="val 9184"/>
             </a:avLst>
           </a:prstGeom>
           <a:solidFill>
@@ -7370,13 +6005,13 @@
       </p:sp>
       <p:sp>
         <p:nvSpPr>
-          <p:cNvPr id="187" name="Shape 185"/>
-          <p:cNvSpPr/>
-          <p:nvPr/>
-        </p:nvSpPr>
-        <p:spPr>
-          <a:xfrm>
-            <a:off x="10118080" y="6385322"/>
+          <p:cNvPr id="146" name="Shape 143"/>
+          <p:cNvSpPr/>
+          <p:nvPr/>
+        </p:nvSpPr>
+        <p:spPr>
+          <a:xfrm>
+            <a:off x="10118080" y="6376541"/>
             <a:ext cx="76200" cy="76200"/>
           </a:xfrm>
           <a:prstGeom prst="ellipse">
@@ -7390,13 +6025,13 @@
       </p:sp>
       <p:sp>
         <p:nvSpPr>
-          <p:cNvPr id="188" name="Text 186"/>
-          <p:cNvSpPr/>
-          <p:nvPr/>
-        </p:nvSpPr>
-        <p:spPr>
-          <a:xfrm>
-            <a:off x="10251430" y="6356747"/>
+          <p:cNvPr id="147" name="Text 144"/>
+          <p:cNvSpPr/>
+          <p:nvPr/>
+        </p:nvSpPr>
+        <p:spPr>
+          <a:xfrm>
+            <a:off x="10251430" y="6347966"/>
             <a:ext cx="938213" cy="171450"/>
           </a:xfrm>
           <a:prstGeom prst="rect">
@@ -7434,13 +6069,13 @@
       </p:sp>
       <p:sp>
         <p:nvSpPr>
-          <p:cNvPr id="189" name="Text 187"/>
-          <p:cNvSpPr/>
-          <p:nvPr/>
-        </p:nvSpPr>
-        <p:spPr>
-          <a:xfrm>
-            <a:off x="10118080" y="6528197"/>
+          <p:cNvPr id="148" name="Text 145"/>
+          <p:cNvSpPr/>
+          <p:nvPr/>
+        </p:nvSpPr>
+        <p:spPr>
+          <a:xfrm>
+            <a:off x="10118080" y="6519416"/>
             <a:ext cx="1681802" cy="226963"/>
           </a:xfrm>
           <a:prstGeom prst="rect">
@@ -7478,18 +6113,18 @@
       </p:sp>
       <p:sp>
         <p:nvSpPr>
-          <p:cNvPr id="190" name="Shape 188"/>
-          <p:cNvSpPr/>
-          <p:nvPr/>
-        </p:nvSpPr>
-        <p:spPr>
-          <a:xfrm>
-            <a:off x="11866066" y="6222355"/>
-            <a:ext cx="1776710" cy="619720"/>
+          <p:cNvPr id="149" name="Shape 146"/>
+          <p:cNvSpPr/>
+          <p:nvPr/>
+        </p:nvSpPr>
+        <p:spPr>
+          <a:xfrm>
+            <a:off x="11866066" y="6212235"/>
+            <a:ext cx="1776710" cy="622250"/>
           </a:xfrm>
           <a:prstGeom prst="roundRect">
             <a:avLst>
-              <a:gd name="adj" fmla="val 9222"/>
+              <a:gd name="adj" fmla="val 9184"/>
             </a:avLst>
           </a:prstGeom>
           <a:solidFill>
@@ -7505,13 +6140,13 @@
       </p:sp>
       <p:sp>
         <p:nvSpPr>
-          <p:cNvPr id="191" name="Text 189"/>
-          <p:cNvSpPr/>
-          <p:nvPr/>
-        </p:nvSpPr>
-        <p:spPr>
-          <a:xfrm>
-            <a:off x="11989891" y="6437709"/>
+          <p:cNvPr id="150" name="Text 147"/>
+          <p:cNvSpPr/>
+          <p:nvPr/>
+        </p:nvSpPr>
+        <p:spPr>
+          <a:xfrm>
+            <a:off x="11989891" y="6428929"/>
             <a:ext cx="1681966" cy="226963"/>
           </a:xfrm>
           <a:prstGeom prst="rect">
@@ -7549,18 +6184,18 @@
       </p:sp>
       <p:sp>
         <p:nvSpPr>
-          <p:cNvPr id="192" name="Shape 190"/>
-          <p:cNvSpPr/>
-          <p:nvPr/>
-        </p:nvSpPr>
-        <p:spPr>
-          <a:xfrm>
-            <a:off x="13738027" y="6222355"/>
-            <a:ext cx="1776710" cy="619720"/>
+          <p:cNvPr id="151" name="Shape 148"/>
+          <p:cNvSpPr/>
+          <p:nvPr/>
+        </p:nvSpPr>
+        <p:spPr>
+          <a:xfrm>
+            <a:off x="13738027" y="6212235"/>
+            <a:ext cx="1776710" cy="622250"/>
           </a:xfrm>
           <a:prstGeom prst="roundRect">
             <a:avLst>
-              <a:gd name="adj" fmla="val 9222"/>
+              <a:gd name="adj" fmla="val 9184"/>
             </a:avLst>
           </a:prstGeom>
           <a:solidFill>
@@ -7576,13 +6211,13 @@
       </p:sp>
       <p:sp>
         <p:nvSpPr>
-          <p:cNvPr id="193" name="Text 191"/>
-          <p:cNvSpPr/>
-          <p:nvPr/>
-        </p:nvSpPr>
-        <p:spPr>
-          <a:xfrm>
-            <a:off x="13861852" y="6343352"/>
+          <p:cNvPr id="152" name="Text 149"/>
+          <p:cNvSpPr/>
+          <p:nvPr/>
+        </p:nvSpPr>
+        <p:spPr>
+          <a:xfrm>
+            <a:off x="13861852" y="6334423"/>
             <a:ext cx="1605260" cy="415826"/>
           </a:xfrm>
           <a:prstGeom prst="rect">
@@ -7620,18 +6255,18 @@
       </p:sp>
       <p:sp>
         <p:nvSpPr>
-          <p:cNvPr id="194" name="Shape 192"/>
-          <p:cNvSpPr/>
-          <p:nvPr/>
-        </p:nvSpPr>
-        <p:spPr>
-          <a:xfrm>
-            <a:off x="15609987" y="6222355"/>
-            <a:ext cx="2220664" cy="619720"/>
+          <p:cNvPr id="153" name="Shape 150"/>
+          <p:cNvSpPr/>
+          <p:nvPr/>
+        </p:nvSpPr>
+        <p:spPr>
+          <a:xfrm>
+            <a:off x="15609987" y="6212235"/>
+            <a:ext cx="2220664" cy="622250"/>
           </a:xfrm>
           <a:prstGeom prst="roundRect">
             <a:avLst>
-              <a:gd name="adj" fmla="val 9222"/>
+              <a:gd name="adj" fmla="val 9184"/>
             </a:avLst>
           </a:prstGeom>
           <a:solidFill>
@@ -7647,13 +6282,13 @@
       </p:sp>
       <p:sp>
         <p:nvSpPr>
-          <p:cNvPr id="195" name="Text 193"/>
-          <p:cNvSpPr/>
-          <p:nvPr/>
-        </p:nvSpPr>
-        <p:spPr>
-          <a:xfrm>
-            <a:off x="15733812" y="6329065"/>
+          <p:cNvPr id="154" name="Text 151"/>
+          <p:cNvSpPr/>
+          <p:nvPr/>
+        </p:nvSpPr>
+        <p:spPr>
+          <a:xfrm>
+            <a:off x="15733812" y="6320135"/>
             <a:ext cx="2170316" cy="226963"/>
           </a:xfrm>
           <a:prstGeom prst="rect">
@@ -7691,13 +6326,13 @@
       </p:sp>
       <p:sp>
         <p:nvSpPr>
-          <p:cNvPr id="196" name="Text 194"/>
-          <p:cNvSpPr/>
-          <p:nvPr/>
-        </p:nvSpPr>
-        <p:spPr>
-          <a:xfrm>
-            <a:off x="15733812" y="6546503"/>
+          <p:cNvPr id="155" name="Text 152"/>
+          <p:cNvSpPr/>
+          <p:nvPr/>
+        </p:nvSpPr>
+        <p:spPr>
+          <a:xfrm>
+            <a:off x="15733812" y="6537573"/>
             <a:ext cx="2170316" cy="226963"/>
           </a:xfrm>
           <a:prstGeom prst="rect">
@@ -7735,18 +6370,18 @@
       </p:sp>
       <p:sp>
         <p:nvSpPr>
-          <p:cNvPr id="197" name="Shape 195"/>
-          <p:cNvSpPr/>
-          <p:nvPr/>
-        </p:nvSpPr>
-        <p:spPr>
-          <a:xfrm>
-            <a:off x="457200" y="6899225"/>
-            <a:ext cx="1954262" cy="808583"/>
+          <p:cNvPr id="156" name="Shape 153"/>
+          <p:cNvSpPr/>
+          <p:nvPr/>
+        </p:nvSpPr>
+        <p:spPr>
+          <a:xfrm>
+            <a:off x="457200" y="6891635"/>
+            <a:ext cx="1954262" cy="811113"/>
           </a:xfrm>
           <a:prstGeom prst="roundRect">
             <a:avLst>
-              <a:gd name="adj" fmla="val 7068"/>
+              <a:gd name="adj" fmla="val 7046"/>
             </a:avLst>
           </a:prstGeom>
           <a:solidFill>
@@ -7762,13 +6397,13 @@
       </p:sp>
       <p:sp>
         <p:nvSpPr>
-          <p:cNvPr id="198" name="Text 196"/>
-          <p:cNvSpPr/>
-          <p:nvPr/>
-        </p:nvSpPr>
-        <p:spPr>
-          <a:xfrm>
-            <a:off x="581025" y="7202984"/>
+          <p:cNvPr id="157" name="Text 154"/>
+          <p:cNvSpPr/>
+          <p:nvPr/>
+        </p:nvSpPr>
+        <p:spPr>
+          <a:xfrm>
+            <a:off x="581025" y="7196584"/>
             <a:ext cx="1877273" cy="239167"/>
           </a:xfrm>
           <a:prstGeom prst="rect">
@@ -7806,18 +6441,18 @@
       </p:sp>
       <p:sp>
         <p:nvSpPr>
-          <p:cNvPr id="199" name="Shape 197"/>
-          <p:cNvSpPr/>
-          <p:nvPr/>
-        </p:nvSpPr>
-        <p:spPr>
-          <a:xfrm>
-            <a:off x="2506712" y="6899225"/>
-            <a:ext cx="1776561" cy="808583"/>
+          <p:cNvPr id="158" name="Shape 155"/>
+          <p:cNvSpPr/>
+          <p:nvPr/>
+        </p:nvSpPr>
+        <p:spPr>
+          <a:xfrm>
+            <a:off x="2506712" y="6891635"/>
+            <a:ext cx="1776561" cy="811113"/>
           </a:xfrm>
           <a:prstGeom prst="roundRect">
             <a:avLst>
-              <a:gd name="adj" fmla="val 7068"/>
+              <a:gd name="adj" fmla="val 7046"/>
             </a:avLst>
           </a:prstGeom>
           <a:solidFill>
@@ -7833,13 +6468,13 @@
       </p:sp>
       <p:sp>
         <p:nvSpPr>
-          <p:cNvPr id="200" name="Text 198"/>
-          <p:cNvSpPr/>
-          <p:nvPr/>
-        </p:nvSpPr>
-        <p:spPr>
-          <a:xfrm>
-            <a:off x="2630537" y="7209086"/>
+          <p:cNvPr id="159" name="Text 156"/>
+          <p:cNvSpPr/>
+          <p:nvPr/>
+        </p:nvSpPr>
+        <p:spPr>
+          <a:xfrm>
+            <a:off x="2630537" y="7202686"/>
             <a:ext cx="1681802" cy="226963"/>
           </a:xfrm>
           <a:prstGeom prst="rect">
@@ -7877,18 +6512,18 @@
       </p:sp>
       <p:sp>
         <p:nvSpPr>
-          <p:cNvPr id="201" name="Shape 199"/>
-          <p:cNvSpPr/>
-          <p:nvPr/>
-        </p:nvSpPr>
-        <p:spPr>
-          <a:xfrm>
-            <a:off x="4378523" y="6899225"/>
-            <a:ext cx="1776710" cy="808583"/>
+          <p:cNvPr id="160" name="Shape 157"/>
+          <p:cNvSpPr/>
+          <p:nvPr/>
+        </p:nvSpPr>
+        <p:spPr>
+          <a:xfrm>
+            <a:off x="4378523" y="6891635"/>
+            <a:ext cx="1776710" cy="811113"/>
           </a:xfrm>
           <a:prstGeom prst="roundRect">
             <a:avLst>
-              <a:gd name="adj" fmla="val 7068"/>
+              <a:gd name="adj" fmla="val 7046"/>
             </a:avLst>
           </a:prstGeom>
           <a:solidFill>
@@ -7904,13 +6539,13 @@
       </p:sp>
       <p:sp>
         <p:nvSpPr>
-          <p:cNvPr id="202" name="Text 200"/>
-          <p:cNvSpPr/>
-          <p:nvPr/>
-        </p:nvSpPr>
-        <p:spPr>
-          <a:xfrm>
-            <a:off x="4502348" y="7209086"/>
+          <p:cNvPr id="161" name="Text 158"/>
+          <p:cNvSpPr/>
+          <p:nvPr/>
+        </p:nvSpPr>
+        <p:spPr>
+          <a:xfrm>
+            <a:off x="4502348" y="7202686"/>
             <a:ext cx="1681966" cy="226963"/>
           </a:xfrm>
           <a:prstGeom prst="rect">
@@ -7948,18 +6583,18 @@
       </p:sp>
       <p:sp>
         <p:nvSpPr>
-          <p:cNvPr id="203" name="Shape 201"/>
-          <p:cNvSpPr/>
-          <p:nvPr/>
-        </p:nvSpPr>
-        <p:spPr>
-          <a:xfrm>
-            <a:off x="6250484" y="6899225"/>
-            <a:ext cx="1776561" cy="808583"/>
+          <p:cNvPr id="162" name="Shape 159"/>
+          <p:cNvSpPr/>
+          <p:nvPr/>
+        </p:nvSpPr>
+        <p:spPr>
+          <a:xfrm>
+            <a:off x="6250484" y="6891635"/>
+            <a:ext cx="1776561" cy="811113"/>
           </a:xfrm>
           <a:prstGeom prst="roundRect">
             <a:avLst>
-              <a:gd name="adj" fmla="val 7068"/>
+              <a:gd name="adj" fmla="val 7046"/>
             </a:avLst>
           </a:prstGeom>
           <a:solidFill>
@@ -7975,13 +6610,13 @@
       </p:sp>
       <p:sp>
         <p:nvSpPr>
-          <p:cNvPr id="204" name="Text 202"/>
-          <p:cNvSpPr/>
-          <p:nvPr/>
-        </p:nvSpPr>
-        <p:spPr>
-          <a:xfrm>
-            <a:off x="6374309" y="7100292"/>
+          <p:cNvPr id="163" name="Text 160"/>
+          <p:cNvSpPr/>
+          <p:nvPr/>
+        </p:nvSpPr>
+        <p:spPr>
+          <a:xfrm>
+            <a:off x="6374309" y="7094041"/>
             <a:ext cx="1681802" cy="226963"/>
           </a:xfrm>
           <a:prstGeom prst="rect">
@@ -8019,13 +6654,13 @@
       </p:sp>
       <p:sp>
         <p:nvSpPr>
-          <p:cNvPr id="205" name="Text 203"/>
-          <p:cNvSpPr/>
-          <p:nvPr/>
-        </p:nvSpPr>
-        <p:spPr>
-          <a:xfrm>
-            <a:off x="6374309" y="7317730"/>
+          <p:cNvPr id="164" name="Text 161"/>
+          <p:cNvSpPr/>
+          <p:nvPr/>
+        </p:nvSpPr>
+        <p:spPr>
+          <a:xfrm>
+            <a:off x="6374309" y="7311479"/>
             <a:ext cx="1681802" cy="226963"/>
           </a:xfrm>
           <a:prstGeom prst="rect">
@@ -8063,18 +6698,18 @@
       </p:sp>
       <p:sp>
         <p:nvSpPr>
-          <p:cNvPr id="206" name="Shape 204"/>
-          <p:cNvSpPr/>
-          <p:nvPr/>
-        </p:nvSpPr>
-        <p:spPr>
-          <a:xfrm>
-            <a:off x="8122295" y="6899225"/>
-            <a:ext cx="1776710" cy="808583"/>
+          <p:cNvPr id="165" name="Shape 162"/>
+          <p:cNvSpPr/>
+          <p:nvPr/>
+        </p:nvSpPr>
+        <p:spPr>
+          <a:xfrm>
+            <a:off x="8122295" y="6891635"/>
+            <a:ext cx="1776710" cy="811113"/>
           </a:xfrm>
           <a:prstGeom prst="roundRect">
             <a:avLst>
-              <a:gd name="adj" fmla="val 7068"/>
+              <a:gd name="adj" fmla="val 7046"/>
             </a:avLst>
           </a:prstGeom>
           <a:solidFill>
@@ -8090,13 +6725,13 @@
       </p:sp>
       <p:sp>
         <p:nvSpPr>
-          <p:cNvPr id="207" name="Text 205"/>
-          <p:cNvSpPr/>
-          <p:nvPr/>
-        </p:nvSpPr>
-        <p:spPr>
-          <a:xfrm>
-            <a:off x="8246120" y="7005935"/>
+          <p:cNvPr id="166" name="Text 163"/>
+          <p:cNvSpPr/>
+          <p:nvPr/>
+        </p:nvSpPr>
+        <p:spPr>
+          <a:xfrm>
+            <a:off x="8246120" y="6999536"/>
             <a:ext cx="1681966" cy="226963"/>
           </a:xfrm>
           <a:prstGeom prst="rect">
@@ -8134,13 +6769,13 @@
       </p:sp>
       <p:sp>
         <p:nvSpPr>
-          <p:cNvPr id="208" name="Text 206"/>
-          <p:cNvSpPr/>
-          <p:nvPr/>
-        </p:nvSpPr>
-        <p:spPr>
-          <a:xfrm>
-            <a:off x="8246120" y="7223373"/>
+          <p:cNvPr id="167" name="Text 164"/>
+          <p:cNvSpPr/>
+          <p:nvPr/>
+        </p:nvSpPr>
+        <p:spPr>
+          <a:xfrm>
+            <a:off x="8246120" y="7216973"/>
             <a:ext cx="1605260" cy="415826"/>
           </a:xfrm>
           <a:prstGeom prst="rect">
@@ -8178,18 +6813,18 @@
       </p:sp>
       <p:sp>
         <p:nvSpPr>
-          <p:cNvPr id="209" name="Shape 207"/>
-          <p:cNvSpPr/>
-          <p:nvPr/>
-        </p:nvSpPr>
-        <p:spPr>
-          <a:xfrm>
-            <a:off x="9994255" y="6899225"/>
-            <a:ext cx="1776561" cy="808583"/>
+          <p:cNvPr id="168" name="Shape 165"/>
+          <p:cNvSpPr/>
+          <p:nvPr/>
+        </p:nvSpPr>
+        <p:spPr>
+          <a:xfrm>
+            <a:off x="9994255" y="6891635"/>
+            <a:ext cx="1776561" cy="811113"/>
           </a:xfrm>
           <a:prstGeom prst="roundRect">
             <a:avLst>
-              <a:gd name="adj" fmla="val 7068"/>
+              <a:gd name="adj" fmla="val 7046"/>
             </a:avLst>
           </a:prstGeom>
           <a:solidFill>
@@ -8205,13 +6840,13 @@
       </p:sp>
       <p:sp>
         <p:nvSpPr>
-          <p:cNvPr id="210" name="Text 208"/>
-          <p:cNvSpPr/>
-          <p:nvPr/>
-        </p:nvSpPr>
-        <p:spPr>
-          <a:xfrm>
-            <a:off x="10118080" y="7100292"/>
+          <p:cNvPr id="169" name="Text 166"/>
+          <p:cNvSpPr/>
+          <p:nvPr/>
+        </p:nvSpPr>
+        <p:spPr>
+          <a:xfrm>
+            <a:off x="10118080" y="7094041"/>
             <a:ext cx="1681802" cy="226963"/>
           </a:xfrm>
           <a:prstGeom prst="rect">
@@ -8249,13 +6884,13 @@
       </p:sp>
       <p:sp>
         <p:nvSpPr>
-          <p:cNvPr id="211" name="Text 209"/>
-          <p:cNvSpPr/>
-          <p:nvPr/>
-        </p:nvSpPr>
-        <p:spPr>
-          <a:xfrm>
-            <a:off x="10118080" y="7317730"/>
+          <p:cNvPr id="170" name="Text 167"/>
+          <p:cNvSpPr/>
+          <p:nvPr/>
+        </p:nvSpPr>
+        <p:spPr>
+          <a:xfrm>
+            <a:off x="10118080" y="7311479"/>
             <a:ext cx="1681802" cy="226963"/>
           </a:xfrm>
           <a:prstGeom prst="rect">
@@ -8293,18 +6928,18 @@
       </p:sp>
       <p:sp>
         <p:nvSpPr>
-          <p:cNvPr id="212" name="Shape 210"/>
-          <p:cNvSpPr/>
-          <p:nvPr/>
-        </p:nvSpPr>
-        <p:spPr>
-          <a:xfrm>
-            <a:off x="11866066" y="6899225"/>
-            <a:ext cx="1776710" cy="808583"/>
+          <p:cNvPr id="171" name="Shape 168"/>
+          <p:cNvSpPr/>
+          <p:nvPr/>
+        </p:nvSpPr>
+        <p:spPr>
+          <a:xfrm>
+            <a:off x="11866066" y="6891635"/>
+            <a:ext cx="1776710" cy="811113"/>
           </a:xfrm>
           <a:prstGeom prst="roundRect">
             <a:avLst>
-              <a:gd name="adj" fmla="val 7068"/>
+              <a:gd name="adj" fmla="val 7046"/>
             </a:avLst>
           </a:prstGeom>
           <a:solidFill>
@@ -8320,13 +6955,13 @@
       </p:sp>
       <p:sp>
         <p:nvSpPr>
-          <p:cNvPr id="213" name="Text 211"/>
-          <p:cNvSpPr/>
-          <p:nvPr/>
-        </p:nvSpPr>
-        <p:spPr>
-          <a:xfrm>
-            <a:off x="11989891" y="7209086"/>
+          <p:cNvPr id="172" name="Text 169"/>
+          <p:cNvSpPr/>
+          <p:nvPr/>
+        </p:nvSpPr>
+        <p:spPr>
+          <a:xfrm>
+            <a:off x="11989891" y="7202686"/>
             <a:ext cx="1681966" cy="226963"/>
           </a:xfrm>
           <a:prstGeom prst="rect">
@@ -8364,18 +6999,18 @@
       </p:sp>
       <p:sp>
         <p:nvSpPr>
-          <p:cNvPr id="214" name="Shape 212"/>
-          <p:cNvSpPr/>
-          <p:nvPr/>
-        </p:nvSpPr>
-        <p:spPr>
-          <a:xfrm>
-            <a:off x="13738027" y="6899225"/>
-            <a:ext cx="1776710" cy="808583"/>
+          <p:cNvPr id="173" name="Shape 170"/>
+          <p:cNvSpPr/>
+          <p:nvPr/>
+        </p:nvSpPr>
+        <p:spPr>
+          <a:xfrm>
+            <a:off x="13738027" y="6891635"/>
+            <a:ext cx="1776710" cy="811113"/>
           </a:xfrm>
           <a:prstGeom prst="roundRect">
             <a:avLst>
-              <a:gd name="adj" fmla="val 7068"/>
+              <a:gd name="adj" fmla="val 7046"/>
             </a:avLst>
           </a:prstGeom>
           <a:solidFill>
@@ -8391,13 +7026,13 @@
       </p:sp>
       <p:sp>
         <p:nvSpPr>
-          <p:cNvPr id="215" name="Text 213"/>
-          <p:cNvSpPr/>
-          <p:nvPr/>
-        </p:nvSpPr>
-        <p:spPr>
-          <a:xfrm>
-            <a:off x="13861852" y="7114580"/>
+          <p:cNvPr id="174" name="Text 171"/>
+          <p:cNvSpPr/>
+          <p:nvPr/>
+        </p:nvSpPr>
+        <p:spPr>
+          <a:xfrm>
+            <a:off x="13861852" y="7108329"/>
             <a:ext cx="1605260" cy="415826"/>
           </a:xfrm>
           <a:prstGeom prst="rect">
@@ -8435,18 +7070,18 @@
       </p:sp>
       <p:sp>
         <p:nvSpPr>
-          <p:cNvPr id="216" name="Shape 214"/>
-          <p:cNvSpPr/>
-          <p:nvPr/>
-        </p:nvSpPr>
-        <p:spPr>
-          <a:xfrm>
-            <a:off x="15609987" y="6899225"/>
-            <a:ext cx="2220664" cy="808583"/>
+          <p:cNvPr id="175" name="Shape 172"/>
+          <p:cNvSpPr/>
+          <p:nvPr/>
+        </p:nvSpPr>
+        <p:spPr>
+          <a:xfrm>
+            <a:off x="15609987" y="6891635"/>
+            <a:ext cx="2220664" cy="811113"/>
           </a:xfrm>
           <a:prstGeom prst="roundRect">
             <a:avLst>
-              <a:gd name="adj" fmla="val 7068"/>
+              <a:gd name="adj" fmla="val 7046"/>
             </a:avLst>
           </a:prstGeom>
           <a:solidFill>
@@ -8462,13 +7097,13 @@
       </p:sp>
       <p:sp>
         <p:nvSpPr>
-          <p:cNvPr id="217" name="Text 215"/>
-          <p:cNvSpPr/>
-          <p:nvPr/>
-        </p:nvSpPr>
-        <p:spPr>
-          <a:xfrm>
-            <a:off x="15733812" y="7100292"/>
+          <p:cNvPr id="176" name="Text 173"/>
+          <p:cNvSpPr/>
+          <p:nvPr/>
+        </p:nvSpPr>
+        <p:spPr>
+          <a:xfrm>
+            <a:off x="15733812" y="7094041"/>
             <a:ext cx="2170316" cy="226963"/>
           </a:xfrm>
           <a:prstGeom prst="rect">
@@ -8506,13 +7141,13 @@
       </p:sp>
       <p:sp>
         <p:nvSpPr>
-          <p:cNvPr id="218" name="Text 216"/>
-          <p:cNvSpPr/>
-          <p:nvPr/>
-        </p:nvSpPr>
-        <p:spPr>
-          <a:xfrm>
-            <a:off x="15733812" y="7317730"/>
+          <p:cNvPr id="177" name="Text 174"/>
+          <p:cNvSpPr/>
+          <p:nvPr/>
+        </p:nvSpPr>
+        <p:spPr>
+          <a:xfrm>
+            <a:off x="15733812" y="7311479"/>
             <a:ext cx="2170316" cy="226963"/>
           </a:xfrm>
           <a:prstGeom prst="rect">
@@ -8550,18 +7185,18 @@
       </p:sp>
       <p:sp>
         <p:nvSpPr>
-          <p:cNvPr id="219" name="Shape 217"/>
-          <p:cNvSpPr/>
-          <p:nvPr/>
-        </p:nvSpPr>
-        <p:spPr>
-          <a:xfrm>
-            <a:off x="457200" y="7764959"/>
-            <a:ext cx="1954262" cy="800695"/>
+          <p:cNvPr id="178" name="Shape 175"/>
+          <p:cNvSpPr/>
+          <p:nvPr/>
+        </p:nvSpPr>
+        <p:spPr>
+          <a:xfrm>
+            <a:off x="457200" y="7759898"/>
+            <a:ext cx="1954262" cy="803225"/>
           </a:xfrm>
           <a:prstGeom prst="roundRect">
             <a:avLst>
-              <a:gd name="adj" fmla="val 7138"/>
+              <a:gd name="adj" fmla="val 7115"/>
             </a:avLst>
           </a:prstGeom>
           <a:solidFill>
@@ -8577,13 +7212,13 @@
       </p:sp>
       <p:sp>
         <p:nvSpPr>
-          <p:cNvPr id="220" name="Text 218"/>
-          <p:cNvSpPr/>
-          <p:nvPr/>
-        </p:nvSpPr>
-        <p:spPr>
-          <a:xfrm>
-            <a:off x="581025" y="8064698"/>
+          <p:cNvPr id="179" name="Text 176"/>
+          <p:cNvSpPr/>
+          <p:nvPr/>
+        </p:nvSpPr>
+        <p:spPr>
+          <a:xfrm>
+            <a:off x="581025" y="8060978"/>
             <a:ext cx="1877273" cy="239167"/>
           </a:xfrm>
           <a:prstGeom prst="rect">
@@ -8621,18 +7256,18 @@
       </p:sp>
       <p:sp>
         <p:nvSpPr>
-          <p:cNvPr id="221" name="Shape 219"/>
-          <p:cNvSpPr/>
-          <p:nvPr/>
-        </p:nvSpPr>
-        <p:spPr>
-          <a:xfrm>
-            <a:off x="2506712" y="7764959"/>
-            <a:ext cx="1776561" cy="800695"/>
+          <p:cNvPr id="180" name="Shape 177"/>
+          <p:cNvSpPr/>
+          <p:nvPr/>
+        </p:nvSpPr>
+        <p:spPr>
+          <a:xfrm>
+            <a:off x="2506712" y="7759898"/>
+            <a:ext cx="1776561" cy="803225"/>
           </a:xfrm>
           <a:prstGeom prst="roundRect">
             <a:avLst>
-              <a:gd name="adj" fmla="val 7138"/>
+              <a:gd name="adj" fmla="val 7115"/>
             </a:avLst>
           </a:prstGeom>
           <a:solidFill>
@@ -8648,13 +7283,13 @@
       </p:sp>
       <p:sp>
         <p:nvSpPr>
-          <p:cNvPr id="222" name="Text 220"/>
-          <p:cNvSpPr/>
-          <p:nvPr/>
-        </p:nvSpPr>
-        <p:spPr>
-          <a:xfrm>
-            <a:off x="2630537" y="8070800"/>
+          <p:cNvPr id="181" name="Text 178"/>
+          <p:cNvSpPr/>
+          <p:nvPr/>
+        </p:nvSpPr>
+        <p:spPr>
+          <a:xfrm>
+            <a:off x="2630537" y="8067080"/>
             <a:ext cx="1681802" cy="226963"/>
           </a:xfrm>
           <a:prstGeom prst="rect">
@@ -8692,18 +7327,18 @@
       </p:sp>
       <p:sp>
         <p:nvSpPr>
-          <p:cNvPr id="223" name="Shape 221"/>
-          <p:cNvSpPr/>
-          <p:nvPr/>
-        </p:nvSpPr>
-        <p:spPr>
-          <a:xfrm>
-            <a:off x="4378523" y="7764959"/>
-            <a:ext cx="1776710" cy="800695"/>
+          <p:cNvPr id="182" name="Shape 179"/>
+          <p:cNvSpPr/>
+          <p:nvPr/>
+        </p:nvSpPr>
+        <p:spPr>
+          <a:xfrm>
+            <a:off x="4378523" y="7759898"/>
+            <a:ext cx="1776710" cy="803225"/>
           </a:xfrm>
           <a:prstGeom prst="roundRect">
             <a:avLst>
-              <a:gd name="adj" fmla="val 7138"/>
+              <a:gd name="adj" fmla="val 7115"/>
             </a:avLst>
           </a:prstGeom>
           <a:solidFill>
@@ -8719,13 +7354,13 @@
       </p:sp>
       <p:sp>
         <p:nvSpPr>
-          <p:cNvPr id="224" name="Text 222"/>
-          <p:cNvSpPr/>
-          <p:nvPr/>
-        </p:nvSpPr>
-        <p:spPr>
-          <a:xfrm>
-            <a:off x="4502348" y="8070800"/>
+          <p:cNvPr id="183" name="Text 180"/>
+          <p:cNvSpPr/>
+          <p:nvPr/>
+        </p:nvSpPr>
+        <p:spPr>
+          <a:xfrm>
+            <a:off x="4502348" y="8067080"/>
             <a:ext cx="1681966" cy="226963"/>
           </a:xfrm>
           <a:prstGeom prst="rect">
@@ -8763,18 +7398,18 @@
       </p:sp>
       <p:sp>
         <p:nvSpPr>
-          <p:cNvPr id="225" name="Shape 223"/>
-          <p:cNvSpPr/>
-          <p:nvPr/>
-        </p:nvSpPr>
-        <p:spPr>
-          <a:xfrm>
-            <a:off x="6250484" y="7764959"/>
-            <a:ext cx="1776561" cy="800695"/>
+          <p:cNvPr id="184" name="Shape 181"/>
+          <p:cNvSpPr/>
+          <p:nvPr/>
+        </p:nvSpPr>
+        <p:spPr>
+          <a:xfrm>
+            <a:off x="6250484" y="7759898"/>
+            <a:ext cx="1776561" cy="803225"/>
           </a:xfrm>
           <a:prstGeom prst="roundRect">
             <a:avLst>
-              <a:gd name="adj" fmla="val 7138"/>
+              <a:gd name="adj" fmla="val 7115"/>
             </a:avLst>
           </a:prstGeom>
           <a:solidFill>
@@ -8790,13 +7425,13 @@
       </p:sp>
       <p:sp>
         <p:nvSpPr>
-          <p:cNvPr id="226" name="Text 224"/>
-          <p:cNvSpPr/>
-          <p:nvPr/>
-        </p:nvSpPr>
-        <p:spPr>
-          <a:xfrm>
-            <a:off x="6374309" y="7962156"/>
+          <p:cNvPr id="185" name="Text 182"/>
+          <p:cNvSpPr/>
+          <p:nvPr/>
+        </p:nvSpPr>
+        <p:spPr>
+          <a:xfrm>
+            <a:off x="6374309" y="7958286"/>
             <a:ext cx="1681802" cy="226963"/>
           </a:xfrm>
           <a:prstGeom prst="rect">
@@ -8834,13 +7469,13 @@
       </p:sp>
       <p:sp>
         <p:nvSpPr>
-          <p:cNvPr id="227" name="Text 225"/>
-          <p:cNvSpPr/>
-          <p:nvPr/>
-        </p:nvSpPr>
-        <p:spPr>
-          <a:xfrm>
-            <a:off x="6374309" y="8179594"/>
+          <p:cNvPr id="186" name="Text 183"/>
+          <p:cNvSpPr/>
+          <p:nvPr/>
+        </p:nvSpPr>
+        <p:spPr>
+          <a:xfrm>
+            <a:off x="6374309" y="8175724"/>
             <a:ext cx="1681802" cy="226963"/>
           </a:xfrm>
           <a:prstGeom prst="rect">
@@ -8878,18 +7513,18 @@
       </p:sp>
       <p:sp>
         <p:nvSpPr>
-          <p:cNvPr id="228" name="Shape 226"/>
-          <p:cNvSpPr/>
-          <p:nvPr/>
-        </p:nvSpPr>
-        <p:spPr>
-          <a:xfrm>
-            <a:off x="8122295" y="7764959"/>
-            <a:ext cx="1776710" cy="800695"/>
+          <p:cNvPr id="187" name="Shape 184"/>
+          <p:cNvSpPr/>
+          <p:nvPr/>
+        </p:nvSpPr>
+        <p:spPr>
+          <a:xfrm>
+            <a:off x="8122295" y="7759898"/>
+            <a:ext cx="1776710" cy="803225"/>
           </a:xfrm>
           <a:prstGeom prst="roundRect">
             <a:avLst>
-              <a:gd name="adj" fmla="val 7138"/>
+              <a:gd name="adj" fmla="val 7115"/>
             </a:avLst>
           </a:prstGeom>
           <a:solidFill>
@@ -8905,13 +7540,13 @@
       </p:sp>
       <p:sp>
         <p:nvSpPr>
-          <p:cNvPr id="229" name="Shape 227"/>
-          <p:cNvSpPr/>
-          <p:nvPr/>
-        </p:nvSpPr>
-        <p:spPr>
-          <a:xfrm>
-            <a:off x="8246120" y="8018413"/>
+          <p:cNvPr id="188" name="Shape 185"/>
+          <p:cNvSpPr/>
+          <p:nvPr/>
+        </p:nvSpPr>
+        <p:spPr>
+          <a:xfrm>
+            <a:off x="8246120" y="8014692"/>
             <a:ext cx="76200" cy="76200"/>
           </a:xfrm>
           <a:prstGeom prst="ellipse">
@@ -8925,13 +7560,13 @@
       </p:sp>
       <p:sp>
         <p:nvSpPr>
-          <p:cNvPr id="230" name="Text 228"/>
-          <p:cNvSpPr/>
-          <p:nvPr/>
-        </p:nvSpPr>
-        <p:spPr>
-          <a:xfrm>
-            <a:off x="8379470" y="7989838"/>
+          <p:cNvPr id="189" name="Text 186"/>
+          <p:cNvSpPr/>
+          <p:nvPr/>
+        </p:nvSpPr>
+        <p:spPr>
+          <a:xfrm>
+            <a:off x="8379470" y="7986117"/>
             <a:ext cx="626418" cy="171450"/>
           </a:xfrm>
           <a:prstGeom prst="rect">
@@ -8969,13 +7604,13 @@
       </p:sp>
       <p:sp>
         <p:nvSpPr>
-          <p:cNvPr id="231" name="Text 229"/>
-          <p:cNvSpPr/>
-          <p:nvPr/>
-        </p:nvSpPr>
-        <p:spPr>
-          <a:xfrm>
-            <a:off x="8246120" y="8161288"/>
+          <p:cNvPr id="190" name="Text 187"/>
+          <p:cNvSpPr/>
+          <p:nvPr/>
+        </p:nvSpPr>
+        <p:spPr>
+          <a:xfrm>
+            <a:off x="8246120" y="8157567"/>
             <a:ext cx="1681966" cy="226963"/>
           </a:xfrm>
           <a:prstGeom prst="rect">
@@ -9013,18 +7648,18 @@
       </p:sp>
       <p:sp>
         <p:nvSpPr>
-          <p:cNvPr id="232" name="Shape 230"/>
-          <p:cNvSpPr/>
-          <p:nvPr/>
-        </p:nvSpPr>
-        <p:spPr>
-          <a:xfrm>
-            <a:off x="9994255" y="7764959"/>
-            <a:ext cx="1776561" cy="800695"/>
+          <p:cNvPr id="191" name="Shape 188"/>
+          <p:cNvSpPr/>
+          <p:nvPr/>
+        </p:nvSpPr>
+        <p:spPr>
+          <a:xfrm>
+            <a:off x="9994255" y="7759898"/>
+            <a:ext cx="1776561" cy="803225"/>
           </a:xfrm>
           <a:prstGeom prst="roundRect">
             <a:avLst>
-              <a:gd name="adj" fmla="val 7138"/>
+              <a:gd name="adj" fmla="val 7115"/>
             </a:avLst>
           </a:prstGeom>
           <a:solidFill>
@@ -9040,13 +7675,13 @@
       </p:sp>
       <p:sp>
         <p:nvSpPr>
-          <p:cNvPr id="233" name="Shape 231"/>
-          <p:cNvSpPr/>
-          <p:nvPr/>
-        </p:nvSpPr>
-        <p:spPr>
-          <a:xfrm>
-            <a:off x="10118080" y="7909768"/>
+          <p:cNvPr id="192" name="Shape 189"/>
+          <p:cNvSpPr/>
+          <p:nvPr/>
+        </p:nvSpPr>
+        <p:spPr>
+          <a:xfrm>
+            <a:off x="10118080" y="7905899"/>
             <a:ext cx="76200" cy="76200"/>
           </a:xfrm>
           <a:prstGeom prst="ellipse">
@@ -9060,13 +7695,13 @@
       </p:sp>
       <p:sp>
         <p:nvSpPr>
-          <p:cNvPr id="234" name="Text 232"/>
-          <p:cNvSpPr/>
-          <p:nvPr/>
-        </p:nvSpPr>
-        <p:spPr>
-          <a:xfrm>
-            <a:off x="10251430" y="7881193"/>
+          <p:cNvPr id="193" name="Text 190"/>
+          <p:cNvSpPr/>
+          <p:nvPr/>
+        </p:nvSpPr>
+        <p:spPr>
+          <a:xfrm>
+            <a:off x="10251430" y="7877324"/>
             <a:ext cx="626418" cy="171450"/>
           </a:xfrm>
           <a:prstGeom prst="rect">
@@ -9104,13 +7739,13 @@
       </p:sp>
       <p:sp>
         <p:nvSpPr>
-          <p:cNvPr id="235" name="Text 233"/>
-          <p:cNvSpPr/>
-          <p:nvPr/>
-        </p:nvSpPr>
-        <p:spPr>
-          <a:xfrm>
-            <a:off x="10118080" y="8052643"/>
+          <p:cNvPr id="194" name="Text 191"/>
+          <p:cNvSpPr/>
+          <p:nvPr/>
+        </p:nvSpPr>
+        <p:spPr>
+          <a:xfrm>
+            <a:off x="10118080" y="8048774"/>
             <a:ext cx="1681802" cy="226963"/>
           </a:xfrm>
           <a:prstGeom prst="rect">
@@ -9148,13 +7783,13 @@
       </p:sp>
       <p:sp>
         <p:nvSpPr>
-          <p:cNvPr id="236" name="Text 234"/>
-          <p:cNvSpPr/>
-          <p:nvPr/>
-        </p:nvSpPr>
-        <p:spPr>
-          <a:xfrm>
-            <a:off x="10118080" y="8270081"/>
+          <p:cNvPr id="195" name="Text 192"/>
+          <p:cNvSpPr/>
+          <p:nvPr/>
+        </p:nvSpPr>
+        <p:spPr>
+          <a:xfrm>
+            <a:off x="10118080" y="8266212"/>
             <a:ext cx="1681802" cy="226963"/>
           </a:xfrm>
           <a:prstGeom prst="rect">
@@ -9192,18 +7827,18 @@
       </p:sp>
       <p:sp>
         <p:nvSpPr>
-          <p:cNvPr id="237" name="Shape 235"/>
-          <p:cNvSpPr/>
-          <p:nvPr/>
-        </p:nvSpPr>
-        <p:spPr>
-          <a:xfrm>
-            <a:off x="11866066" y="7764959"/>
-            <a:ext cx="1776710" cy="800695"/>
+          <p:cNvPr id="196" name="Shape 193"/>
+          <p:cNvSpPr/>
+          <p:nvPr/>
+        </p:nvSpPr>
+        <p:spPr>
+          <a:xfrm>
+            <a:off x="11866066" y="7759898"/>
+            <a:ext cx="1776710" cy="803225"/>
           </a:xfrm>
           <a:prstGeom prst="roundRect">
             <a:avLst>
-              <a:gd name="adj" fmla="val 7138"/>
+              <a:gd name="adj" fmla="val 7115"/>
             </a:avLst>
           </a:prstGeom>
           <a:solidFill>
@@ -9219,13 +7854,13 @@
       </p:sp>
       <p:sp>
         <p:nvSpPr>
-          <p:cNvPr id="238" name="Text 236"/>
-          <p:cNvSpPr/>
-          <p:nvPr/>
-        </p:nvSpPr>
-        <p:spPr>
-          <a:xfrm>
-            <a:off x="11989891" y="8070800"/>
+          <p:cNvPr id="197" name="Text 194"/>
+          <p:cNvSpPr/>
+          <p:nvPr/>
+        </p:nvSpPr>
+        <p:spPr>
+          <a:xfrm>
+            <a:off x="11989891" y="8067080"/>
             <a:ext cx="1681966" cy="226963"/>
           </a:xfrm>
           <a:prstGeom prst="rect">
@@ -9263,18 +7898,18 @@
       </p:sp>
       <p:sp>
         <p:nvSpPr>
-          <p:cNvPr id="239" name="Shape 237"/>
-          <p:cNvSpPr/>
-          <p:nvPr/>
-        </p:nvSpPr>
-        <p:spPr>
-          <a:xfrm>
-            <a:off x="13738027" y="7764959"/>
-            <a:ext cx="1776710" cy="800695"/>
+          <p:cNvPr id="198" name="Shape 195"/>
+          <p:cNvSpPr/>
+          <p:nvPr/>
+        </p:nvSpPr>
+        <p:spPr>
+          <a:xfrm>
+            <a:off x="13738027" y="7759898"/>
+            <a:ext cx="1776710" cy="803225"/>
           </a:xfrm>
           <a:prstGeom prst="roundRect">
             <a:avLst>
-              <a:gd name="adj" fmla="val 7138"/>
+              <a:gd name="adj" fmla="val 7115"/>
             </a:avLst>
           </a:prstGeom>
           <a:solidFill>
@@ -9290,13 +7925,13 @@
       </p:sp>
       <p:sp>
         <p:nvSpPr>
-          <p:cNvPr id="240" name="Text 238"/>
-          <p:cNvSpPr/>
-          <p:nvPr/>
-        </p:nvSpPr>
-        <p:spPr>
-          <a:xfrm>
-            <a:off x="13861852" y="7976443"/>
+          <p:cNvPr id="199" name="Text 196"/>
+          <p:cNvSpPr/>
+          <p:nvPr/>
+        </p:nvSpPr>
+        <p:spPr>
+          <a:xfrm>
+            <a:off x="13861852" y="7972574"/>
             <a:ext cx="1605260" cy="415826"/>
           </a:xfrm>
           <a:prstGeom prst="rect">
@@ -9334,18 +7969,18 @@
       </p:sp>
       <p:sp>
         <p:nvSpPr>
-          <p:cNvPr id="241" name="Shape 239"/>
-          <p:cNvSpPr/>
-          <p:nvPr/>
-        </p:nvSpPr>
-        <p:spPr>
-          <a:xfrm>
-            <a:off x="15609987" y="7764959"/>
-            <a:ext cx="2220664" cy="800695"/>
+          <p:cNvPr id="200" name="Shape 197"/>
+          <p:cNvSpPr/>
+          <p:nvPr/>
+        </p:nvSpPr>
+        <p:spPr>
+          <a:xfrm>
+            <a:off x="15609987" y="7759898"/>
+            <a:ext cx="2220664" cy="803225"/>
           </a:xfrm>
           <a:prstGeom prst="roundRect">
             <a:avLst>
-              <a:gd name="adj" fmla="val 7138"/>
+              <a:gd name="adj" fmla="val 7115"/>
             </a:avLst>
           </a:prstGeom>
           <a:solidFill>
@@ -9361,13 +7996,13 @@
       </p:sp>
       <p:sp>
         <p:nvSpPr>
-          <p:cNvPr id="242" name="Text 240"/>
-          <p:cNvSpPr/>
-          <p:nvPr/>
-        </p:nvSpPr>
-        <p:spPr>
-          <a:xfrm>
-            <a:off x="15733812" y="7976443"/>
+          <p:cNvPr id="201" name="Text 198"/>
+          <p:cNvSpPr/>
+          <p:nvPr/>
+        </p:nvSpPr>
+        <p:spPr>
+          <a:xfrm>
+            <a:off x="15733812" y="7972574"/>
             <a:ext cx="2049214" cy="415826"/>
           </a:xfrm>
           <a:prstGeom prst="rect">
@@ -9405,18 +8040,18 @@
       </p:sp>
       <p:sp>
         <p:nvSpPr>
-          <p:cNvPr id="243" name="Shape 241"/>
-          <p:cNvSpPr/>
-          <p:nvPr/>
-        </p:nvSpPr>
-        <p:spPr>
-          <a:xfrm>
-            <a:off x="457200" y="8622804"/>
-            <a:ext cx="1954262" cy="1026021"/>
+          <p:cNvPr id="202" name="Shape 199"/>
+          <p:cNvSpPr/>
+          <p:nvPr/>
+        </p:nvSpPr>
+        <p:spPr>
+          <a:xfrm>
+            <a:off x="457200" y="8620274"/>
+            <a:ext cx="1954262" cy="1028551"/>
           </a:xfrm>
           <a:prstGeom prst="roundRect">
             <a:avLst>
-              <a:gd name="adj" fmla="val 5570"/>
+              <a:gd name="adj" fmla="val 5556"/>
             </a:avLst>
           </a:prstGeom>
           <a:solidFill>
@@ -9432,13 +8067,13 @@
       </p:sp>
       <p:sp>
         <p:nvSpPr>
-          <p:cNvPr id="244" name="Text 242"/>
-          <p:cNvSpPr/>
-          <p:nvPr/>
-        </p:nvSpPr>
-        <p:spPr>
-          <a:xfrm>
-            <a:off x="581025" y="9035207"/>
+          <p:cNvPr id="203" name="Text 200"/>
+          <p:cNvSpPr/>
+          <p:nvPr/>
+        </p:nvSpPr>
+        <p:spPr>
+          <a:xfrm>
+            <a:off x="581025" y="9034016"/>
             <a:ext cx="1877273" cy="239167"/>
           </a:xfrm>
           <a:prstGeom prst="rect">
@@ -9476,18 +8111,18 @@
       </p:sp>
       <p:sp>
         <p:nvSpPr>
-          <p:cNvPr id="245" name="Shape 243"/>
-          <p:cNvSpPr/>
-          <p:nvPr/>
-        </p:nvSpPr>
-        <p:spPr>
-          <a:xfrm>
-            <a:off x="2506712" y="8622804"/>
-            <a:ext cx="1776561" cy="1026021"/>
+          <p:cNvPr id="204" name="Shape 201"/>
+          <p:cNvSpPr/>
+          <p:nvPr/>
+        </p:nvSpPr>
+        <p:spPr>
+          <a:xfrm>
+            <a:off x="2506712" y="8620274"/>
+            <a:ext cx="1776561" cy="1028551"/>
           </a:xfrm>
           <a:prstGeom prst="roundRect">
             <a:avLst>
-              <a:gd name="adj" fmla="val 5570"/>
+              <a:gd name="adj" fmla="val 5556"/>
             </a:avLst>
           </a:prstGeom>
           <a:solidFill>
@@ -9503,13 +8138,13 @@
       </p:sp>
       <p:sp>
         <p:nvSpPr>
-          <p:cNvPr id="246" name="Text 244"/>
-          <p:cNvSpPr/>
-          <p:nvPr/>
-        </p:nvSpPr>
-        <p:spPr>
-          <a:xfrm>
-            <a:off x="2630537" y="9041309"/>
+          <p:cNvPr id="205" name="Text 202"/>
+          <p:cNvSpPr/>
+          <p:nvPr/>
+        </p:nvSpPr>
+        <p:spPr>
+          <a:xfrm>
+            <a:off x="2630537" y="9040118"/>
             <a:ext cx="1681802" cy="226963"/>
           </a:xfrm>
           <a:prstGeom prst="rect">
@@ -9547,18 +8182,18 @@
       </p:sp>
       <p:sp>
         <p:nvSpPr>
-          <p:cNvPr id="247" name="Shape 245"/>
-          <p:cNvSpPr/>
-          <p:nvPr/>
-        </p:nvSpPr>
-        <p:spPr>
-          <a:xfrm>
-            <a:off x="4378523" y="8622804"/>
-            <a:ext cx="1776710" cy="1026021"/>
+          <p:cNvPr id="206" name="Shape 203"/>
+          <p:cNvSpPr/>
+          <p:nvPr/>
+        </p:nvSpPr>
+        <p:spPr>
+          <a:xfrm>
+            <a:off x="4378523" y="8620274"/>
+            <a:ext cx="1776710" cy="1028551"/>
           </a:xfrm>
           <a:prstGeom prst="roundRect">
             <a:avLst>
-              <a:gd name="adj" fmla="val 5570"/>
+              <a:gd name="adj" fmla="val 5556"/>
             </a:avLst>
           </a:prstGeom>
           <a:solidFill>
@@ -9574,13 +8209,13 @@
       </p:sp>
       <p:sp>
         <p:nvSpPr>
-          <p:cNvPr id="248" name="Text 246"/>
-          <p:cNvSpPr/>
-          <p:nvPr/>
-        </p:nvSpPr>
-        <p:spPr>
-          <a:xfrm>
-            <a:off x="4502348" y="9041309"/>
+          <p:cNvPr id="207" name="Text 204"/>
+          <p:cNvSpPr/>
+          <p:nvPr/>
+        </p:nvSpPr>
+        <p:spPr>
+          <a:xfrm>
+            <a:off x="4502348" y="9040118"/>
             <a:ext cx="1681966" cy="226963"/>
           </a:xfrm>
           <a:prstGeom prst="rect">
@@ -9618,18 +8253,18 @@
       </p:sp>
       <p:sp>
         <p:nvSpPr>
-          <p:cNvPr id="249" name="Shape 247"/>
-          <p:cNvSpPr/>
-          <p:nvPr/>
-        </p:nvSpPr>
-        <p:spPr>
-          <a:xfrm>
-            <a:off x="6250484" y="8622804"/>
-            <a:ext cx="1776561" cy="1026021"/>
+          <p:cNvPr id="208" name="Shape 205"/>
+          <p:cNvSpPr/>
+          <p:nvPr/>
+        </p:nvSpPr>
+        <p:spPr>
+          <a:xfrm>
+            <a:off x="6250484" y="8620274"/>
+            <a:ext cx="1776561" cy="1028551"/>
           </a:xfrm>
           <a:prstGeom prst="roundRect">
             <a:avLst>
-              <a:gd name="adj" fmla="val 5570"/>
+              <a:gd name="adj" fmla="val 5556"/>
             </a:avLst>
           </a:prstGeom>
           <a:solidFill>
@@ -9645,13 +8280,13 @@
       </p:sp>
       <p:sp>
         <p:nvSpPr>
-          <p:cNvPr id="250" name="Text 248"/>
-          <p:cNvSpPr/>
-          <p:nvPr/>
-        </p:nvSpPr>
-        <p:spPr>
-          <a:xfrm>
-            <a:off x="6374309" y="8838158"/>
+          <p:cNvPr id="209" name="Text 206"/>
+          <p:cNvSpPr/>
+          <p:nvPr/>
+        </p:nvSpPr>
+        <p:spPr>
+          <a:xfrm>
+            <a:off x="6374309" y="8836968"/>
             <a:ext cx="1681802" cy="226963"/>
           </a:xfrm>
           <a:prstGeom prst="rect">
@@ -9689,13 +8324,13 @@
       </p:sp>
       <p:sp>
         <p:nvSpPr>
-          <p:cNvPr id="251" name="Text 249"/>
-          <p:cNvSpPr/>
-          <p:nvPr/>
-        </p:nvSpPr>
-        <p:spPr>
-          <a:xfrm>
-            <a:off x="6374309" y="9055596"/>
+          <p:cNvPr id="210" name="Text 207"/>
+          <p:cNvSpPr/>
+          <p:nvPr/>
+        </p:nvSpPr>
+        <p:spPr>
+          <a:xfrm>
+            <a:off x="6374309" y="9054405"/>
             <a:ext cx="1605111" cy="415826"/>
           </a:xfrm>
           <a:prstGeom prst="rect">
@@ -9733,18 +8368,18 @@
       </p:sp>
       <p:sp>
         <p:nvSpPr>
-          <p:cNvPr id="252" name="Shape 250"/>
-          <p:cNvSpPr/>
-          <p:nvPr/>
-        </p:nvSpPr>
-        <p:spPr>
-          <a:xfrm>
-            <a:off x="8122295" y="8622804"/>
-            <a:ext cx="1776710" cy="1026021"/>
+          <p:cNvPr id="211" name="Shape 208"/>
+          <p:cNvSpPr/>
+          <p:nvPr/>
+        </p:nvSpPr>
+        <p:spPr>
+          <a:xfrm>
+            <a:off x="8122295" y="8620274"/>
+            <a:ext cx="1776710" cy="1028551"/>
           </a:xfrm>
           <a:prstGeom prst="roundRect">
             <a:avLst>
-              <a:gd name="adj" fmla="val 5570"/>
+              <a:gd name="adj" fmla="val 5556"/>
             </a:avLst>
           </a:prstGeom>
           <a:solidFill>
@@ -9760,13 +8395,13 @@
       </p:sp>
       <p:sp>
         <p:nvSpPr>
-          <p:cNvPr id="253" name="Shape 251"/>
-          <p:cNvSpPr/>
-          <p:nvPr/>
-        </p:nvSpPr>
-        <p:spPr>
-          <a:xfrm>
-            <a:off x="8246120" y="8785771"/>
+          <p:cNvPr id="212" name="Shape 209"/>
+          <p:cNvSpPr/>
+          <p:nvPr/>
+        </p:nvSpPr>
+        <p:spPr>
+          <a:xfrm>
+            <a:off x="8246120" y="8784580"/>
             <a:ext cx="76200" cy="76200"/>
           </a:xfrm>
           <a:prstGeom prst="ellipse">
@@ -9780,13 +8415,13 @@
       </p:sp>
       <p:sp>
         <p:nvSpPr>
-          <p:cNvPr id="254" name="Text 252"/>
-          <p:cNvSpPr/>
-          <p:nvPr/>
-        </p:nvSpPr>
-        <p:spPr>
-          <a:xfrm>
-            <a:off x="8379470" y="8757196"/>
+          <p:cNvPr id="213" name="Text 210"/>
+          <p:cNvSpPr/>
+          <p:nvPr/>
+        </p:nvSpPr>
+        <p:spPr>
+          <a:xfrm>
+            <a:off x="8379470" y="8756005"/>
             <a:ext cx="626418" cy="171450"/>
           </a:xfrm>
           <a:prstGeom prst="rect">
@@ -9824,13 +8459,13 @@
       </p:sp>
       <p:sp>
         <p:nvSpPr>
-          <p:cNvPr id="255" name="Text 253"/>
-          <p:cNvSpPr/>
-          <p:nvPr/>
-        </p:nvSpPr>
-        <p:spPr>
-          <a:xfrm>
-            <a:off x="8246120" y="8928646"/>
+          <p:cNvPr id="214" name="Text 211"/>
+          <p:cNvSpPr/>
+          <p:nvPr/>
+        </p:nvSpPr>
+        <p:spPr>
+          <a:xfrm>
+            <a:off x="8246120" y="8927455"/>
             <a:ext cx="1681966" cy="226963"/>
           </a:xfrm>
           <a:prstGeom prst="rect">
@@ -9868,13 +8503,13 @@
       </p:sp>
       <p:sp>
         <p:nvSpPr>
-          <p:cNvPr id="256" name="Text 254"/>
-          <p:cNvSpPr/>
-          <p:nvPr/>
-        </p:nvSpPr>
-        <p:spPr>
-          <a:xfrm>
-            <a:off x="8246120" y="9146084"/>
+          <p:cNvPr id="215" name="Text 212"/>
+          <p:cNvSpPr/>
+          <p:nvPr/>
+        </p:nvSpPr>
+        <p:spPr>
+          <a:xfrm>
+            <a:off x="8246120" y="9144893"/>
             <a:ext cx="1605260" cy="415826"/>
           </a:xfrm>
           <a:prstGeom prst="rect">
@@ -9912,18 +8547,18 @@
       </p:sp>
       <p:sp>
         <p:nvSpPr>
-          <p:cNvPr id="257" name="Shape 255"/>
-          <p:cNvSpPr/>
-          <p:nvPr/>
-        </p:nvSpPr>
-        <p:spPr>
-          <a:xfrm>
-            <a:off x="9994255" y="8622804"/>
-            <a:ext cx="1776561" cy="1026021"/>
+          <p:cNvPr id="216" name="Shape 213"/>
+          <p:cNvSpPr/>
+          <p:nvPr/>
+        </p:nvSpPr>
+        <p:spPr>
+          <a:xfrm>
+            <a:off x="9994255" y="8620274"/>
+            <a:ext cx="1776561" cy="1028551"/>
           </a:xfrm>
           <a:prstGeom prst="roundRect">
             <a:avLst>
-              <a:gd name="adj" fmla="val 5570"/>
+              <a:gd name="adj" fmla="val 5556"/>
             </a:avLst>
           </a:prstGeom>
           <a:solidFill>
@@ -9939,13 +8574,13 @@
       </p:sp>
       <p:sp>
         <p:nvSpPr>
-          <p:cNvPr id="258" name="Text 256"/>
-          <p:cNvSpPr/>
-          <p:nvPr/>
-        </p:nvSpPr>
-        <p:spPr>
-          <a:xfrm>
-            <a:off x="10118080" y="8743801"/>
+          <p:cNvPr id="217" name="Text 214"/>
+          <p:cNvSpPr/>
+          <p:nvPr/>
+        </p:nvSpPr>
+        <p:spPr>
+          <a:xfrm>
+            <a:off x="10118080" y="8742462"/>
             <a:ext cx="1605111" cy="415826"/>
           </a:xfrm>
           <a:prstGeom prst="rect">
@@ -9983,13 +8618,13 @@
       </p:sp>
       <p:sp>
         <p:nvSpPr>
-          <p:cNvPr id="259" name="Text 257"/>
-          <p:cNvSpPr/>
-          <p:nvPr/>
-        </p:nvSpPr>
-        <p:spPr>
-          <a:xfrm>
-            <a:off x="10118080" y="9150102"/>
+          <p:cNvPr id="218" name="Text 215"/>
+          <p:cNvSpPr/>
+          <p:nvPr/>
+        </p:nvSpPr>
+        <p:spPr>
+          <a:xfrm>
+            <a:off x="10118080" y="9148763"/>
             <a:ext cx="1605111" cy="415826"/>
           </a:xfrm>
           <a:prstGeom prst="rect">
@@ -10027,18 +8662,18 @@
       </p:sp>
       <p:sp>
         <p:nvSpPr>
-          <p:cNvPr id="260" name="Shape 258"/>
-          <p:cNvSpPr/>
-          <p:nvPr/>
-        </p:nvSpPr>
-        <p:spPr>
-          <a:xfrm>
-            <a:off x="11866066" y="8622804"/>
-            <a:ext cx="1776710" cy="1026021"/>
+          <p:cNvPr id="219" name="Shape 216"/>
+          <p:cNvSpPr/>
+          <p:nvPr/>
+        </p:nvSpPr>
+        <p:spPr>
+          <a:xfrm>
+            <a:off x="11866066" y="8620274"/>
+            <a:ext cx="1776710" cy="1028551"/>
           </a:xfrm>
           <a:prstGeom prst="roundRect">
             <a:avLst>
-              <a:gd name="adj" fmla="val 5570"/>
+              <a:gd name="adj" fmla="val 5556"/>
             </a:avLst>
           </a:prstGeom>
           <a:solidFill>
@@ -10054,13 +8689,13 @@
       </p:sp>
       <p:sp>
         <p:nvSpPr>
-          <p:cNvPr id="261" name="Text 259"/>
-          <p:cNvSpPr/>
-          <p:nvPr/>
-        </p:nvSpPr>
-        <p:spPr>
-          <a:xfrm>
-            <a:off x="11989891" y="8932664"/>
+          <p:cNvPr id="220" name="Text 217"/>
+          <p:cNvSpPr/>
+          <p:nvPr/>
+        </p:nvSpPr>
+        <p:spPr>
+          <a:xfrm>
+            <a:off x="11989891" y="8931325"/>
             <a:ext cx="1681966" cy="226963"/>
           </a:xfrm>
           <a:prstGeom prst="rect">
@@ -10098,13 +8733,13 @@
       </p:sp>
       <p:sp>
         <p:nvSpPr>
-          <p:cNvPr id="262" name="Text 260"/>
-          <p:cNvSpPr/>
-          <p:nvPr/>
-        </p:nvSpPr>
-        <p:spPr>
-          <a:xfrm>
-            <a:off x="11989891" y="9150102"/>
+          <p:cNvPr id="221" name="Text 218"/>
+          <p:cNvSpPr/>
+          <p:nvPr/>
+        </p:nvSpPr>
+        <p:spPr>
+          <a:xfrm>
+            <a:off x="11989891" y="9148763"/>
             <a:ext cx="1681966" cy="226963"/>
           </a:xfrm>
           <a:prstGeom prst="rect">
@@ -10142,18 +8777,18 @@
       </p:sp>
       <p:sp>
         <p:nvSpPr>
-          <p:cNvPr id="263" name="Shape 261"/>
-          <p:cNvSpPr/>
-          <p:nvPr/>
-        </p:nvSpPr>
-        <p:spPr>
-          <a:xfrm>
-            <a:off x="13738027" y="8622804"/>
-            <a:ext cx="1776710" cy="1026021"/>
+          <p:cNvPr id="222" name="Shape 219"/>
+          <p:cNvSpPr/>
+          <p:nvPr/>
+        </p:nvSpPr>
+        <p:spPr>
+          <a:xfrm>
+            <a:off x="13738027" y="8620274"/>
+            <a:ext cx="1776710" cy="1028551"/>
           </a:xfrm>
           <a:prstGeom prst="roundRect">
             <a:avLst>
-              <a:gd name="adj" fmla="val 5570"/>
+              <a:gd name="adj" fmla="val 5556"/>
             </a:avLst>
           </a:prstGeom>
           <a:solidFill>
@@ -10169,13 +8804,13 @@
       </p:sp>
       <p:sp>
         <p:nvSpPr>
-          <p:cNvPr id="264" name="Text 262"/>
-          <p:cNvSpPr/>
-          <p:nvPr/>
-        </p:nvSpPr>
-        <p:spPr>
-          <a:xfrm>
-            <a:off x="13861852" y="8743801"/>
+          <p:cNvPr id="223" name="Text 220"/>
+          <p:cNvSpPr/>
+          <p:nvPr/>
+        </p:nvSpPr>
+        <p:spPr>
+          <a:xfrm>
+            <a:off x="13861852" y="8742462"/>
             <a:ext cx="1605260" cy="415826"/>
           </a:xfrm>
           <a:prstGeom prst="rect">
@@ -10213,13 +8848,13 @@
       </p:sp>
       <p:sp>
         <p:nvSpPr>
-          <p:cNvPr id="265" name="Text 263"/>
-          <p:cNvSpPr/>
-          <p:nvPr/>
-        </p:nvSpPr>
-        <p:spPr>
-          <a:xfrm>
-            <a:off x="13861852" y="9150102"/>
+          <p:cNvPr id="224" name="Text 221"/>
+          <p:cNvSpPr/>
+          <p:nvPr/>
+        </p:nvSpPr>
+        <p:spPr>
+          <a:xfrm>
+            <a:off x="13861852" y="9148763"/>
             <a:ext cx="1605260" cy="415826"/>
           </a:xfrm>
           <a:prstGeom prst="rect">
@@ -10257,18 +8892,18 @@
       </p:sp>
       <p:sp>
         <p:nvSpPr>
-          <p:cNvPr id="266" name="Shape 264"/>
-          <p:cNvSpPr/>
-          <p:nvPr/>
-        </p:nvSpPr>
-        <p:spPr>
-          <a:xfrm>
-            <a:off x="15609987" y="8622804"/>
-            <a:ext cx="2220664" cy="1026021"/>
+          <p:cNvPr id="225" name="Shape 222"/>
+          <p:cNvSpPr/>
+          <p:nvPr/>
+        </p:nvSpPr>
+        <p:spPr>
+          <a:xfrm>
+            <a:off x="15609987" y="8620274"/>
+            <a:ext cx="2220664" cy="1028551"/>
           </a:xfrm>
           <a:prstGeom prst="roundRect">
             <a:avLst>
-              <a:gd name="adj" fmla="val 5570"/>
+              <a:gd name="adj" fmla="val 5556"/>
             </a:avLst>
           </a:prstGeom>
           <a:solidFill>
@@ -10284,13 +8919,13 @@
       </p:sp>
       <p:sp>
         <p:nvSpPr>
-          <p:cNvPr id="267" name="Text 265"/>
-          <p:cNvSpPr/>
-          <p:nvPr/>
-        </p:nvSpPr>
-        <p:spPr>
-          <a:xfrm>
-            <a:off x="15733812" y="8729514"/>
+          <p:cNvPr id="226" name="Text 223"/>
+          <p:cNvSpPr/>
+          <p:nvPr/>
+        </p:nvSpPr>
+        <p:spPr>
+          <a:xfrm>
+            <a:off x="15733812" y="8728174"/>
             <a:ext cx="2170316" cy="226963"/>
           </a:xfrm>
           <a:prstGeom prst="rect">
@@ -10328,13 +8963,13 @@
       </p:sp>
       <p:sp>
         <p:nvSpPr>
-          <p:cNvPr id="268" name="Text 266"/>
-          <p:cNvSpPr/>
-          <p:nvPr/>
-        </p:nvSpPr>
-        <p:spPr>
-          <a:xfrm>
-            <a:off x="15733812" y="8946952"/>
+          <p:cNvPr id="227" name="Text 224"/>
+          <p:cNvSpPr/>
+          <p:nvPr/>
+        </p:nvSpPr>
+        <p:spPr>
+          <a:xfrm>
+            <a:off x="15733812" y="8945612"/>
             <a:ext cx="2049214" cy="415826"/>
           </a:xfrm>
           <a:prstGeom prst="rect">
@@ -10372,13 +9007,13 @@
       </p:sp>
       <p:sp>
         <p:nvSpPr>
-          <p:cNvPr id="269" name="Text 267"/>
-          <p:cNvSpPr/>
-          <p:nvPr/>
-        </p:nvSpPr>
-        <p:spPr>
-          <a:xfrm>
-            <a:off x="15733812" y="9353252"/>
+          <p:cNvPr id="228" name="Text 225"/>
+          <p:cNvSpPr/>
+          <p:nvPr/>
+        </p:nvSpPr>
+        <p:spPr>
+          <a:xfrm>
+            <a:off x="15733812" y="9351913"/>
             <a:ext cx="2170316" cy="226963"/>
           </a:xfrm>
           <a:prstGeom prst="rect">
@@ -10416,7 +9051,7 @@
       </p:sp>
       <p:sp>
         <p:nvSpPr>
-          <p:cNvPr id="270" name="Text 268"/>
+          <p:cNvPr id="229" name="Text 226"/>
           <p:cNvSpPr/>
           <p:nvPr/>
         </p:nvSpPr>
@@ -10457,7 +9092,7 @@
       </p:sp>
       <p:sp>
         <p:nvSpPr>
-          <p:cNvPr id="271" name="Text 269"/>
+          <p:cNvPr id="230" name="Text 227"/>
           <p:cNvSpPr/>
           <p:nvPr/>
         </p:nvSpPr>
